--- a/content/05-teaching-resources/slides/core/17-environmental-legislation.pptx
+++ b/content/05-teaching-resources/slides/core/17-environmental-legislation.pptx
@@ -14,6 +14,10 @@
     <p:sldId id="262" r:id="rId14"/>
     <p:sldId id="263" r:id="rId15"/>
     <p:sldId id="264" r:id="rId16"/>
+    <p:sldId id="265" r:id="rId17"/>
+    <p:sldId id="266" r:id="rId18"/>
+    <p:sldId id="267" r:id="rId19"/>
+    <p:sldId id="268" r:id="rId20"/>
   </p:sldIdLst>
   <p:sldSz cx="12191695" cy="6858000" type="screen4x3"/>
   <p:notesSz cx="6858000" cy="9144000"/>
@@ -510,7 +514,22 @@
           <a:lstStyle/>
           <a:p>
             <a:r>
-              <a:t>Everyone in the organisation shares responsibility for compliance, led by management.</a:t>
+              <a:t>Answers:</a:t>
+            </a:r>
+          </a:p>
+          <a:p>
+            <a:r>
+              <a:t>1. The Environmental Protection Act.</a:t>
+            </a:r>
+          </a:p>
+          <a:p>
+            <a:r>
+              <a:t>2. The Clean Air Act.</a:t>
+            </a:r>
+          </a:p>
+          <a:p>
+            <a:r>
+              <a:t>3. By a licensed carrier, with records.</a:t>
             </a:r>
           </a:p>
         </p:txBody>
@@ -580,7 +599,22 @@
           <a:lstStyle/>
           <a:p>
             <a:r>
-              <a:t>Give students a few minutes to answer on mini whiteboards or paper, then reveal the answers on the next slide.</a:t>
+              <a:t>Answers:</a:t>
+            </a:r>
+          </a:p>
+          <a:p>
+            <a:r>
+              <a:t>1. Environmental management systems.</a:t>
+            </a:r>
+          </a:p>
+          <a:p>
+            <a:r>
+              <a:t>2. E.g. lower costs, compliance, reputation.</a:t>
+            </a:r>
+          </a:p>
+          <a:p>
+            <a:r>
+              <a:t>3. E.g. fines, prosecution, lost contracts.</a:t>
             </a:r>
           </a:p>
         </p:txBody>
@@ -650,7 +684,7 @@
           <a:lstStyle/>
           <a:p>
             <a:r>
-              <a:t>Talk through any answers the class found difficult.</a:t>
+              <a:t>Everyone in the organisation shares responsibility for compliance, led by management.</a:t>
             </a:r>
           </a:p>
         </p:txBody>
@@ -676,6 +710,146 @@
 </file>
 
 <file path=ppt/notesSlides/notesSlide4.xml><?xml version="1.0" encoding="utf-8"?>
+<p:notes xmlns:a="http://schemas.openxmlformats.org/drawingml/2006/main" xmlns:p="http://schemas.openxmlformats.org/presentationml/2006/main" xmlns:r="http://schemas.openxmlformats.org/officeDocument/2006/relationships">
+  <p:cSld>
+    <p:spTree>
+      <p:nvGrpSpPr>
+        <p:cNvPr id="1" name=""/>
+        <p:cNvGrpSpPr/>
+        <p:nvPr/>
+      </p:nvGrpSpPr>
+      <p:grpSpPr>
+        <a:xfrm>
+          <a:off x="0" y="0"/>
+          <a:ext cx="0" cy="0"/>
+          <a:chOff x="0" y="0"/>
+          <a:chExt cx="0" cy="0"/>
+        </a:xfrm>
+      </p:grpSpPr>
+      <p:sp>
+        <p:nvSpPr>
+          <p:cNvPr id="2" name="Slide Image Placeholder 1"/>
+          <p:cNvSpPr>
+            <a:spLocks noGrp="1"/>
+          </p:cNvSpPr>
+          <p:nvPr>
+            <p:ph type="sldImg" idx="2"/>
+          </p:nvPr>
+        </p:nvSpPr>
+        <p:spPr/>
+      </p:sp>
+      <p:sp>
+        <p:nvSpPr>
+          <p:cNvPr id="3" name="Notes Placeholder 2"/>
+          <p:cNvSpPr>
+            <a:spLocks noGrp="1"/>
+          </p:cNvSpPr>
+          <p:nvPr>
+            <p:ph type="body" idx="3" sz="quarter"/>
+          </p:nvPr>
+        </p:nvSpPr>
+        <p:spPr/>
+        <p:txBody>
+          <a:bodyPr/>
+          <a:lstStyle/>
+          <a:p>
+            <a:r>
+              <a:t>Give students a few minutes to answer on mini whiteboards or paper, then reveal the answers on the next slide.</a:t>
+            </a:r>
+          </a:p>
+        </p:txBody>
+      </p:sp>
+      <p:sp>
+        <p:nvSpPr>
+          <p:cNvPr id="4" name="Slide Number Placeholder 3"/>
+          <p:cNvSpPr>
+            <a:spLocks noGrp="1"/>
+          </p:cNvSpPr>
+          <p:nvPr>
+            <p:ph type="sldNum" idx="5" sz="quarter"/>
+          </p:nvPr>
+        </p:nvSpPr>
+        <p:spPr/>
+      </p:sp>
+    </p:spTree>
+  </p:cSld>
+  <p:clrMapOvr>
+    <a:masterClrMapping/>
+  </p:clrMapOvr>
+</p:notes>
+</file>
+
+<file path=ppt/notesSlides/notesSlide5.xml><?xml version="1.0" encoding="utf-8"?>
+<p:notes xmlns:a="http://schemas.openxmlformats.org/drawingml/2006/main" xmlns:p="http://schemas.openxmlformats.org/presentationml/2006/main" xmlns:r="http://schemas.openxmlformats.org/officeDocument/2006/relationships">
+  <p:cSld>
+    <p:spTree>
+      <p:nvGrpSpPr>
+        <p:cNvPr id="1" name=""/>
+        <p:cNvGrpSpPr/>
+        <p:nvPr/>
+      </p:nvGrpSpPr>
+      <p:grpSpPr>
+        <a:xfrm>
+          <a:off x="0" y="0"/>
+          <a:ext cx="0" cy="0"/>
+          <a:chOff x="0" y="0"/>
+          <a:chExt cx="0" cy="0"/>
+        </a:xfrm>
+      </p:grpSpPr>
+      <p:sp>
+        <p:nvSpPr>
+          <p:cNvPr id="2" name="Slide Image Placeholder 1"/>
+          <p:cNvSpPr>
+            <a:spLocks noGrp="1"/>
+          </p:cNvSpPr>
+          <p:nvPr>
+            <p:ph type="sldImg" idx="2"/>
+          </p:nvPr>
+        </p:nvSpPr>
+        <p:spPr/>
+      </p:sp>
+      <p:sp>
+        <p:nvSpPr>
+          <p:cNvPr id="3" name="Notes Placeholder 2"/>
+          <p:cNvSpPr>
+            <a:spLocks noGrp="1"/>
+          </p:cNvSpPr>
+          <p:nvPr>
+            <p:ph type="body" idx="3" sz="quarter"/>
+          </p:nvPr>
+        </p:nvSpPr>
+        <p:spPr/>
+        <p:txBody>
+          <a:bodyPr/>
+          <a:lstStyle/>
+          <a:p>
+            <a:r>
+              <a:t>Talk through any answers the class found difficult.</a:t>
+            </a:r>
+          </a:p>
+        </p:txBody>
+      </p:sp>
+      <p:sp>
+        <p:nvSpPr>
+          <p:cNvPr id="4" name="Slide Number Placeholder 3"/>
+          <p:cNvSpPr>
+            <a:spLocks noGrp="1"/>
+          </p:cNvSpPr>
+          <p:nvPr>
+            <p:ph type="sldNum" idx="5" sz="quarter"/>
+          </p:nvPr>
+        </p:nvSpPr>
+        <p:spPr/>
+      </p:sp>
+    </p:spTree>
+  </p:cSld>
+  <p:clrMapOvr>
+    <a:masterClrMapping/>
+  </p:clrMapOvr>
+</p:notes>
+</file>
+
+<file path=ppt/notesSlides/notesSlide6.xml><?xml version="1.0" encoding="utf-8"?>
 <p:notes xmlns:a="http://schemas.openxmlformats.org/drawingml/2006/main" xmlns:p="http://schemas.openxmlformats.org/presentationml/2006/main" xmlns:r="http://schemas.openxmlformats.org/officeDocument/2006/relationships">
   <p:cSld>
     <p:spTree>
@@ -4045,6 +4219,2355 @@
 </p:sld>
 </file>
 
+<file path=ppt/slides/slide10.xml><?xml version="1.0" encoding="utf-8"?>
+<p:sld xmlns:a="http://schemas.openxmlformats.org/drawingml/2006/main" xmlns:p="http://schemas.openxmlformats.org/presentationml/2006/main" xmlns:r="http://schemas.openxmlformats.org/officeDocument/2006/relationships">
+  <p:cSld>
+    <p:bg>
+      <p:bgPr>
+        <a:solidFill>
+          <a:srgbClr val="FFFFFF"/>
+        </a:solidFill>
+        <a:effectLst/>
+      </p:bgPr>
+    </p:bg>
+    <p:spTree>
+      <p:nvGrpSpPr>
+        <p:cNvPr id="1" name=""/>
+        <p:cNvGrpSpPr/>
+        <p:nvPr/>
+      </p:nvGrpSpPr>
+      <p:grpSpPr/>
+      <p:sp>
+        <p:nvSpPr>
+          <p:cNvPr id="2" name="TextBox 1"/>
+          <p:cNvSpPr txBox="1"/>
+          <p:nvPr/>
+        </p:nvSpPr>
+        <p:spPr>
+          <a:xfrm>
+            <a:off x="548640" y="320040"/>
+            <a:ext cx="11094415" cy="274320"/>
+          </a:xfrm>
+          <a:prstGeom prst="rect">
+            <a:avLst/>
+          </a:prstGeom>
+          <a:noFill/>
+        </p:spPr>
+        <p:txBody>
+          <a:bodyPr wrap="square" anchor="t" lIns="0" rIns="0" tIns="0" bIns="0"/>
+          <a:lstStyle/>
+          <a:p>
+            <a:pPr algn="l"/>
+            <a:r>
+              <a:rPr sz="1100" b="1" i="0">
+                <a:solidFill>
+                  <a:srgbClr val="54595D"/>
+                </a:solidFill>
+                <a:latin typeface="Calibri"/>
+              </a:rPr>
+              <a:t>ENGINEERING CORE  ·  Core topic 12</a:t>
+            </a:r>
+          </a:p>
+        </p:txBody>
+      </p:sp>
+      <p:sp>
+        <p:nvSpPr>
+          <p:cNvPr id="3" name="TextBox 2"/>
+          <p:cNvSpPr txBox="1"/>
+          <p:nvPr/>
+        </p:nvSpPr>
+        <p:spPr>
+          <a:xfrm>
+            <a:off x="548640" y="566928"/>
+            <a:ext cx="11094415" cy="822960"/>
+          </a:xfrm>
+          <a:prstGeom prst="rect">
+            <a:avLst/>
+          </a:prstGeom>
+          <a:noFill/>
+        </p:spPr>
+        <p:txBody>
+          <a:bodyPr wrap="square" anchor="ctr" lIns="0" rIns="0" tIns="0" bIns="0"/>
+          <a:lstStyle/>
+          <a:p>
+            <a:pPr algn="l"/>
+            <a:r>
+              <a:rPr sz="3200" b="1" i="0">
+                <a:solidFill>
+                  <a:srgbClr val="03306E"/>
+                </a:solidFill>
+                <a:latin typeface="Cambria"/>
+              </a:rPr>
+              <a:t>Check your understanding</a:t>
+            </a:r>
+          </a:p>
+        </p:txBody>
+      </p:sp>
+      <p:sp>
+        <p:nvSpPr>
+          <p:cNvPr id="4" name="TextBox 3"/>
+          <p:cNvSpPr txBox="1"/>
+          <p:nvPr/>
+        </p:nvSpPr>
+        <p:spPr>
+          <a:xfrm>
+            <a:off x="548640" y="6446520"/>
+            <a:ext cx="8229600" cy="274320"/>
+          </a:xfrm>
+          <a:prstGeom prst="rect">
+            <a:avLst/>
+          </a:prstGeom>
+          <a:noFill/>
+        </p:spPr>
+        <p:txBody>
+          <a:bodyPr wrap="square" anchor="t" lIns="0" rIns="0" tIns="0" bIns="0"/>
+          <a:lstStyle/>
+          <a:p>
+            <a:pPr algn="l"/>
+            <a:r>
+              <a:rPr sz="1000" b="0" i="0">
+                <a:solidFill>
+                  <a:srgbClr val="54595D"/>
+                </a:solidFill>
+                <a:latin typeface="Calibri"/>
+              </a:rPr>
+              <a:t>Design and Development for Engineering and Manufacturing T Level  ·  Environmental Legislation and Waste</a:t>
+            </a:r>
+          </a:p>
+        </p:txBody>
+      </p:sp>
+      <p:sp>
+        <p:nvSpPr>
+          <p:cNvPr id="5" name="TextBox 4"/>
+          <p:cNvSpPr txBox="1"/>
+          <p:nvPr/>
+        </p:nvSpPr>
+        <p:spPr>
+          <a:xfrm>
+            <a:off x="10728655" y="6446520"/>
+            <a:ext cx="914400" cy="274320"/>
+          </a:xfrm>
+          <a:prstGeom prst="rect">
+            <a:avLst/>
+          </a:prstGeom>
+          <a:noFill/>
+        </p:spPr>
+        <p:txBody>
+          <a:bodyPr wrap="square" anchor="t" lIns="0" rIns="0" tIns="0" bIns="0"/>
+          <a:lstStyle/>
+          <a:p>
+            <a:pPr algn="r"/>
+            <a:r>
+              <a:rPr sz="1000" b="0" i="0">
+                <a:solidFill>
+                  <a:srgbClr val="54595D"/>
+                </a:solidFill>
+                <a:latin typeface="Calibri"/>
+              </a:rPr>
+              <a:t>10</a:t>
+            </a:r>
+          </a:p>
+        </p:txBody>
+      </p:sp>
+      <p:sp>
+        <p:nvSpPr>
+          <p:cNvPr id="6" name="Oval 5"/>
+          <p:cNvSpPr/>
+          <p:nvPr/>
+        </p:nvSpPr>
+        <p:spPr>
+          <a:xfrm>
+            <a:off x="548640" y="1618488"/>
+            <a:ext cx="411480" cy="411480"/>
+          </a:xfrm>
+          <a:prstGeom prst="ellipse">
+            <a:avLst/>
+          </a:prstGeom>
+          <a:solidFill>
+            <a:srgbClr val="F2B705"/>
+          </a:solidFill>
+          <a:ln>
+            <a:noFill/>
+          </a:ln>
+          <a:effectLst/>
+        </p:spPr>
+        <p:style>
+          <a:lnRef idx="1">
+            <a:schemeClr val="accent1"/>
+          </a:lnRef>
+          <a:fillRef idx="3">
+            <a:schemeClr val="accent1"/>
+          </a:fillRef>
+          <a:effectRef idx="2">
+            <a:schemeClr val="accent1"/>
+          </a:effectRef>
+          <a:fontRef idx="minor">
+            <a:schemeClr val="lt1"/>
+          </a:fontRef>
+        </p:style>
+        <p:txBody>
+          <a:bodyPr rtlCol="0" anchor="ctr" lIns="0" rIns="0" tIns="0" bIns="0"/>
+          <a:lstStyle/>
+          <a:p>
+            <a:pPr algn="ctr"/>
+            <a:r>
+              <a:rPr sz="1400" b="1">
+                <a:solidFill>
+                  <a:srgbClr val="202122"/>
+                </a:solidFill>
+                <a:latin typeface="Calibri"/>
+              </a:rPr>
+              <a:t>1</a:t>
+            </a:r>
+          </a:p>
+        </p:txBody>
+      </p:sp>
+      <p:sp>
+        <p:nvSpPr>
+          <p:cNvPr id="7" name="TextBox 6"/>
+          <p:cNvSpPr txBox="1"/>
+          <p:nvPr/>
+        </p:nvSpPr>
+        <p:spPr>
+          <a:xfrm>
+            <a:off x="1234440" y="1600200"/>
+            <a:ext cx="10408615" cy="1030986"/>
+          </a:xfrm>
+          <a:prstGeom prst="rect">
+            <a:avLst/>
+          </a:prstGeom>
+          <a:noFill/>
+        </p:spPr>
+        <p:txBody>
+          <a:bodyPr wrap="square" anchor="t" lIns="0" rIns="0" tIns="0" bIns="0"/>
+          <a:lstStyle/>
+          <a:p>
+            <a:pPr algn="l"/>
+            <a:r>
+              <a:rPr sz="2200" b="0" i="0">
+                <a:solidFill>
+                  <a:srgbClr val="202122"/>
+                </a:solidFill>
+                <a:latin typeface="Calibri"/>
+              </a:rPr>
+              <a:t>What does ISO 14001 cover?</a:t>
+            </a:r>
+          </a:p>
+        </p:txBody>
+      </p:sp>
+      <p:sp>
+        <p:nvSpPr>
+          <p:cNvPr id="8" name="Oval 7"/>
+          <p:cNvSpPr/>
+          <p:nvPr/>
+        </p:nvSpPr>
+        <p:spPr>
+          <a:xfrm>
+            <a:off x="548640" y="2814066"/>
+            <a:ext cx="411480" cy="411480"/>
+          </a:xfrm>
+          <a:prstGeom prst="ellipse">
+            <a:avLst/>
+          </a:prstGeom>
+          <a:solidFill>
+            <a:srgbClr val="F2B705"/>
+          </a:solidFill>
+          <a:ln>
+            <a:noFill/>
+          </a:ln>
+          <a:effectLst/>
+        </p:spPr>
+        <p:style>
+          <a:lnRef idx="1">
+            <a:schemeClr val="accent1"/>
+          </a:lnRef>
+          <a:fillRef idx="3">
+            <a:schemeClr val="accent1"/>
+          </a:fillRef>
+          <a:effectRef idx="2">
+            <a:schemeClr val="accent1"/>
+          </a:effectRef>
+          <a:fontRef idx="minor">
+            <a:schemeClr val="lt1"/>
+          </a:fontRef>
+        </p:style>
+        <p:txBody>
+          <a:bodyPr rtlCol="0" anchor="ctr" lIns="0" rIns="0" tIns="0" bIns="0"/>
+          <a:lstStyle/>
+          <a:p>
+            <a:pPr algn="ctr"/>
+            <a:r>
+              <a:rPr sz="1400" b="1">
+                <a:solidFill>
+                  <a:srgbClr val="202122"/>
+                </a:solidFill>
+                <a:latin typeface="Calibri"/>
+              </a:rPr>
+              <a:t>2</a:t>
+            </a:r>
+          </a:p>
+        </p:txBody>
+      </p:sp>
+      <p:sp>
+        <p:nvSpPr>
+          <p:cNvPr id="9" name="TextBox 8"/>
+          <p:cNvSpPr txBox="1"/>
+          <p:nvPr/>
+        </p:nvSpPr>
+        <p:spPr>
+          <a:xfrm>
+            <a:off x="1234440" y="2795778"/>
+            <a:ext cx="10408615" cy="1030986"/>
+          </a:xfrm>
+          <a:prstGeom prst="rect">
+            <a:avLst/>
+          </a:prstGeom>
+          <a:noFill/>
+        </p:spPr>
+        <p:txBody>
+          <a:bodyPr wrap="square" anchor="t" lIns="0" rIns="0" tIns="0" bIns="0"/>
+          <a:lstStyle/>
+          <a:p>
+            <a:pPr algn="l"/>
+            <a:r>
+              <a:rPr sz="2200" b="0" i="0">
+                <a:solidFill>
+                  <a:srgbClr val="202122"/>
+                </a:solidFill>
+                <a:latin typeface="Calibri"/>
+              </a:rPr>
+              <a:t>Which Act controls smoke pollution?</a:t>
+            </a:r>
+          </a:p>
+        </p:txBody>
+      </p:sp>
+      <p:sp>
+        <p:nvSpPr>
+          <p:cNvPr id="10" name="Oval 9"/>
+          <p:cNvSpPr/>
+          <p:nvPr/>
+        </p:nvSpPr>
+        <p:spPr>
+          <a:xfrm>
+            <a:off x="548640" y="4009644"/>
+            <a:ext cx="411480" cy="411480"/>
+          </a:xfrm>
+          <a:prstGeom prst="ellipse">
+            <a:avLst/>
+          </a:prstGeom>
+          <a:solidFill>
+            <a:srgbClr val="F2B705"/>
+          </a:solidFill>
+          <a:ln>
+            <a:noFill/>
+          </a:ln>
+          <a:effectLst/>
+        </p:spPr>
+        <p:style>
+          <a:lnRef idx="1">
+            <a:schemeClr val="accent1"/>
+          </a:lnRef>
+          <a:fillRef idx="3">
+            <a:schemeClr val="accent1"/>
+          </a:fillRef>
+          <a:effectRef idx="2">
+            <a:schemeClr val="accent1"/>
+          </a:effectRef>
+          <a:fontRef idx="minor">
+            <a:schemeClr val="lt1"/>
+          </a:fontRef>
+        </p:style>
+        <p:txBody>
+          <a:bodyPr rtlCol="0" anchor="ctr" lIns="0" rIns="0" tIns="0" bIns="0"/>
+          <a:lstStyle/>
+          <a:p>
+            <a:pPr algn="ctr"/>
+            <a:r>
+              <a:rPr sz="1400" b="1">
+                <a:solidFill>
+                  <a:srgbClr val="202122"/>
+                </a:solidFill>
+                <a:latin typeface="Calibri"/>
+              </a:rPr>
+              <a:t>3</a:t>
+            </a:r>
+          </a:p>
+        </p:txBody>
+      </p:sp>
+      <p:sp>
+        <p:nvSpPr>
+          <p:cNvPr id="11" name="TextBox 10"/>
+          <p:cNvSpPr txBox="1"/>
+          <p:nvPr/>
+        </p:nvSpPr>
+        <p:spPr>
+          <a:xfrm>
+            <a:off x="1234440" y="3991356"/>
+            <a:ext cx="10408615" cy="1030986"/>
+          </a:xfrm>
+          <a:prstGeom prst="rect">
+            <a:avLst/>
+          </a:prstGeom>
+          <a:noFill/>
+        </p:spPr>
+        <p:txBody>
+          <a:bodyPr wrap="square" anchor="t" lIns="0" rIns="0" tIns="0" bIns="0"/>
+          <a:lstStyle/>
+          <a:p>
+            <a:pPr algn="l"/>
+            <a:r>
+              <a:rPr sz="2200" b="0" i="0">
+                <a:solidFill>
+                  <a:srgbClr val="202122"/>
+                </a:solidFill>
+                <a:latin typeface="Calibri"/>
+              </a:rPr>
+              <a:t>Which disposal method has the lowest environmental impact?</a:t>
+            </a:r>
+          </a:p>
+        </p:txBody>
+      </p:sp>
+      <p:sp>
+        <p:nvSpPr>
+          <p:cNvPr id="12" name="Oval 11"/>
+          <p:cNvSpPr/>
+          <p:nvPr/>
+        </p:nvSpPr>
+        <p:spPr>
+          <a:xfrm>
+            <a:off x="548640" y="5205221"/>
+            <a:ext cx="411480" cy="411480"/>
+          </a:xfrm>
+          <a:prstGeom prst="ellipse">
+            <a:avLst/>
+          </a:prstGeom>
+          <a:solidFill>
+            <a:srgbClr val="F2B705"/>
+          </a:solidFill>
+          <a:ln>
+            <a:noFill/>
+          </a:ln>
+          <a:effectLst/>
+        </p:spPr>
+        <p:style>
+          <a:lnRef idx="1">
+            <a:schemeClr val="accent1"/>
+          </a:lnRef>
+          <a:fillRef idx="3">
+            <a:schemeClr val="accent1"/>
+          </a:fillRef>
+          <a:effectRef idx="2">
+            <a:schemeClr val="accent1"/>
+          </a:effectRef>
+          <a:fontRef idx="minor">
+            <a:schemeClr val="lt1"/>
+          </a:fontRef>
+        </p:style>
+        <p:txBody>
+          <a:bodyPr rtlCol="0" anchor="ctr" lIns="0" rIns="0" tIns="0" bIns="0"/>
+          <a:lstStyle/>
+          <a:p>
+            <a:pPr algn="ctr"/>
+            <a:r>
+              <a:rPr sz="1400" b="1">
+                <a:solidFill>
+                  <a:srgbClr val="202122"/>
+                </a:solidFill>
+                <a:latin typeface="Calibri"/>
+              </a:rPr>
+              <a:t>4</a:t>
+            </a:r>
+          </a:p>
+        </p:txBody>
+      </p:sp>
+      <p:sp>
+        <p:nvSpPr>
+          <p:cNvPr id="13" name="TextBox 12"/>
+          <p:cNvSpPr txBox="1"/>
+          <p:nvPr/>
+        </p:nvSpPr>
+        <p:spPr>
+          <a:xfrm>
+            <a:off x="1234440" y="5186933"/>
+            <a:ext cx="10408615" cy="1030986"/>
+          </a:xfrm>
+          <a:prstGeom prst="rect">
+            <a:avLst/>
+          </a:prstGeom>
+          <a:noFill/>
+        </p:spPr>
+        <p:txBody>
+          <a:bodyPr wrap="square" anchor="t" lIns="0" rIns="0" tIns="0" bIns="0"/>
+          <a:lstStyle/>
+          <a:p>
+            <a:pPr algn="l"/>
+            <a:r>
+              <a:rPr sz="2200" b="0" i="0">
+                <a:solidFill>
+                  <a:srgbClr val="202122"/>
+                </a:solidFill>
+                <a:latin typeface="Calibri"/>
+              </a:rPr>
+              <a:t>What must happen to hazardous waste?</a:t>
+            </a:r>
+          </a:p>
+        </p:txBody>
+      </p:sp>
+    </p:spTree>
+  </p:cSld>
+  <p:clrMapOvr>
+    <a:masterClrMapping/>
+  </p:clrMapOvr>
+</p:sld>
+</file>
+
+<file path=ppt/slides/slide11.xml><?xml version="1.0" encoding="utf-8"?>
+<p:sld xmlns:a="http://schemas.openxmlformats.org/drawingml/2006/main" xmlns:p="http://schemas.openxmlformats.org/presentationml/2006/main" xmlns:r="http://schemas.openxmlformats.org/officeDocument/2006/relationships">
+  <p:cSld>
+    <p:bg>
+      <p:bgPr>
+        <a:solidFill>
+          <a:srgbClr val="FFFFFF"/>
+        </a:solidFill>
+        <a:effectLst/>
+      </p:bgPr>
+    </p:bg>
+    <p:spTree>
+      <p:nvGrpSpPr>
+        <p:cNvPr id="1" name=""/>
+        <p:cNvGrpSpPr/>
+        <p:nvPr/>
+      </p:nvGrpSpPr>
+      <p:grpSpPr/>
+      <p:sp>
+        <p:nvSpPr>
+          <p:cNvPr id="2" name="TextBox 1"/>
+          <p:cNvSpPr txBox="1"/>
+          <p:nvPr/>
+        </p:nvSpPr>
+        <p:spPr>
+          <a:xfrm>
+            <a:off x="548640" y="320040"/>
+            <a:ext cx="11094415" cy="274320"/>
+          </a:xfrm>
+          <a:prstGeom prst="rect">
+            <a:avLst/>
+          </a:prstGeom>
+          <a:noFill/>
+        </p:spPr>
+        <p:txBody>
+          <a:bodyPr wrap="square" anchor="t" lIns="0" rIns="0" tIns="0" bIns="0"/>
+          <a:lstStyle/>
+          <a:p>
+            <a:pPr algn="l"/>
+            <a:r>
+              <a:rPr sz="1100" b="1" i="0">
+                <a:solidFill>
+                  <a:srgbClr val="54595D"/>
+                </a:solidFill>
+                <a:latin typeface="Calibri"/>
+              </a:rPr>
+              <a:t>ENGINEERING CORE  ·  Core topic 12</a:t>
+            </a:r>
+          </a:p>
+        </p:txBody>
+      </p:sp>
+      <p:sp>
+        <p:nvSpPr>
+          <p:cNvPr id="3" name="TextBox 2"/>
+          <p:cNvSpPr txBox="1"/>
+          <p:nvPr/>
+        </p:nvSpPr>
+        <p:spPr>
+          <a:xfrm>
+            <a:off x="548640" y="566928"/>
+            <a:ext cx="11094415" cy="822960"/>
+          </a:xfrm>
+          <a:prstGeom prst="rect">
+            <a:avLst/>
+          </a:prstGeom>
+          <a:noFill/>
+        </p:spPr>
+        <p:txBody>
+          <a:bodyPr wrap="square" anchor="ctr" lIns="0" rIns="0" tIns="0" bIns="0"/>
+          <a:lstStyle/>
+          <a:p>
+            <a:pPr algn="l"/>
+            <a:r>
+              <a:rPr sz="3200" b="1" i="0">
+                <a:solidFill>
+                  <a:srgbClr val="03306E"/>
+                </a:solidFill>
+                <a:latin typeface="Cambria"/>
+              </a:rPr>
+              <a:t>Answers</a:t>
+            </a:r>
+          </a:p>
+        </p:txBody>
+      </p:sp>
+      <p:sp>
+        <p:nvSpPr>
+          <p:cNvPr id="4" name="TextBox 3"/>
+          <p:cNvSpPr txBox="1"/>
+          <p:nvPr/>
+        </p:nvSpPr>
+        <p:spPr>
+          <a:xfrm>
+            <a:off x="548640" y="6446520"/>
+            <a:ext cx="8229600" cy="274320"/>
+          </a:xfrm>
+          <a:prstGeom prst="rect">
+            <a:avLst/>
+          </a:prstGeom>
+          <a:noFill/>
+        </p:spPr>
+        <p:txBody>
+          <a:bodyPr wrap="square" anchor="t" lIns="0" rIns="0" tIns="0" bIns="0"/>
+          <a:lstStyle/>
+          <a:p>
+            <a:pPr algn="l"/>
+            <a:r>
+              <a:rPr sz="1000" b="0" i="0">
+                <a:solidFill>
+                  <a:srgbClr val="54595D"/>
+                </a:solidFill>
+                <a:latin typeface="Calibri"/>
+              </a:rPr>
+              <a:t>Design and Development for Engineering and Manufacturing T Level  ·  Environmental Legislation and Waste</a:t>
+            </a:r>
+          </a:p>
+        </p:txBody>
+      </p:sp>
+      <p:sp>
+        <p:nvSpPr>
+          <p:cNvPr id="5" name="TextBox 4"/>
+          <p:cNvSpPr txBox="1"/>
+          <p:nvPr/>
+        </p:nvSpPr>
+        <p:spPr>
+          <a:xfrm>
+            <a:off x="10728655" y="6446520"/>
+            <a:ext cx="914400" cy="274320"/>
+          </a:xfrm>
+          <a:prstGeom prst="rect">
+            <a:avLst/>
+          </a:prstGeom>
+          <a:noFill/>
+        </p:spPr>
+        <p:txBody>
+          <a:bodyPr wrap="square" anchor="t" lIns="0" rIns="0" tIns="0" bIns="0"/>
+          <a:lstStyle/>
+          <a:p>
+            <a:pPr algn="r"/>
+            <a:r>
+              <a:rPr sz="1000" b="0" i="0">
+                <a:solidFill>
+                  <a:srgbClr val="54595D"/>
+                </a:solidFill>
+                <a:latin typeface="Calibri"/>
+              </a:rPr>
+              <a:t>11</a:t>
+            </a:r>
+          </a:p>
+        </p:txBody>
+      </p:sp>
+      <p:sp>
+        <p:nvSpPr>
+          <p:cNvPr id="6" name="Oval 5"/>
+          <p:cNvSpPr/>
+          <p:nvPr/>
+        </p:nvSpPr>
+        <p:spPr>
+          <a:xfrm>
+            <a:off x="548640" y="1618488"/>
+            <a:ext cx="411480" cy="411480"/>
+          </a:xfrm>
+          <a:prstGeom prst="ellipse">
+            <a:avLst/>
+          </a:prstGeom>
+          <a:solidFill>
+            <a:srgbClr val="F2B705"/>
+          </a:solidFill>
+          <a:ln>
+            <a:noFill/>
+          </a:ln>
+          <a:effectLst/>
+        </p:spPr>
+        <p:style>
+          <a:lnRef idx="1">
+            <a:schemeClr val="accent1"/>
+          </a:lnRef>
+          <a:fillRef idx="3">
+            <a:schemeClr val="accent1"/>
+          </a:fillRef>
+          <a:effectRef idx="2">
+            <a:schemeClr val="accent1"/>
+          </a:effectRef>
+          <a:fontRef idx="minor">
+            <a:schemeClr val="lt1"/>
+          </a:fontRef>
+        </p:style>
+        <p:txBody>
+          <a:bodyPr rtlCol="0" anchor="ctr" lIns="0" rIns="0" tIns="0" bIns="0"/>
+          <a:lstStyle/>
+          <a:p>
+            <a:pPr algn="ctr"/>
+            <a:r>
+              <a:rPr sz="1400" b="1">
+                <a:solidFill>
+                  <a:srgbClr val="202122"/>
+                </a:solidFill>
+                <a:latin typeface="Calibri"/>
+              </a:rPr>
+              <a:t>1</a:t>
+            </a:r>
+          </a:p>
+        </p:txBody>
+      </p:sp>
+      <p:sp>
+        <p:nvSpPr>
+          <p:cNvPr id="7" name="TextBox 6"/>
+          <p:cNvSpPr txBox="1"/>
+          <p:nvPr/>
+        </p:nvSpPr>
+        <p:spPr>
+          <a:xfrm>
+            <a:off x="1234440" y="1600200"/>
+            <a:ext cx="10408615" cy="1030986"/>
+          </a:xfrm>
+          <a:prstGeom prst="rect">
+            <a:avLst/>
+          </a:prstGeom>
+          <a:noFill/>
+        </p:spPr>
+        <p:txBody>
+          <a:bodyPr wrap="square" anchor="t" lIns="0" rIns="0" tIns="0" bIns="0"/>
+          <a:lstStyle/>
+          <a:p>
+            <a:pPr algn="l"/>
+            <a:r>
+              <a:rPr sz="1800" b="0" i="0">
+                <a:solidFill>
+                  <a:srgbClr val="54595D"/>
+                </a:solidFill>
+                <a:latin typeface="Calibri"/>
+              </a:rPr>
+              <a:t>What does ISO 14001 cover?</a:t>
+            </a:r>
+          </a:p>
+          <a:p>
+            <a:r>
+              <a:rPr sz="1800" b="1">
+                <a:solidFill>
+                  <a:srgbClr val="03306E"/>
+                </a:solidFill>
+                <a:latin typeface="Calibri"/>
+              </a:rPr>
+              <a:t>Environmental management systems.</a:t>
+            </a:r>
+          </a:p>
+        </p:txBody>
+      </p:sp>
+      <p:sp>
+        <p:nvSpPr>
+          <p:cNvPr id="8" name="Oval 7"/>
+          <p:cNvSpPr/>
+          <p:nvPr/>
+        </p:nvSpPr>
+        <p:spPr>
+          <a:xfrm>
+            <a:off x="548640" y="2814066"/>
+            <a:ext cx="411480" cy="411480"/>
+          </a:xfrm>
+          <a:prstGeom prst="ellipse">
+            <a:avLst/>
+          </a:prstGeom>
+          <a:solidFill>
+            <a:srgbClr val="F2B705"/>
+          </a:solidFill>
+          <a:ln>
+            <a:noFill/>
+          </a:ln>
+          <a:effectLst/>
+        </p:spPr>
+        <p:style>
+          <a:lnRef idx="1">
+            <a:schemeClr val="accent1"/>
+          </a:lnRef>
+          <a:fillRef idx="3">
+            <a:schemeClr val="accent1"/>
+          </a:fillRef>
+          <a:effectRef idx="2">
+            <a:schemeClr val="accent1"/>
+          </a:effectRef>
+          <a:fontRef idx="minor">
+            <a:schemeClr val="lt1"/>
+          </a:fontRef>
+        </p:style>
+        <p:txBody>
+          <a:bodyPr rtlCol="0" anchor="ctr" lIns="0" rIns="0" tIns="0" bIns="0"/>
+          <a:lstStyle/>
+          <a:p>
+            <a:pPr algn="ctr"/>
+            <a:r>
+              <a:rPr sz="1400" b="1">
+                <a:solidFill>
+                  <a:srgbClr val="202122"/>
+                </a:solidFill>
+                <a:latin typeface="Calibri"/>
+              </a:rPr>
+              <a:t>2</a:t>
+            </a:r>
+          </a:p>
+        </p:txBody>
+      </p:sp>
+      <p:sp>
+        <p:nvSpPr>
+          <p:cNvPr id="9" name="TextBox 8"/>
+          <p:cNvSpPr txBox="1"/>
+          <p:nvPr/>
+        </p:nvSpPr>
+        <p:spPr>
+          <a:xfrm>
+            <a:off x="1234440" y="2795778"/>
+            <a:ext cx="10408615" cy="1030986"/>
+          </a:xfrm>
+          <a:prstGeom prst="rect">
+            <a:avLst/>
+          </a:prstGeom>
+          <a:noFill/>
+        </p:spPr>
+        <p:txBody>
+          <a:bodyPr wrap="square" anchor="t" lIns="0" rIns="0" tIns="0" bIns="0"/>
+          <a:lstStyle/>
+          <a:p>
+            <a:pPr algn="l"/>
+            <a:r>
+              <a:rPr sz="1800" b="0" i="0">
+                <a:solidFill>
+                  <a:srgbClr val="54595D"/>
+                </a:solidFill>
+                <a:latin typeface="Calibri"/>
+              </a:rPr>
+              <a:t>Which Act controls smoke pollution?</a:t>
+            </a:r>
+          </a:p>
+          <a:p>
+            <a:r>
+              <a:rPr sz="1800" b="1">
+                <a:solidFill>
+                  <a:srgbClr val="03306E"/>
+                </a:solidFill>
+                <a:latin typeface="Calibri"/>
+              </a:rPr>
+              <a:t>The Clean Air Act.</a:t>
+            </a:r>
+          </a:p>
+        </p:txBody>
+      </p:sp>
+      <p:sp>
+        <p:nvSpPr>
+          <p:cNvPr id="10" name="Oval 9"/>
+          <p:cNvSpPr/>
+          <p:nvPr/>
+        </p:nvSpPr>
+        <p:spPr>
+          <a:xfrm>
+            <a:off x="548640" y="4009644"/>
+            <a:ext cx="411480" cy="411480"/>
+          </a:xfrm>
+          <a:prstGeom prst="ellipse">
+            <a:avLst/>
+          </a:prstGeom>
+          <a:solidFill>
+            <a:srgbClr val="F2B705"/>
+          </a:solidFill>
+          <a:ln>
+            <a:noFill/>
+          </a:ln>
+          <a:effectLst/>
+        </p:spPr>
+        <p:style>
+          <a:lnRef idx="1">
+            <a:schemeClr val="accent1"/>
+          </a:lnRef>
+          <a:fillRef idx="3">
+            <a:schemeClr val="accent1"/>
+          </a:fillRef>
+          <a:effectRef idx="2">
+            <a:schemeClr val="accent1"/>
+          </a:effectRef>
+          <a:fontRef idx="minor">
+            <a:schemeClr val="lt1"/>
+          </a:fontRef>
+        </p:style>
+        <p:txBody>
+          <a:bodyPr rtlCol="0" anchor="ctr" lIns="0" rIns="0" tIns="0" bIns="0"/>
+          <a:lstStyle/>
+          <a:p>
+            <a:pPr algn="ctr"/>
+            <a:r>
+              <a:rPr sz="1400" b="1">
+                <a:solidFill>
+                  <a:srgbClr val="202122"/>
+                </a:solidFill>
+                <a:latin typeface="Calibri"/>
+              </a:rPr>
+              <a:t>3</a:t>
+            </a:r>
+          </a:p>
+        </p:txBody>
+      </p:sp>
+      <p:sp>
+        <p:nvSpPr>
+          <p:cNvPr id="11" name="TextBox 10"/>
+          <p:cNvSpPr txBox="1"/>
+          <p:nvPr/>
+        </p:nvSpPr>
+        <p:spPr>
+          <a:xfrm>
+            <a:off x="1234440" y="3991356"/>
+            <a:ext cx="10408615" cy="1030986"/>
+          </a:xfrm>
+          <a:prstGeom prst="rect">
+            <a:avLst/>
+          </a:prstGeom>
+          <a:noFill/>
+        </p:spPr>
+        <p:txBody>
+          <a:bodyPr wrap="square" anchor="t" lIns="0" rIns="0" tIns="0" bIns="0"/>
+          <a:lstStyle/>
+          <a:p>
+            <a:pPr algn="l"/>
+            <a:r>
+              <a:rPr sz="1800" b="0" i="0">
+                <a:solidFill>
+                  <a:srgbClr val="54595D"/>
+                </a:solidFill>
+                <a:latin typeface="Calibri"/>
+              </a:rPr>
+              <a:t>Which disposal method has the lowest environmental impact?</a:t>
+            </a:r>
+          </a:p>
+          <a:p>
+            <a:r>
+              <a:rPr sz="1800" b="1">
+                <a:solidFill>
+                  <a:srgbClr val="03306E"/>
+                </a:solidFill>
+                <a:latin typeface="Calibri"/>
+              </a:rPr>
+              <a:t>Reuse.</a:t>
+            </a:r>
+          </a:p>
+        </p:txBody>
+      </p:sp>
+      <p:sp>
+        <p:nvSpPr>
+          <p:cNvPr id="12" name="Oval 11"/>
+          <p:cNvSpPr/>
+          <p:nvPr/>
+        </p:nvSpPr>
+        <p:spPr>
+          <a:xfrm>
+            <a:off x="548640" y="5205221"/>
+            <a:ext cx="411480" cy="411480"/>
+          </a:xfrm>
+          <a:prstGeom prst="ellipse">
+            <a:avLst/>
+          </a:prstGeom>
+          <a:solidFill>
+            <a:srgbClr val="F2B705"/>
+          </a:solidFill>
+          <a:ln>
+            <a:noFill/>
+          </a:ln>
+          <a:effectLst/>
+        </p:spPr>
+        <p:style>
+          <a:lnRef idx="1">
+            <a:schemeClr val="accent1"/>
+          </a:lnRef>
+          <a:fillRef idx="3">
+            <a:schemeClr val="accent1"/>
+          </a:fillRef>
+          <a:effectRef idx="2">
+            <a:schemeClr val="accent1"/>
+          </a:effectRef>
+          <a:fontRef idx="minor">
+            <a:schemeClr val="lt1"/>
+          </a:fontRef>
+        </p:style>
+        <p:txBody>
+          <a:bodyPr rtlCol="0" anchor="ctr" lIns="0" rIns="0" tIns="0" bIns="0"/>
+          <a:lstStyle/>
+          <a:p>
+            <a:pPr algn="ctr"/>
+            <a:r>
+              <a:rPr sz="1400" b="1">
+                <a:solidFill>
+                  <a:srgbClr val="202122"/>
+                </a:solidFill>
+                <a:latin typeface="Calibri"/>
+              </a:rPr>
+              <a:t>4</a:t>
+            </a:r>
+          </a:p>
+        </p:txBody>
+      </p:sp>
+      <p:sp>
+        <p:nvSpPr>
+          <p:cNvPr id="13" name="TextBox 12"/>
+          <p:cNvSpPr txBox="1"/>
+          <p:nvPr/>
+        </p:nvSpPr>
+        <p:spPr>
+          <a:xfrm>
+            <a:off x="1234440" y="5186933"/>
+            <a:ext cx="10408615" cy="1030986"/>
+          </a:xfrm>
+          <a:prstGeom prst="rect">
+            <a:avLst/>
+          </a:prstGeom>
+          <a:noFill/>
+        </p:spPr>
+        <p:txBody>
+          <a:bodyPr wrap="square" anchor="t" lIns="0" rIns="0" tIns="0" bIns="0"/>
+          <a:lstStyle/>
+          <a:p>
+            <a:pPr algn="l"/>
+            <a:r>
+              <a:rPr sz="1800" b="0" i="0">
+                <a:solidFill>
+                  <a:srgbClr val="54595D"/>
+                </a:solidFill>
+                <a:latin typeface="Calibri"/>
+              </a:rPr>
+              <a:t>What must happen to hazardous waste?</a:t>
+            </a:r>
+          </a:p>
+          <a:p>
+            <a:r>
+              <a:rPr sz="1800" b="1">
+                <a:solidFill>
+                  <a:srgbClr val="03306E"/>
+                </a:solidFill>
+                <a:latin typeface="Calibri"/>
+              </a:rPr>
+              <a:t>It must be handled, stored and disposed of by licensed routes with records.</a:t>
+            </a:r>
+          </a:p>
+        </p:txBody>
+      </p:sp>
+    </p:spTree>
+  </p:cSld>
+  <p:clrMapOvr>
+    <a:masterClrMapping/>
+  </p:clrMapOvr>
+</p:sld>
+</file>
+
+<file path=ppt/slides/slide12.xml><?xml version="1.0" encoding="utf-8"?>
+<p:sld xmlns:a="http://schemas.openxmlformats.org/drawingml/2006/main" xmlns:p="http://schemas.openxmlformats.org/presentationml/2006/main" xmlns:r="http://schemas.openxmlformats.org/officeDocument/2006/relationships">
+  <p:cSld>
+    <p:bg>
+      <p:bgPr>
+        <a:solidFill>
+          <a:srgbClr val="FFFFFF"/>
+        </a:solidFill>
+        <a:effectLst/>
+      </p:bgPr>
+    </p:bg>
+    <p:spTree>
+      <p:nvGrpSpPr>
+        <p:cNvPr id="1" name=""/>
+        <p:cNvGrpSpPr/>
+        <p:nvPr/>
+      </p:nvGrpSpPr>
+      <p:grpSpPr/>
+      <p:sp>
+        <p:nvSpPr>
+          <p:cNvPr id="2" name="TextBox 1"/>
+          <p:cNvSpPr txBox="1"/>
+          <p:nvPr/>
+        </p:nvSpPr>
+        <p:spPr>
+          <a:xfrm>
+            <a:off x="548640" y="320040"/>
+            <a:ext cx="11094415" cy="274320"/>
+          </a:xfrm>
+          <a:prstGeom prst="rect">
+            <a:avLst/>
+          </a:prstGeom>
+          <a:noFill/>
+        </p:spPr>
+        <p:txBody>
+          <a:bodyPr wrap="square" anchor="t" lIns="0" rIns="0" tIns="0" bIns="0"/>
+          <a:lstStyle/>
+          <a:p>
+            <a:pPr algn="l"/>
+            <a:r>
+              <a:rPr sz="1100" b="1" i="0">
+                <a:solidFill>
+                  <a:srgbClr val="54595D"/>
+                </a:solidFill>
+                <a:latin typeface="Calibri"/>
+              </a:rPr>
+              <a:t>ENGINEERING CORE  ·  Core topic 12</a:t>
+            </a:r>
+          </a:p>
+        </p:txBody>
+      </p:sp>
+      <p:sp>
+        <p:nvSpPr>
+          <p:cNvPr id="3" name="TextBox 2"/>
+          <p:cNvSpPr txBox="1"/>
+          <p:nvPr/>
+        </p:nvSpPr>
+        <p:spPr>
+          <a:xfrm>
+            <a:off x="548640" y="566928"/>
+            <a:ext cx="11094415" cy="822960"/>
+          </a:xfrm>
+          <a:prstGeom prst="rect">
+            <a:avLst/>
+          </a:prstGeom>
+          <a:noFill/>
+        </p:spPr>
+        <p:txBody>
+          <a:bodyPr wrap="square" anchor="ctr" lIns="0" rIns="0" tIns="0" bIns="0"/>
+          <a:lstStyle/>
+          <a:p>
+            <a:pPr algn="l"/>
+            <a:r>
+              <a:rPr sz="3200" b="1" i="0">
+                <a:solidFill>
+                  <a:srgbClr val="03306E"/>
+                </a:solidFill>
+                <a:latin typeface="Cambria"/>
+              </a:rPr>
+              <a:t>Activity: Waste audit</a:t>
+            </a:r>
+          </a:p>
+        </p:txBody>
+      </p:sp>
+      <p:sp>
+        <p:nvSpPr>
+          <p:cNvPr id="4" name="TextBox 3"/>
+          <p:cNvSpPr txBox="1"/>
+          <p:nvPr/>
+        </p:nvSpPr>
+        <p:spPr>
+          <a:xfrm>
+            <a:off x="548640" y="6446520"/>
+            <a:ext cx="8229600" cy="274320"/>
+          </a:xfrm>
+          <a:prstGeom prst="rect">
+            <a:avLst/>
+          </a:prstGeom>
+          <a:noFill/>
+        </p:spPr>
+        <p:txBody>
+          <a:bodyPr wrap="square" anchor="t" lIns="0" rIns="0" tIns="0" bIns="0"/>
+          <a:lstStyle/>
+          <a:p>
+            <a:pPr algn="l"/>
+            <a:r>
+              <a:rPr sz="1000" b="0" i="0">
+                <a:solidFill>
+                  <a:srgbClr val="54595D"/>
+                </a:solidFill>
+                <a:latin typeface="Calibri"/>
+              </a:rPr>
+              <a:t>Design and Development for Engineering and Manufacturing T Level  ·  Environmental Legislation and Waste</a:t>
+            </a:r>
+          </a:p>
+        </p:txBody>
+      </p:sp>
+      <p:sp>
+        <p:nvSpPr>
+          <p:cNvPr id="5" name="TextBox 4"/>
+          <p:cNvSpPr txBox="1"/>
+          <p:nvPr/>
+        </p:nvSpPr>
+        <p:spPr>
+          <a:xfrm>
+            <a:off x="10728655" y="6446520"/>
+            <a:ext cx="914400" cy="274320"/>
+          </a:xfrm>
+          <a:prstGeom prst="rect">
+            <a:avLst/>
+          </a:prstGeom>
+          <a:noFill/>
+        </p:spPr>
+        <p:txBody>
+          <a:bodyPr wrap="square" anchor="t" lIns="0" rIns="0" tIns="0" bIns="0"/>
+          <a:lstStyle/>
+          <a:p>
+            <a:pPr algn="r"/>
+            <a:r>
+              <a:rPr sz="1000" b="0" i="0">
+                <a:solidFill>
+                  <a:srgbClr val="54595D"/>
+                </a:solidFill>
+                <a:latin typeface="Calibri"/>
+              </a:rPr>
+              <a:t>12</a:t>
+            </a:r>
+          </a:p>
+        </p:txBody>
+      </p:sp>
+      <p:sp>
+        <p:nvSpPr>
+          <p:cNvPr id="6" name="Rounded Rectangle 5"/>
+          <p:cNvSpPr/>
+          <p:nvPr/>
+        </p:nvSpPr>
+        <p:spPr>
+          <a:xfrm>
+            <a:off x="548640" y="1508760"/>
+            <a:ext cx="2011680" cy="457200"/>
+          </a:xfrm>
+          <a:prstGeom prst="roundRect">
+            <a:avLst>
+              <a:gd name="adj" fmla="val 50000"/>
+            </a:avLst>
+          </a:prstGeom>
+          <a:solidFill>
+            <a:srgbClr val="F2B705"/>
+          </a:solidFill>
+          <a:ln>
+            <a:noFill/>
+          </a:ln>
+          <a:effectLst/>
+        </p:spPr>
+        <p:style>
+          <a:lnRef idx="1">
+            <a:schemeClr val="accent1"/>
+          </a:lnRef>
+          <a:fillRef idx="3">
+            <a:schemeClr val="accent1"/>
+          </a:fillRef>
+          <a:effectRef idx="2">
+            <a:schemeClr val="accent1"/>
+          </a:effectRef>
+          <a:fontRef idx="minor">
+            <a:schemeClr val="lt1"/>
+          </a:fontRef>
+        </p:style>
+        <p:txBody>
+          <a:bodyPr rtlCol="0" anchor="ctr"/>
+          <a:lstStyle/>
+          <a:p/>
+        </p:txBody>
+      </p:sp>
+      <p:sp>
+        <p:nvSpPr>
+          <p:cNvPr id="7" name="TextBox 6"/>
+          <p:cNvSpPr txBox="1"/>
+          <p:nvPr/>
+        </p:nvSpPr>
+        <p:spPr>
+          <a:xfrm>
+            <a:off x="548640" y="1508760"/>
+            <a:ext cx="2011680" cy="457200"/>
+          </a:xfrm>
+          <a:prstGeom prst="rect">
+            <a:avLst/>
+          </a:prstGeom>
+          <a:noFill/>
+        </p:spPr>
+        <p:txBody>
+          <a:bodyPr wrap="square" anchor="ctr" lIns="0" rIns="0" tIns="0" bIns="0"/>
+          <a:lstStyle/>
+          <a:p>
+            <a:pPr algn="ctr"/>
+            <a:r>
+              <a:rPr sz="1400" b="1" i="0">
+                <a:solidFill>
+                  <a:srgbClr val="202122"/>
+                </a:solidFill>
+                <a:latin typeface="Calibri"/>
+              </a:rPr>
+              <a:t>20 minutes</a:t>
+            </a:r>
+          </a:p>
+        </p:txBody>
+      </p:sp>
+      <p:sp>
+        <p:nvSpPr>
+          <p:cNvPr id="8" name="TextBox 7"/>
+          <p:cNvSpPr txBox="1"/>
+          <p:nvPr/>
+        </p:nvSpPr>
+        <p:spPr>
+          <a:xfrm>
+            <a:off x="2743200" y="1508760"/>
+            <a:ext cx="4754880" cy="457200"/>
+          </a:xfrm>
+          <a:prstGeom prst="rect">
+            <a:avLst/>
+          </a:prstGeom>
+          <a:noFill/>
+        </p:spPr>
+        <p:txBody>
+          <a:bodyPr wrap="square" anchor="ctr" lIns="0" rIns="0" tIns="0" bIns="0"/>
+          <a:lstStyle/>
+          <a:p>
+            <a:pPr algn="l"/>
+            <a:r>
+              <a:rPr sz="1400" b="0" i="1">
+                <a:solidFill>
+                  <a:srgbClr val="54595D"/>
+                </a:solidFill>
+                <a:latin typeface="Calibri"/>
+              </a:rPr>
+              <a:t>Small groups</a:t>
+            </a:r>
+          </a:p>
+        </p:txBody>
+      </p:sp>
+      <p:sp>
+        <p:nvSpPr>
+          <p:cNvPr id="9" name="Oval 8"/>
+          <p:cNvSpPr/>
+          <p:nvPr/>
+        </p:nvSpPr>
+        <p:spPr>
+          <a:xfrm>
+            <a:off x="548640" y="2482596"/>
+            <a:ext cx="384048" cy="384048"/>
+          </a:xfrm>
+          <a:prstGeom prst="ellipse">
+            <a:avLst/>
+          </a:prstGeom>
+          <a:solidFill>
+            <a:srgbClr val="0645AD"/>
+          </a:solidFill>
+          <a:ln>
+            <a:noFill/>
+          </a:ln>
+          <a:effectLst/>
+        </p:spPr>
+        <p:style>
+          <a:lnRef idx="1">
+            <a:schemeClr val="accent1"/>
+          </a:lnRef>
+          <a:fillRef idx="3">
+            <a:schemeClr val="accent1"/>
+          </a:fillRef>
+          <a:effectRef idx="2">
+            <a:schemeClr val="accent1"/>
+          </a:effectRef>
+          <a:fontRef idx="minor">
+            <a:schemeClr val="lt1"/>
+          </a:fontRef>
+        </p:style>
+        <p:txBody>
+          <a:bodyPr rtlCol="0" anchor="ctr" lIns="0" rIns="0" tIns="0" bIns="0"/>
+          <a:lstStyle/>
+          <a:p>
+            <a:pPr algn="ctr"/>
+            <a:r>
+              <a:rPr sz="1300" b="1">
+                <a:solidFill>
+                  <a:srgbClr val="FFFFFF"/>
+                </a:solidFill>
+                <a:latin typeface="Calibri"/>
+              </a:rPr>
+              <a:t>1</a:t>
+            </a:r>
+          </a:p>
+        </p:txBody>
+      </p:sp>
+      <p:sp>
+        <p:nvSpPr>
+          <p:cNvPr id="10" name="TextBox 9"/>
+          <p:cNvSpPr txBox="1"/>
+          <p:nvPr/>
+        </p:nvSpPr>
+        <p:spPr>
+          <a:xfrm>
+            <a:off x="1143000" y="2240280"/>
+            <a:ext cx="5943600" cy="868680"/>
+          </a:xfrm>
+          <a:prstGeom prst="rect">
+            <a:avLst/>
+          </a:prstGeom>
+          <a:noFill/>
+        </p:spPr>
+        <p:txBody>
+          <a:bodyPr wrap="square" anchor="ctr" lIns="0" rIns="0" tIns="0" bIns="0"/>
+          <a:lstStyle/>
+          <a:p>
+            <a:pPr algn="l"/>
+            <a:r>
+              <a:rPr sz="1700" b="0" i="0">
+                <a:solidFill>
+                  <a:srgbClr val="202122"/>
+                </a:solidFill>
+                <a:latin typeface="Calibri"/>
+              </a:rPr>
+              <a:t>List every type of waste your workshop produces.</a:t>
+            </a:r>
+          </a:p>
+        </p:txBody>
+      </p:sp>
+      <p:sp>
+        <p:nvSpPr>
+          <p:cNvPr id="11" name="Oval 10"/>
+          <p:cNvSpPr/>
+          <p:nvPr/>
+        </p:nvSpPr>
+        <p:spPr>
+          <a:xfrm>
+            <a:off x="548640" y="3461004"/>
+            <a:ext cx="384048" cy="384048"/>
+          </a:xfrm>
+          <a:prstGeom prst="ellipse">
+            <a:avLst/>
+          </a:prstGeom>
+          <a:solidFill>
+            <a:srgbClr val="0645AD"/>
+          </a:solidFill>
+          <a:ln>
+            <a:noFill/>
+          </a:ln>
+          <a:effectLst/>
+        </p:spPr>
+        <p:style>
+          <a:lnRef idx="1">
+            <a:schemeClr val="accent1"/>
+          </a:lnRef>
+          <a:fillRef idx="3">
+            <a:schemeClr val="accent1"/>
+          </a:fillRef>
+          <a:effectRef idx="2">
+            <a:schemeClr val="accent1"/>
+          </a:effectRef>
+          <a:fontRef idx="minor">
+            <a:schemeClr val="lt1"/>
+          </a:fontRef>
+        </p:style>
+        <p:txBody>
+          <a:bodyPr rtlCol="0" anchor="ctr" lIns="0" rIns="0" tIns="0" bIns="0"/>
+          <a:lstStyle/>
+          <a:p>
+            <a:pPr algn="ctr"/>
+            <a:r>
+              <a:rPr sz="1300" b="1">
+                <a:solidFill>
+                  <a:srgbClr val="FFFFFF"/>
+                </a:solidFill>
+                <a:latin typeface="Calibri"/>
+              </a:rPr>
+              <a:t>2</a:t>
+            </a:r>
+          </a:p>
+        </p:txBody>
+      </p:sp>
+      <p:sp>
+        <p:nvSpPr>
+          <p:cNvPr id="12" name="TextBox 11"/>
+          <p:cNvSpPr txBox="1"/>
+          <p:nvPr/>
+        </p:nvSpPr>
+        <p:spPr>
+          <a:xfrm>
+            <a:off x="1143000" y="3218688"/>
+            <a:ext cx="5943600" cy="868680"/>
+          </a:xfrm>
+          <a:prstGeom prst="rect">
+            <a:avLst/>
+          </a:prstGeom>
+          <a:noFill/>
+        </p:spPr>
+        <p:txBody>
+          <a:bodyPr wrap="square" anchor="ctr" lIns="0" rIns="0" tIns="0" bIns="0"/>
+          <a:lstStyle/>
+          <a:p>
+            <a:pPr algn="l"/>
+            <a:r>
+              <a:rPr sz="1700" b="0" i="0">
+                <a:solidFill>
+                  <a:srgbClr val="202122"/>
+                </a:solidFill>
+                <a:latin typeface="Calibri"/>
+              </a:rPr>
+              <a:t>Classify each as general, recyclable or hazardous.</a:t>
+            </a:r>
+          </a:p>
+        </p:txBody>
+      </p:sp>
+      <p:sp>
+        <p:nvSpPr>
+          <p:cNvPr id="13" name="Oval 12"/>
+          <p:cNvSpPr/>
+          <p:nvPr/>
+        </p:nvSpPr>
+        <p:spPr>
+          <a:xfrm>
+            <a:off x="548640" y="4439412"/>
+            <a:ext cx="384048" cy="384048"/>
+          </a:xfrm>
+          <a:prstGeom prst="ellipse">
+            <a:avLst/>
+          </a:prstGeom>
+          <a:solidFill>
+            <a:srgbClr val="0645AD"/>
+          </a:solidFill>
+          <a:ln>
+            <a:noFill/>
+          </a:ln>
+          <a:effectLst/>
+        </p:spPr>
+        <p:style>
+          <a:lnRef idx="1">
+            <a:schemeClr val="accent1"/>
+          </a:lnRef>
+          <a:fillRef idx="3">
+            <a:schemeClr val="accent1"/>
+          </a:fillRef>
+          <a:effectRef idx="2">
+            <a:schemeClr val="accent1"/>
+          </a:effectRef>
+          <a:fontRef idx="minor">
+            <a:schemeClr val="lt1"/>
+          </a:fontRef>
+        </p:style>
+        <p:txBody>
+          <a:bodyPr rtlCol="0" anchor="ctr" lIns="0" rIns="0" tIns="0" bIns="0"/>
+          <a:lstStyle/>
+          <a:p>
+            <a:pPr algn="ctr"/>
+            <a:r>
+              <a:rPr sz="1300" b="1">
+                <a:solidFill>
+                  <a:srgbClr val="FFFFFF"/>
+                </a:solidFill>
+                <a:latin typeface="Calibri"/>
+              </a:rPr>
+              <a:t>3</a:t>
+            </a:r>
+          </a:p>
+        </p:txBody>
+      </p:sp>
+      <p:sp>
+        <p:nvSpPr>
+          <p:cNvPr id="14" name="TextBox 13"/>
+          <p:cNvSpPr txBox="1"/>
+          <p:nvPr/>
+        </p:nvSpPr>
+        <p:spPr>
+          <a:xfrm>
+            <a:off x="1143000" y="4197096"/>
+            <a:ext cx="5943600" cy="868680"/>
+          </a:xfrm>
+          <a:prstGeom prst="rect">
+            <a:avLst/>
+          </a:prstGeom>
+          <a:noFill/>
+        </p:spPr>
+        <p:txBody>
+          <a:bodyPr wrap="square" anchor="ctr" lIns="0" rIns="0" tIns="0" bIns="0"/>
+          <a:lstStyle/>
+          <a:p>
+            <a:pPr algn="l"/>
+            <a:r>
+              <a:rPr sz="1700" b="0" i="0">
+                <a:solidFill>
+                  <a:srgbClr val="202122"/>
+                </a:solidFill>
+                <a:latin typeface="Calibri"/>
+              </a:rPr>
+              <a:t>Suggest the correct disposal route.</a:t>
+            </a:r>
+          </a:p>
+        </p:txBody>
+      </p:sp>
+      <p:sp>
+        <p:nvSpPr>
+          <p:cNvPr id="15" name="Oval 14"/>
+          <p:cNvSpPr/>
+          <p:nvPr/>
+        </p:nvSpPr>
+        <p:spPr>
+          <a:xfrm>
+            <a:off x="548640" y="5417820"/>
+            <a:ext cx="384048" cy="384048"/>
+          </a:xfrm>
+          <a:prstGeom prst="ellipse">
+            <a:avLst/>
+          </a:prstGeom>
+          <a:solidFill>
+            <a:srgbClr val="0645AD"/>
+          </a:solidFill>
+          <a:ln>
+            <a:noFill/>
+          </a:ln>
+          <a:effectLst/>
+        </p:spPr>
+        <p:style>
+          <a:lnRef idx="1">
+            <a:schemeClr val="accent1"/>
+          </a:lnRef>
+          <a:fillRef idx="3">
+            <a:schemeClr val="accent1"/>
+          </a:fillRef>
+          <a:effectRef idx="2">
+            <a:schemeClr val="accent1"/>
+          </a:effectRef>
+          <a:fontRef idx="minor">
+            <a:schemeClr val="lt1"/>
+          </a:fontRef>
+        </p:style>
+        <p:txBody>
+          <a:bodyPr rtlCol="0" anchor="ctr" lIns="0" rIns="0" tIns="0" bIns="0"/>
+          <a:lstStyle/>
+          <a:p>
+            <a:pPr algn="ctr"/>
+            <a:r>
+              <a:rPr sz="1300" b="1">
+                <a:solidFill>
+                  <a:srgbClr val="FFFFFF"/>
+                </a:solidFill>
+                <a:latin typeface="Calibri"/>
+              </a:rPr>
+              <a:t>4</a:t>
+            </a:r>
+          </a:p>
+        </p:txBody>
+      </p:sp>
+      <p:sp>
+        <p:nvSpPr>
+          <p:cNvPr id="16" name="TextBox 15"/>
+          <p:cNvSpPr txBox="1"/>
+          <p:nvPr/>
+        </p:nvSpPr>
+        <p:spPr>
+          <a:xfrm>
+            <a:off x="1143000" y="5175504"/>
+            <a:ext cx="5943600" cy="868680"/>
+          </a:xfrm>
+          <a:prstGeom prst="rect">
+            <a:avLst/>
+          </a:prstGeom>
+          <a:noFill/>
+        </p:spPr>
+        <p:txBody>
+          <a:bodyPr wrap="square" anchor="ctr" lIns="0" rIns="0" tIns="0" bIns="0"/>
+          <a:lstStyle/>
+          <a:p>
+            <a:pPr algn="l"/>
+            <a:r>
+              <a:rPr sz="1700" b="0" i="0">
+                <a:solidFill>
+                  <a:srgbClr val="202122"/>
+                </a:solidFill>
+                <a:latin typeface="Calibri"/>
+              </a:rPr>
+              <a:t>Suggest one way to reduce each waste stream.</a:t>
+            </a:r>
+          </a:p>
+        </p:txBody>
+      </p:sp>
+      <p:sp>
+        <p:nvSpPr>
+          <p:cNvPr id="17" name="Rounded Rectangle 16"/>
+          <p:cNvSpPr/>
+          <p:nvPr/>
+        </p:nvSpPr>
+        <p:spPr>
+          <a:xfrm>
+            <a:off x="7772400" y="1508760"/>
+            <a:ext cx="3867912" cy="4572000"/>
+          </a:xfrm>
+          <a:prstGeom prst="roundRect">
+            <a:avLst>
+              <a:gd name="adj" fmla="val 8000"/>
+            </a:avLst>
+          </a:prstGeom>
+          <a:solidFill>
+            <a:srgbClr val="EAF3FF"/>
+          </a:solidFill>
+          <a:ln>
+            <a:noFill/>
+          </a:ln>
+          <a:effectLst/>
+        </p:spPr>
+        <p:style>
+          <a:lnRef idx="1">
+            <a:schemeClr val="accent1"/>
+          </a:lnRef>
+          <a:fillRef idx="3">
+            <a:schemeClr val="accent1"/>
+          </a:fillRef>
+          <a:effectRef idx="2">
+            <a:schemeClr val="accent1"/>
+          </a:effectRef>
+          <a:fontRef idx="minor">
+            <a:schemeClr val="lt1"/>
+          </a:fontRef>
+        </p:style>
+        <p:txBody>
+          <a:bodyPr rtlCol="0" anchor="ctr"/>
+          <a:lstStyle/>
+          <a:p/>
+        </p:txBody>
+      </p:sp>
+      <p:sp>
+        <p:nvSpPr>
+          <p:cNvPr id="18" name="TextBox 17"/>
+          <p:cNvSpPr txBox="1"/>
+          <p:nvPr/>
+        </p:nvSpPr>
+        <p:spPr>
+          <a:xfrm>
+            <a:off x="8046720" y="1737360"/>
+            <a:ext cx="3291840" cy="365760"/>
+          </a:xfrm>
+          <a:prstGeom prst="rect">
+            <a:avLst/>
+          </a:prstGeom>
+          <a:noFill/>
+        </p:spPr>
+        <p:txBody>
+          <a:bodyPr wrap="square" anchor="t" lIns="0" rIns="0" tIns="0" bIns="0"/>
+          <a:lstStyle/>
+          <a:p>
+            <a:pPr algn="l"/>
+            <a:r>
+              <a:rPr sz="1300" b="1" i="0">
+                <a:solidFill>
+                  <a:srgbClr val="0645AD"/>
+                </a:solidFill>
+                <a:latin typeface="Calibri"/>
+              </a:rPr>
+              <a:t>SUCCESS CRITERIA</a:t>
+            </a:r>
+          </a:p>
+        </p:txBody>
+      </p:sp>
+      <p:sp>
+        <p:nvSpPr>
+          <p:cNvPr id="19" name="TextBox 18"/>
+          <p:cNvSpPr txBox="1"/>
+          <p:nvPr/>
+        </p:nvSpPr>
+        <p:spPr>
+          <a:xfrm>
+            <a:off x="8046720" y="2240280"/>
+            <a:ext cx="3337560" cy="3657600"/>
+          </a:xfrm>
+          <a:prstGeom prst="rect">
+            <a:avLst/>
+          </a:prstGeom>
+          <a:noFill/>
+        </p:spPr>
+        <p:txBody>
+          <a:bodyPr wrap="square" lIns="0" rIns="0" tIns="0" bIns="0">
+            <a:spAutoFit/>
+          </a:bodyPr>
+          <a:lstStyle/>
+          <a:p>
+            <a:pPr marL="274320" indent="-274320">
+              <a:spcAft>
+                <a:spcPts val="810"/>
+              </a:spcAft>
+              <a:buClr>
+                <a:srgbClr val="0645AD"/>
+              </a:buClr>
+              <a:buFont typeface="Arial"/>
+              <a:buChar char="•"/>
+            </a:pPr>
+            <a:r>
+              <a:rPr sz="1800" b="0">
+                <a:solidFill>
+                  <a:srgbClr val="202122"/>
+                </a:solidFill>
+                <a:latin typeface="Calibri"/>
+              </a:rPr>
+              <a:t>Hazardous waste identified</a:t>
+            </a:r>
+          </a:p>
+          <a:p>
+            <a:pPr marL="274320" indent="-274320">
+              <a:spcAft>
+                <a:spcPts val="810"/>
+              </a:spcAft>
+              <a:buClr>
+                <a:srgbClr val="0645AD"/>
+              </a:buClr>
+              <a:buFont typeface="Arial"/>
+              <a:buChar char="•"/>
+            </a:pPr>
+            <a:r>
+              <a:rPr sz="1800" b="0">
+                <a:solidFill>
+                  <a:srgbClr val="202122"/>
+                </a:solidFill>
+                <a:latin typeface="Calibri"/>
+              </a:rPr>
+              <a:t>Correct routes chosen</a:t>
+            </a:r>
+          </a:p>
+          <a:p>
+            <a:pPr marL="274320" indent="-274320">
+              <a:spcAft>
+                <a:spcPts val="810"/>
+              </a:spcAft>
+              <a:buClr>
+                <a:srgbClr val="0645AD"/>
+              </a:buClr>
+              <a:buFont typeface="Arial"/>
+              <a:buChar char="•"/>
+            </a:pPr>
+            <a:r>
+              <a:rPr sz="1800" b="0">
+                <a:solidFill>
+                  <a:srgbClr val="202122"/>
+                </a:solidFill>
+                <a:latin typeface="Calibri"/>
+              </a:rPr>
+              <a:t>Reduction ideas practical</a:t>
+            </a:r>
+          </a:p>
+        </p:txBody>
+      </p:sp>
+    </p:spTree>
+  </p:cSld>
+  <p:clrMapOvr>
+    <a:masterClrMapping/>
+  </p:clrMapOvr>
+</p:sld>
+</file>
+
+<file path=ppt/slides/slide13.xml><?xml version="1.0" encoding="utf-8"?>
+<p:sld xmlns:a="http://schemas.openxmlformats.org/drawingml/2006/main" xmlns:p="http://schemas.openxmlformats.org/presentationml/2006/main" xmlns:r="http://schemas.openxmlformats.org/officeDocument/2006/relationships">
+  <p:cSld>
+    <p:bg>
+      <p:bgPr>
+        <a:solidFill>
+          <a:srgbClr val="03306E"/>
+        </a:solidFill>
+        <a:effectLst/>
+      </p:bgPr>
+    </p:bg>
+    <p:spTree>
+      <p:nvGrpSpPr>
+        <p:cNvPr id="1" name=""/>
+        <p:cNvGrpSpPr/>
+        <p:nvPr/>
+      </p:nvGrpSpPr>
+      <p:grpSpPr/>
+      <p:sp>
+        <p:nvSpPr>
+          <p:cNvPr id="2" name="TextBox 1"/>
+          <p:cNvSpPr txBox="1"/>
+          <p:nvPr/>
+        </p:nvSpPr>
+        <p:spPr>
+          <a:xfrm>
+            <a:off x="548640" y="320040"/>
+            <a:ext cx="11094415" cy="274320"/>
+          </a:xfrm>
+          <a:prstGeom prst="rect">
+            <a:avLst/>
+          </a:prstGeom>
+          <a:noFill/>
+        </p:spPr>
+        <p:txBody>
+          <a:bodyPr wrap="square" anchor="t" lIns="0" rIns="0" tIns="0" bIns="0"/>
+          <a:lstStyle/>
+          <a:p>
+            <a:pPr algn="l"/>
+            <a:r>
+              <a:rPr sz="1100" b="1" i="0">
+                <a:solidFill>
+                  <a:srgbClr val="A9C8F0"/>
+                </a:solidFill>
+                <a:latin typeface="Calibri"/>
+              </a:rPr>
+              <a:t>ENGINEERING CORE  ·  Core topic 12</a:t>
+            </a:r>
+          </a:p>
+        </p:txBody>
+      </p:sp>
+      <p:sp>
+        <p:nvSpPr>
+          <p:cNvPr id="3" name="TextBox 2"/>
+          <p:cNvSpPr txBox="1"/>
+          <p:nvPr/>
+        </p:nvSpPr>
+        <p:spPr>
+          <a:xfrm>
+            <a:off x="548640" y="566928"/>
+            <a:ext cx="11094415" cy="822960"/>
+          </a:xfrm>
+          <a:prstGeom prst="rect">
+            <a:avLst/>
+          </a:prstGeom>
+          <a:noFill/>
+        </p:spPr>
+        <p:txBody>
+          <a:bodyPr wrap="square" anchor="ctr" lIns="0" rIns="0" tIns="0" bIns="0"/>
+          <a:lstStyle/>
+          <a:p>
+            <a:pPr algn="l"/>
+            <a:r>
+              <a:rPr sz="3200" b="1" i="0">
+                <a:solidFill>
+                  <a:srgbClr val="FFFFFF"/>
+                </a:solidFill>
+                <a:latin typeface="Cambria"/>
+              </a:rPr>
+              <a:t>Exit ticket</a:t>
+            </a:r>
+          </a:p>
+        </p:txBody>
+      </p:sp>
+      <p:sp>
+        <p:nvSpPr>
+          <p:cNvPr id="4" name="Oval 3"/>
+          <p:cNvSpPr/>
+          <p:nvPr/>
+        </p:nvSpPr>
+        <p:spPr>
+          <a:xfrm>
+            <a:off x="548640" y="1737360"/>
+            <a:ext cx="502920" cy="502920"/>
+          </a:xfrm>
+          <a:prstGeom prst="ellipse">
+            <a:avLst/>
+          </a:prstGeom>
+          <a:solidFill>
+            <a:srgbClr val="F2B705"/>
+          </a:solidFill>
+          <a:ln>
+            <a:noFill/>
+          </a:ln>
+          <a:effectLst/>
+        </p:spPr>
+        <p:style>
+          <a:lnRef idx="1">
+            <a:schemeClr val="accent1"/>
+          </a:lnRef>
+          <a:fillRef idx="3">
+            <a:schemeClr val="accent1"/>
+          </a:fillRef>
+          <a:effectRef idx="2">
+            <a:schemeClr val="accent1"/>
+          </a:effectRef>
+          <a:fontRef idx="minor">
+            <a:schemeClr val="lt1"/>
+          </a:fontRef>
+        </p:style>
+        <p:txBody>
+          <a:bodyPr rtlCol="0" anchor="ctr" lIns="0" rIns="0" tIns="0" bIns="0"/>
+          <a:lstStyle/>
+          <a:p>
+            <a:pPr algn="ctr"/>
+            <a:r>
+              <a:rPr sz="1700" b="1">
+                <a:solidFill>
+                  <a:srgbClr val="202122"/>
+                </a:solidFill>
+                <a:latin typeface="Calibri"/>
+              </a:rPr>
+              <a:t>1</a:t>
+            </a:r>
+          </a:p>
+        </p:txBody>
+      </p:sp>
+      <p:sp>
+        <p:nvSpPr>
+          <p:cNvPr id="5" name="TextBox 4"/>
+          <p:cNvSpPr txBox="1"/>
+          <p:nvPr/>
+        </p:nvSpPr>
+        <p:spPr>
+          <a:xfrm>
+            <a:off x="1325880" y="1645920"/>
+            <a:ext cx="6583680" cy="822960"/>
+          </a:xfrm>
+          <a:prstGeom prst="rect">
+            <a:avLst/>
+          </a:prstGeom>
+          <a:noFill/>
+        </p:spPr>
+        <p:txBody>
+          <a:bodyPr wrap="square" anchor="ctr" lIns="0" rIns="0" tIns="0" bIns="0"/>
+          <a:lstStyle/>
+          <a:p>
+            <a:pPr algn="l"/>
+            <a:r>
+              <a:rPr sz="2000" b="0" i="0">
+                <a:solidFill>
+                  <a:srgbClr val="FFFFFF"/>
+                </a:solidFill>
+                <a:latin typeface="Calibri"/>
+              </a:rPr>
+              <a:t>Why is landfill discouraged?</a:t>
+            </a:r>
+          </a:p>
+        </p:txBody>
+      </p:sp>
+      <p:sp>
+        <p:nvSpPr>
+          <p:cNvPr id="6" name="Oval 5"/>
+          <p:cNvSpPr/>
+          <p:nvPr/>
+        </p:nvSpPr>
+        <p:spPr>
+          <a:xfrm>
+            <a:off x="548640" y="2697480"/>
+            <a:ext cx="502920" cy="502920"/>
+          </a:xfrm>
+          <a:prstGeom prst="ellipse">
+            <a:avLst/>
+          </a:prstGeom>
+          <a:solidFill>
+            <a:srgbClr val="F2B705"/>
+          </a:solidFill>
+          <a:ln>
+            <a:noFill/>
+          </a:ln>
+          <a:effectLst/>
+        </p:spPr>
+        <p:style>
+          <a:lnRef idx="1">
+            <a:schemeClr val="accent1"/>
+          </a:lnRef>
+          <a:fillRef idx="3">
+            <a:schemeClr val="accent1"/>
+          </a:fillRef>
+          <a:effectRef idx="2">
+            <a:schemeClr val="accent1"/>
+          </a:effectRef>
+          <a:fontRef idx="minor">
+            <a:schemeClr val="lt1"/>
+          </a:fontRef>
+        </p:style>
+        <p:txBody>
+          <a:bodyPr rtlCol="0" anchor="ctr" lIns="0" rIns="0" tIns="0" bIns="0"/>
+          <a:lstStyle/>
+          <a:p>
+            <a:pPr algn="ctr"/>
+            <a:r>
+              <a:rPr sz="1700" b="1">
+                <a:solidFill>
+                  <a:srgbClr val="202122"/>
+                </a:solidFill>
+                <a:latin typeface="Calibri"/>
+              </a:rPr>
+              <a:t>2</a:t>
+            </a:r>
+          </a:p>
+        </p:txBody>
+      </p:sp>
+      <p:sp>
+        <p:nvSpPr>
+          <p:cNvPr id="7" name="TextBox 6"/>
+          <p:cNvSpPr txBox="1"/>
+          <p:nvPr/>
+        </p:nvSpPr>
+        <p:spPr>
+          <a:xfrm>
+            <a:off x="1325880" y="2606040"/>
+            <a:ext cx="6583680" cy="822960"/>
+          </a:xfrm>
+          <a:prstGeom prst="rect">
+            <a:avLst/>
+          </a:prstGeom>
+          <a:noFill/>
+        </p:spPr>
+        <p:txBody>
+          <a:bodyPr wrap="square" anchor="ctr" lIns="0" rIns="0" tIns="0" bIns="0"/>
+          <a:lstStyle/>
+          <a:p>
+            <a:pPr algn="l"/>
+            <a:r>
+              <a:rPr sz="2000" b="0" i="0">
+                <a:solidFill>
+                  <a:srgbClr val="FFFFFF"/>
+                </a:solidFill>
+                <a:latin typeface="Calibri"/>
+              </a:rPr>
+              <a:t>Who is responsible for environmental compliance?</a:t>
+            </a:r>
+          </a:p>
+        </p:txBody>
+      </p:sp>
+      <p:sp>
+        <p:nvSpPr>
+          <p:cNvPr id="8" name="Oval 7"/>
+          <p:cNvSpPr/>
+          <p:nvPr/>
+        </p:nvSpPr>
+        <p:spPr>
+          <a:xfrm>
+            <a:off x="548640" y="3657600"/>
+            <a:ext cx="502920" cy="502920"/>
+          </a:xfrm>
+          <a:prstGeom prst="ellipse">
+            <a:avLst/>
+          </a:prstGeom>
+          <a:solidFill>
+            <a:srgbClr val="F2B705"/>
+          </a:solidFill>
+          <a:ln>
+            <a:noFill/>
+          </a:ln>
+          <a:effectLst/>
+        </p:spPr>
+        <p:style>
+          <a:lnRef idx="1">
+            <a:schemeClr val="accent1"/>
+          </a:lnRef>
+          <a:fillRef idx="3">
+            <a:schemeClr val="accent1"/>
+          </a:fillRef>
+          <a:effectRef idx="2">
+            <a:schemeClr val="accent1"/>
+          </a:effectRef>
+          <a:fontRef idx="minor">
+            <a:schemeClr val="lt1"/>
+          </a:fontRef>
+        </p:style>
+        <p:txBody>
+          <a:bodyPr rtlCol="0" anchor="ctr" lIns="0" rIns="0" tIns="0" bIns="0"/>
+          <a:lstStyle/>
+          <a:p>
+            <a:pPr algn="ctr"/>
+            <a:r>
+              <a:rPr sz="1700" b="1">
+                <a:solidFill>
+                  <a:srgbClr val="202122"/>
+                </a:solidFill>
+                <a:latin typeface="Calibri"/>
+              </a:rPr>
+              <a:t>3</a:t>
+            </a:r>
+          </a:p>
+        </p:txBody>
+      </p:sp>
+      <p:sp>
+        <p:nvSpPr>
+          <p:cNvPr id="9" name="TextBox 8"/>
+          <p:cNvSpPr txBox="1"/>
+          <p:nvPr/>
+        </p:nvSpPr>
+        <p:spPr>
+          <a:xfrm>
+            <a:off x="1325880" y="3566160"/>
+            <a:ext cx="6583680" cy="822960"/>
+          </a:xfrm>
+          <a:prstGeom prst="rect">
+            <a:avLst/>
+          </a:prstGeom>
+          <a:noFill/>
+        </p:spPr>
+        <p:txBody>
+          <a:bodyPr wrap="square" anchor="ctr" lIns="0" rIns="0" tIns="0" bIns="0"/>
+          <a:lstStyle/>
+          <a:p>
+            <a:pPr algn="l"/>
+            <a:r>
+              <a:rPr sz="2000" b="0" i="0">
+                <a:solidFill>
+                  <a:srgbClr val="FFFFFF"/>
+                </a:solidFill>
+                <a:latin typeface="Calibri"/>
+              </a:rPr>
+              <a:t>Name one hazardous waste from engineering.</a:t>
+            </a:r>
+          </a:p>
+        </p:txBody>
+      </p:sp>
+      <p:sp>
+        <p:nvSpPr>
+          <p:cNvPr id="10" name="Rounded Rectangle 9"/>
+          <p:cNvSpPr/>
+          <p:nvPr/>
+        </p:nvSpPr>
+        <p:spPr>
+          <a:xfrm>
+            <a:off x="8229600" y="1645920"/>
+            <a:ext cx="3410712" cy="2926080"/>
+          </a:xfrm>
+          <a:prstGeom prst="roundRect">
+            <a:avLst>
+              <a:gd name="adj" fmla="val 8000"/>
+            </a:avLst>
+          </a:prstGeom>
+          <a:solidFill>
+            <a:srgbClr val="0645AD"/>
+          </a:solidFill>
+          <a:ln>
+            <a:noFill/>
+          </a:ln>
+          <a:effectLst/>
+        </p:spPr>
+        <p:style>
+          <a:lnRef idx="1">
+            <a:schemeClr val="accent1"/>
+          </a:lnRef>
+          <a:fillRef idx="3">
+            <a:schemeClr val="accent1"/>
+          </a:fillRef>
+          <a:effectRef idx="2">
+            <a:schemeClr val="accent1"/>
+          </a:effectRef>
+          <a:fontRef idx="minor">
+            <a:schemeClr val="lt1"/>
+          </a:fontRef>
+        </p:style>
+        <p:txBody>
+          <a:bodyPr rtlCol="0" anchor="ctr"/>
+          <a:lstStyle/>
+          <a:p/>
+        </p:txBody>
+      </p:sp>
+      <p:sp>
+        <p:nvSpPr>
+          <p:cNvPr id="11" name="TextBox 10"/>
+          <p:cNvSpPr txBox="1"/>
+          <p:nvPr/>
+        </p:nvSpPr>
+        <p:spPr>
+          <a:xfrm>
+            <a:off x="8503920" y="1874519"/>
+            <a:ext cx="2926080" cy="365760"/>
+          </a:xfrm>
+          <a:prstGeom prst="rect">
+            <a:avLst/>
+          </a:prstGeom>
+          <a:noFill/>
+        </p:spPr>
+        <p:txBody>
+          <a:bodyPr wrap="square" anchor="t" lIns="0" rIns="0" tIns="0" bIns="0"/>
+          <a:lstStyle/>
+          <a:p>
+            <a:pPr algn="l"/>
+            <a:r>
+              <a:rPr sz="1300" b="1" i="0">
+                <a:solidFill>
+                  <a:srgbClr val="A9C8F0"/>
+                </a:solidFill>
+                <a:latin typeface="Calibri"/>
+              </a:rPr>
+              <a:t>REVISE THIS TOPIC</a:t>
+            </a:r>
+          </a:p>
+        </p:txBody>
+      </p:sp>
+      <p:sp>
+        <p:nvSpPr>
+          <p:cNvPr id="12" name="TextBox 11"/>
+          <p:cNvSpPr txBox="1"/>
+          <p:nvPr/>
+        </p:nvSpPr>
+        <p:spPr>
+          <a:xfrm>
+            <a:off x="8503920" y="2286000"/>
+            <a:ext cx="2926080" cy="548640"/>
+          </a:xfrm>
+          <a:prstGeom prst="rect">
+            <a:avLst/>
+          </a:prstGeom>
+          <a:noFill/>
+        </p:spPr>
+        <p:txBody>
+          <a:bodyPr wrap="square" anchor="t" lIns="0" rIns="0" tIns="0" bIns="0"/>
+          <a:lstStyle/>
+          <a:p>
+            <a:pPr algn="l"/>
+            <a:r>
+              <a:rPr sz="1400" b="0" i="0">
+                <a:solidFill>
+                  <a:srgbClr val="FFFFFF"/>
+                </a:solidFill>
+                <a:latin typeface="Calibri"/>
+              </a:rPr>
+              <a:t>Revision notes for this lesson are on the study wiki:</a:t>
+            </a:r>
+          </a:p>
+        </p:txBody>
+      </p:sp>
+      <p:sp>
+        <p:nvSpPr>
+          <p:cNvPr id="13" name="TextBox 12"/>
+          <p:cNvSpPr txBox="1"/>
+          <p:nvPr/>
+        </p:nvSpPr>
+        <p:spPr>
+          <a:xfrm>
+            <a:off x="8503920" y="2926080"/>
+            <a:ext cx="2926080" cy="1463040"/>
+          </a:xfrm>
+          <a:prstGeom prst="rect">
+            <a:avLst/>
+          </a:prstGeom>
+          <a:noFill/>
+        </p:spPr>
+        <p:txBody>
+          <a:bodyPr wrap="square" anchor="t" lIns="0" rIns="0" tIns="0" bIns="0"/>
+          <a:lstStyle/>
+          <a:p>
+            <a:pPr algn="l"/>
+            <a:r>
+              <a:rPr sz="2000" b="1" i="0">
+                <a:solidFill>
+                  <a:srgbClr val="FFFFFF"/>
+                </a:solidFill>
+                <a:latin typeface="Cambria"/>
+              </a:rPr>
+              <a:t>Engineering Core, Part 2</a:t>
+            </a:r>
+          </a:p>
+        </p:txBody>
+      </p:sp>
+      <p:sp>
+        <p:nvSpPr>
+          <p:cNvPr id="14" name="TextBox 13"/>
+          <p:cNvSpPr txBox="1"/>
+          <p:nvPr/>
+        </p:nvSpPr>
+        <p:spPr>
+          <a:xfrm>
+            <a:off x="548640" y="5669280"/>
+            <a:ext cx="11094415" cy="548640"/>
+          </a:xfrm>
+          <a:prstGeom prst="rect">
+            <a:avLst/>
+          </a:prstGeom>
+          <a:noFill/>
+        </p:spPr>
+        <p:txBody>
+          <a:bodyPr wrap="square" anchor="t" lIns="0" rIns="0" tIns="0" bIns="0"/>
+          <a:lstStyle/>
+          <a:p>
+            <a:pPr algn="l"/>
+            <a:r>
+              <a:rPr sz="1200" b="0" i="0">
+                <a:solidFill>
+                  <a:srgbClr val="A9C8F0"/>
+                </a:solidFill>
+                <a:latin typeface="Calibri"/>
+              </a:rPr>
+              <a:t>https://lana6478.github.io/T-level-Design-Development-Engineering-Manufacturing/#/01-core-component/02-engineering-core-part2.md</a:t>
+            </a:r>
+          </a:p>
+        </p:txBody>
+      </p:sp>
+    </p:spTree>
+  </p:cSld>
+  <p:clrMapOvr>
+    <a:masterClrMapping/>
+  </p:clrMapOvr>
+</p:sld>
+</file>
+
 <file path=ppt/slides/slide2.xml><?xml version="1.0" encoding="utf-8"?>
 <p:sld xmlns:a="http://schemas.openxmlformats.org/drawingml/2006/main" xmlns:p="http://schemas.openxmlformats.org/presentationml/2006/main" xmlns:r="http://schemas.openxmlformats.org/officeDocument/2006/relationships">
   <p:cSld>
@@ -4750,6 +7273,398 @@
                 <a:latin typeface="Calibri"/>
               </a:rPr>
               <a:t>3</a:t>
+            </a:r>
+          </a:p>
+        </p:txBody>
+      </p:sp>
+      <p:sp>
+        <p:nvSpPr>
+          <p:cNvPr id="6" name="TextBox 5"/>
+          <p:cNvSpPr txBox="1"/>
+          <p:nvPr/>
+        </p:nvSpPr>
+        <p:spPr>
+          <a:xfrm>
+            <a:off x="548640" y="1554480"/>
+            <a:ext cx="6720840" cy="4617720"/>
+          </a:xfrm>
+          <a:prstGeom prst="rect">
+            <a:avLst/>
+          </a:prstGeom>
+          <a:noFill/>
+        </p:spPr>
+        <p:txBody>
+          <a:bodyPr wrap="square" lIns="0" rIns="0" tIns="0" bIns="0">
+            <a:spAutoFit/>
+          </a:bodyPr>
+          <a:lstStyle/>
+          <a:p>
+            <a:pPr>
+              <a:spcAft>
+                <a:spcPts val="1260"/>
+              </a:spcAft>
+            </a:pPr>
+            <a:r>
+              <a:rPr sz="2100" b="0">
+                <a:solidFill>
+                  <a:srgbClr val="202122"/>
+                </a:solidFill>
+                <a:latin typeface="Calibri"/>
+              </a:rPr>
+              <a:t>Engineering can harm the environment, so several laws apply.</a:t>
+            </a:r>
+          </a:p>
+          <a:p>
+            <a:pPr>
+              <a:spcAft>
+                <a:spcPts val="1260"/>
+              </a:spcAft>
+            </a:pPr>
+            <a:r>
+              <a:rPr sz="2100" b="0">
+                <a:solidFill>
+                  <a:srgbClr val="202122"/>
+                </a:solidFill>
+                <a:latin typeface="Calibri"/>
+              </a:rPr>
+              <a:t>The Environmental Protection Act sets a duty of care for waste and controls pollution. The Pollution Prevention and Control Act requires permits for polluting industrial activity. The Clean Air Act controls smoke and air pollution. The Radioactive Substances Act controls radioactive materials. The Controlled Waste, Hazardous Waste and Dangerous Substances rules govern handling, storage and disposal.</a:t>
+            </a:r>
+          </a:p>
+          <a:p>
+            <a:pPr>
+              <a:spcAft>
+                <a:spcPts val="1260"/>
+              </a:spcAft>
+            </a:pPr>
+            <a:r>
+              <a:rPr sz="2100" b="0">
+                <a:solidFill>
+                  <a:srgbClr val="202122"/>
+                </a:solidFill>
+                <a:latin typeface="Calibri"/>
+              </a:rPr>
+              <a:t>Everyone shares responsibility for compliance, led by management.</a:t>
+            </a:r>
+          </a:p>
+        </p:txBody>
+      </p:sp>
+      <p:sp>
+        <p:nvSpPr>
+          <p:cNvPr id="7" name="Rounded Rectangle 6"/>
+          <p:cNvSpPr/>
+          <p:nvPr/>
+        </p:nvSpPr>
+        <p:spPr>
+          <a:xfrm>
+            <a:off x="7772400" y="1554480"/>
+            <a:ext cx="3867912" cy="4526280"/>
+          </a:xfrm>
+          <a:prstGeom prst="roundRect">
+            <a:avLst>
+              <a:gd name="adj" fmla="val 8000"/>
+            </a:avLst>
+          </a:prstGeom>
+          <a:solidFill>
+            <a:srgbClr val="03306E"/>
+          </a:solidFill>
+          <a:ln>
+            <a:noFill/>
+          </a:ln>
+          <a:effectLst/>
+        </p:spPr>
+        <p:style>
+          <a:lnRef idx="1">
+            <a:schemeClr val="accent1"/>
+          </a:lnRef>
+          <a:fillRef idx="3">
+            <a:schemeClr val="accent1"/>
+          </a:fillRef>
+          <a:effectRef idx="2">
+            <a:schemeClr val="accent1"/>
+          </a:effectRef>
+          <a:fontRef idx="minor">
+            <a:schemeClr val="lt1"/>
+          </a:fontRef>
+        </p:style>
+        <p:txBody>
+          <a:bodyPr rtlCol="0" anchor="ctr"/>
+          <a:lstStyle/>
+          <a:p/>
+        </p:txBody>
+      </p:sp>
+      <p:sp>
+        <p:nvSpPr>
+          <p:cNvPr id="8" name="Oval 7"/>
+          <p:cNvSpPr/>
+          <p:nvPr/>
+        </p:nvSpPr>
+        <p:spPr>
+          <a:xfrm>
+            <a:off x="8046720" y="1828800"/>
+            <a:ext cx="548640" cy="548640"/>
+          </a:xfrm>
+          <a:prstGeom prst="ellipse">
+            <a:avLst/>
+          </a:prstGeom>
+          <a:solidFill>
+            <a:srgbClr val="F2B705"/>
+          </a:solidFill>
+          <a:ln>
+            <a:noFill/>
+          </a:ln>
+          <a:effectLst/>
+        </p:spPr>
+        <p:style>
+          <a:lnRef idx="1">
+            <a:schemeClr val="accent1"/>
+          </a:lnRef>
+          <a:fillRef idx="3">
+            <a:schemeClr val="accent1"/>
+          </a:fillRef>
+          <a:effectRef idx="2">
+            <a:schemeClr val="accent1"/>
+          </a:effectRef>
+          <a:fontRef idx="minor">
+            <a:schemeClr val="lt1"/>
+          </a:fontRef>
+        </p:style>
+        <p:txBody>
+          <a:bodyPr rtlCol="0" anchor="ctr" lIns="0" rIns="0" tIns="0" bIns="0"/>
+          <a:lstStyle/>
+          <a:p>
+            <a:pPr algn="ctr"/>
+            <a:r>
+              <a:rPr sz="1300" b="1">
+                <a:solidFill>
+                  <a:srgbClr val="202122"/>
+                </a:solidFill>
+                <a:latin typeface="Calibri"/>
+              </a:rPr>
+              <a:t>e.g.</a:t>
+            </a:r>
+          </a:p>
+        </p:txBody>
+      </p:sp>
+      <p:sp>
+        <p:nvSpPr>
+          <p:cNvPr id="9" name="TextBox 8"/>
+          <p:cNvSpPr txBox="1"/>
+          <p:nvPr/>
+        </p:nvSpPr>
+        <p:spPr>
+          <a:xfrm>
+            <a:off x="8046720" y="2560320"/>
+            <a:ext cx="3291840" cy="365760"/>
+          </a:xfrm>
+          <a:prstGeom prst="rect">
+            <a:avLst/>
+          </a:prstGeom>
+          <a:noFill/>
+        </p:spPr>
+        <p:txBody>
+          <a:bodyPr wrap="square" anchor="t" lIns="0" rIns="0" tIns="0" bIns="0"/>
+          <a:lstStyle/>
+          <a:p>
+            <a:pPr algn="l"/>
+            <a:r>
+              <a:rPr sz="1300" b="1" i="0">
+                <a:solidFill>
+                  <a:srgbClr val="A9C8F0"/>
+                </a:solidFill>
+                <a:latin typeface="Calibri"/>
+              </a:rPr>
+              <a:t>EXAMPLE</a:t>
+            </a:r>
+          </a:p>
+        </p:txBody>
+      </p:sp>
+      <p:sp>
+        <p:nvSpPr>
+          <p:cNvPr id="10" name="TextBox 9"/>
+          <p:cNvSpPr txBox="1"/>
+          <p:nvPr/>
+        </p:nvSpPr>
+        <p:spPr>
+          <a:xfrm>
+            <a:off x="8046720" y="2971800"/>
+            <a:ext cx="3291840" cy="2971800"/>
+          </a:xfrm>
+          <a:prstGeom prst="rect">
+            <a:avLst/>
+          </a:prstGeom>
+          <a:noFill/>
+        </p:spPr>
+        <p:txBody>
+          <a:bodyPr wrap="square" anchor="t" lIns="0" rIns="0" tIns="0" bIns="0"/>
+          <a:lstStyle/>
+          <a:p>
+            <a:pPr algn="l"/>
+            <a:r>
+              <a:rPr sz="1900" b="0" i="0">
+                <a:solidFill>
+                  <a:srgbClr val="FFFFFF"/>
+                </a:solidFill>
+                <a:latin typeface="Cambria"/>
+              </a:rPr>
+              <a:t>Used cutting fluid is hazardous waste: it must be stored safely and collected by a licensed carrier, with records kept.</a:t>
+            </a:r>
+          </a:p>
+        </p:txBody>
+      </p:sp>
+    </p:spTree>
+  </p:cSld>
+  <p:clrMapOvr>
+    <a:masterClrMapping/>
+  </p:clrMapOvr>
+</p:sld>
+</file>
+
+<file path=ppt/slides/slide4.xml><?xml version="1.0" encoding="utf-8"?>
+<p:sld xmlns:a="http://schemas.openxmlformats.org/drawingml/2006/main" xmlns:p="http://schemas.openxmlformats.org/presentationml/2006/main" xmlns:r="http://schemas.openxmlformats.org/officeDocument/2006/relationships">
+  <p:cSld>
+    <p:bg>
+      <p:bgPr>
+        <a:solidFill>
+          <a:srgbClr val="FFFFFF"/>
+        </a:solidFill>
+        <a:effectLst/>
+      </p:bgPr>
+    </p:bg>
+    <p:spTree>
+      <p:nvGrpSpPr>
+        <p:cNvPr id="1" name=""/>
+        <p:cNvGrpSpPr/>
+        <p:nvPr/>
+      </p:nvGrpSpPr>
+      <p:grpSpPr/>
+      <p:sp>
+        <p:nvSpPr>
+          <p:cNvPr id="2" name="TextBox 1"/>
+          <p:cNvSpPr txBox="1"/>
+          <p:nvPr/>
+        </p:nvSpPr>
+        <p:spPr>
+          <a:xfrm>
+            <a:off x="548640" y="320040"/>
+            <a:ext cx="11094415" cy="274320"/>
+          </a:xfrm>
+          <a:prstGeom prst="rect">
+            <a:avLst/>
+          </a:prstGeom>
+          <a:noFill/>
+        </p:spPr>
+        <p:txBody>
+          <a:bodyPr wrap="square" anchor="t" lIns="0" rIns="0" tIns="0" bIns="0"/>
+          <a:lstStyle/>
+          <a:p>
+            <a:pPr algn="l"/>
+            <a:r>
+              <a:rPr sz="1100" b="1" i="0">
+                <a:solidFill>
+                  <a:srgbClr val="54595D"/>
+                </a:solidFill>
+                <a:latin typeface="Calibri"/>
+              </a:rPr>
+              <a:t>ENGINEERING CORE  ·  Core topic 12</a:t>
+            </a:r>
+          </a:p>
+        </p:txBody>
+      </p:sp>
+      <p:sp>
+        <p:nvSpPr>
+          <p:cNvPr id="3" name="TextBox 2"/>
+          <p:cNvSpPr txBox="1"/>
+          <p:nvPr/>
+        </p:nvSpPr>
+        <p:spPr>
+          <a:xfrm>
+            <a:off x="548640" y="566928"/>
+            <a:ext cx="11094415" cy="822960"/>
+          </a:xfrm>
+          <a:prstGeom prst="rect">
+            <a:avLst/>
+          </a:prstGeom>
+          <a:noFill/>
+        </p:spPr>
+        <p:txBody>
+          <a:bodyPr wrap="square" anchor="ctr" lIns="0" rIns="0" tIns="0" bIns="0"/>
+          <a:lstStyle/>
+          <a:p>
+            <a:pPr algn="l"/>
+            <a:r>
+              <a:rPr sz="3200" b="1" i="0">
+                <a:solidFill>
+                  <a:srgbClr val="03306E"/>
+                </a:solidFill>
+                <a:latin typeface="Cambria"/>
+              </a:rPr>
+              <a:t>Environmental legislation</a:t>
+            </a:r>
+          </a:p>
+        </p:txBody>
+      </p:sp>
+      <p:sp>
+        <p:nvSpPr>
+          <p:cNvPr id="4" name="TextBox 3"/>
+          <p:cNvSpPr txBox="1"/>
+          <p:nvPr/>
+        </p:nvSpPr>
+        <p:spPr>
+          <a:xfrm>
+            <a:off x="548640" y="6446520"/>
+            <a:ext cx="8229600" cy="274320"/>
+          </a:xfrm>
+          <a:prstGeom prst="rect">
+            <a:avLst/>
+          </a:prstGeom>
+          <a:noFill/>
+        </p:spPr>
+        <p:txBody>
+          <a:bodyPr wrap="square" anchor="t" lIns="0" rIns="0" tIns="0" bIns="0"/>
+          <a:lstStyle/>
+          <a:p>
+            <a:pPr algn="l"/>
+            <a:r>
+              <a:rPr sz="1000" b="0" i="0">
+                <a:solidFill>
+                  <a:srgbClr val="54595D"/>
+                </a:solidFill>
+                <a:latin typeface="Calibri"/>
+              </a:rPr>
+              <a:t>Design and Development for Engineering and Manufacturing T Level  ·  Environmental Legislation and Waste</a:t>
+            </a:r>
+          </a:p>
+        </p:txBody>
+      </p:sp>
+      <p:sp>
+        <p:nvSpPr>
+          <p:cNvPr id="5" name="TextBox 4"/>
+          <p:cNvSpPr txBox="1"/>
+          <p:nvPr/>
+        </p:nvSpPr>
+        <p:spPr>
+          <a:xfrm>
+            <a:off x="10728655" y="6446520"/>
+            <a:ext cx="914400" cy="274320"/>
+          </a:xfrm>
+          <a:prstGeom prst="rect">
+            <a:avLst/>
+          </a:prstGeom>
+          <a:noFill/>
+        </p:spPr>
+        <p:txBody>
+          <a:bodyPr wrap="square" anchor="t" lIns="0" rIns="0" tIns="0" bIns="0"/>
+          <a:lstStyle/>
+          <a:p>
+            <a:pPr algn="r"/>
+            <a:r>
+              <a:rPr sz="1000" b="0" i="0">
+                <a:solidFill>
+                  <a:srgbClr val="54595D"/>
+                </a:solidFill>
+                <a:latin typeface="Calibri"/>
+              </a:rPr>
+              <a:t>4</a:t>
             </a:r>
           </a:p>
         </p:txBody>
@@ -5064,620 +7979,6 @@
 </p:sld>
 </file>
 
-<file path=ppt/slides/slide4.xml><?xml version="1.0" encoding="utf-8"?>
-<p:sld xmlns:a="http://schemas.openxmlformats.org/drawingml/2006/main" xmlns:p="http://schemas.openxmlformats.org/presentationml/2006/main" xmlns:r="http://schemas.openxmlformats.org/officeDocument/2006/relationships">
-  <p:cSld>
-    <p:bg>
-      <p:bgPr>
-        <a:solidFill>
-          <a:srgbClr val="FFFFFF"/>
-        </a:solidFill>
-        <a:effectLst/>
-      </p:bgPr>
-    </p:bg>
-    <p:spTree>
-      <p:nvGrpSpPr>
-        <p:cNvPr id="1" name=""/>
-        <p:cNvGrpSpPr/>
-        <p:nvPr/>
-      </p:nvGrpSpPr>
-      <p:grpSpPr/>
-      <p:sp>
-        <p:nvSpPr>
-          <p:cNvPr id="2" name="TextBox 1"/>
-          <p:cNvSpPr txBox="1"/>
-          <p:nvPr/>
-        </p:nvSpPr>
-        <p:spPr>
-          <a:xfrm>
-            <a:off x="548640" y="320040"/>
-            <a:ext cx="11094415" cy="274320"/>
-          </a:xfrm>
-          <a:prstGeom prst="rect">
-            <a:avLst/>
-          </a:prstGeom>
-          <a:noFill/>
-        </p:spPr>
-        <p:txBody>
-          <a:bodyPr wrap="square" anchor="t" lIns="0" rIns="0" tIns="0" bIns="0"/>
-          <a:lstStyle/>
-          <a:p>
-            <a:pPr algn="l"/>
-            <a:r>
-              <a:rPr sz="1100" b="1" i="0">
-                <a:solidFill>
-                  <a:srgbClr val="54595D"/>
-                </a:solidFill>
-                <a:latin typeface="Calibri"/>
-              </a:rPr>
-              <a:t>ENGINEERING CORE  ·  Core topic 12</a:t>
-            </a:r>
-          </a:p>
-        </p:txBody>
-      </p:sp>
-      <p:sp>
-        <p:nvSpPr>
-          <p:cNvPr id="3" name="TextBox 2"/>
-          <p:cNvSpPr txBox="1"/>
-          <p:nvPr/>
-        </p:nvSpPr>
-        <p:spPr>
-          <a:xfrm>
-            <a:off x="548640" y="566928"/>
-            <a:ext cx="11094415" cy="822960"/>
-          </a:xfrm>
-          <a:prstGeom prst="rect">
-            <a:avLst/>
-          </a:prstGeom>
-          <a:noFill/>
-        </p:spPr>
-        <p:txBody>
-          <a:bodyPr wrap="square" anchor="ctr" lIns="0" rIns="0" tIns="0" bIns="0"/>
-          <a:lstStyle/>
-          <a:p>
-            <a:pPr algn="l"/>
-            <a:r>
-              <a:rPr sz="3200" b="1" i="0">
-                <a:solidFill>
-                  <a:srgbClr val="03306E"/>
-                </a:solidFill>
-                <a:latin typeface="Cambria"/>
-              </a:rPr>
-              <a:t>ISO 14001</a:t>
-            </a:r>
-          </a:p>
-        </p:txBody>
-      </p:sp>
-      <p:sp>
-        <p:nvSpPr>
-          <p:cNvPr id="4" name="TextBox 3"/>
-          <p:cNvSpPr txBox="1"/>
-          <p:nvPr/>
-        </p:nvSpPr>
-        <p:spPr>
-          <a:xfrm>
-            <a:off x="548640" y="6446520"/>
-            <a:ext cx="8229600" cy="274320"/>
-          </a:xfrm>
-          <a:prstGeom prst="rect">
-            <a:avLst/>
-          </a:prstGeom>
-          <a:noFill/>
-        </p:spPr>
-        <p:txBody>
-          <a:bodyPr wrap="square" anchor="t" lIns="0" rIns="0" tIns="0" bIns="0"/>
-          <a:lstStyle/>
-          <a:p>
-            <a:pPr algn="l"/>
-            <a:r>
-              <a:rPr sz="1000" b="0" i="0">
-                <a:solidFill>
-                  <a:srgbClr val="54595D"/>
-                </a:solidFill>
-                <a:latin typeface="Calibri"/>
-              </a:rPr>
-              <a:t>Design and Development for Engineering and Manufacturing T Level  ·  Environmental Legislation and Waste</a:t>
-            </a:r>
-          </a:p>
-        </p:txBody>
-      </p:sp>
-      <p:sp>
-        <p:nvSpPr>
-          <p:cNvPr id="5" name="TextBox 4"/>
-          <p:cNvSpPr txBox="1"/>
-          <p:nvPr/>
-        </p:nvSpPr>
-        <p:spPr>
-          <a:xfrm>
-            <a:off x="10728655" y="6446520"/>
-            <a:ext cx="914400" cy="274320"/>
-          </a:xfrm>
-          <a:prstGeom prst="rect">
-            <a:avLst/>
-          </a:prstGeom>
-          <a:noFill/>
-        </p:spPr>
-        <p:txBody>
-          <a:bodyPr wrap="square" anchor="t" lIns="0" rIns="0" tIns="0" bIns="0"/>
-          <a:lstStyle/>
-          <a:p>
-            <a:pPr algn="r"/>
-            <a:r>
-              <a:rPr sz="1000" b="0" i="0">
-                <a:solidFill>
-                  <a:srgbClr val="54595D"/>
-                </a:solidFill>
-                <a:latin typeface="Calibri"/>
-              </a:rPr>
-              <a:t>4</a:t>
-            </a:r>
-          </a:p>
-        </p:txBody>
-      </p:sp>
-      <p:sp>
-        <p:nvSpPr>
-          <p:cNvPr id="6" name="Rounded Rectangle 5"/>
-          <p:cNvSpPr/>
-          <p:nvPr/>
-        </p:nvSpPr>
-        <p:spPr>
-          <a:xfrm>
-            <a:off x="548640" y="1600200"/>
-            <a:ext cx="5364327" cy="640080"/>
-          </a:xfrm>
-          <a:prstGeom prst="roundRect">
-            <a:avLst>
-              <a:gd name="adj" fmla="val 15000"/>
-            </a:avLst>
-          </a:prstGeom>
-          <a:solidFill>
-            <a:srgbClr val="03306E"/>
-          </a:solidFill>
-          <a:ln>
-            <a:noFill/>
-          </a:ln>
-          <a:effectLst/>
-        </p:spPr>
-        <p:style>
-          <a:lnRef idx="1">
-            <a:schemeClr val="accent1"/>
-          </a:lnRef>
-          <a:fillRef idx="3">
-            <a:schemeClr val="accent1"/>
-          </a:fillRef>
-          <a:effectRef idx="2">
-            <a:schemeClr val="accent1"/>
-          </a:effectRef>
-          <a:fontRef idx="minor">
-            <a:schemeClr val="lt1"/>
-          </a:fontRef>
-        </p:style>
-        <p:txBody>
-          <a:bodyPr rtlCol="0" anchor="ctr"/>
-          <a:lstStyle/>
-          <a:p/>
-        </p:txBody>
-      </p:sp>
-      <p:sp>
-        <p:nvSpPr>
-          <p:cNvPr id="7" name="TextBox 6"/>
-          <p:cNvSpPr txBox="1"/>
-          <p:nvPr/>
-        </p:nvSpPr>
-        <p:spPr>
-          <a:xfrm>
-            <a:off x="777240" y="1600200"/>
-            <a:ext cx="4907127" cy="640080"/>
-          </a:xfrm>
-          <a:prstGeom prst="rect">
-            <a:avLst/>
-          </a:prstGeom>
-          <a:noFill/>
-        </p:spPr>
-        <p:txBody>
-          <a:bodyPr wrap="square" anchor="ctr" lIns="0" rIns="0" tIns="0" bIns="0"/>
-          <a:lstStyle/>
-          <a:p>
-            <a:pPr algn="l"/>
-            <a:r>
-              <a:rPr sz="2000" b="1" i="0">
-                <a:solidFill>
-                  <a:srgbClr val="FFFFFF"/>
-                </a:solidFill>
-                <a:latin typeface="Calibri"/>
-              </a:rPr>
-              <a:t>Aims and benefits</a:t>
-            </a:r>
-          </a:p>
-        </p:txBody>
-      </p:sp>
-      <p:sp>
-        <p:nvSpPr>
-          <p:cNvPr id="8" name="Rounded Rectangle 7"/>
-          <p:cNvSpPr/>
-          <p:nvPr/>
-        </p:nvSpPr>
-        <p:spPr>
-          <a:xfrm>
-            <a:off x="548640" y="2377440"/>
-            <a:ext cx="5364327" cy="3794760"/>
-          </a:xfrm>
-          <a:prstGeom prst="roundRect">
-            <a:avLst>
-              <a:gd name="adj" fmla="val 4000"/>
-            </a:avLst>
-          </a:prstGeom>
-          <a:solidFill>
-            <a:srgbClr val="EAF3FF"/>
-          </a:solidFill>
-          <a:ln>
-            <a:noFill/>
-          </a:ln>
-          <a:effectLst/>
-        </p:spPr>
-        <p:style>
-          <a:lnRef idx="1">
-            <a:schemeClr val="accent1"/>
-          </a:lnRef>
-          <a:fillRef idx="3">
-            <a:schemeClr val="accent1"/>
-          </a:fillRef>
-          <a:effectRef idx="2">
-            <a:schemeClr val="accent1"/>
-          </a:effectRef>
-          <a:fontRef idx="minor">
-            <a:schemeClr val="lt1"/>
-          </a:fontRef>
-        </p:style>
-        <p:txBody>
-          <a:bodyPr rtlCol="0" anchor="ctr"/>
-          <a:lstStyle/>
-          <a:p/>
-        </p:txBody>
-      </p:sp>
-      <p:sp>
-        <p:nvSpPr>
-          <p:cNvPr id="9" name="TextBox 8"/>
-          <p:cNvSpPr txBox="1"/>
-          <p:nvPr/>
-        </p:nvSpPr>
-        <p:spPr>
-          <a:xfrm>
-            <a:off x="822959" y="2606040"/>
-            <a:ext cx="4815687" cy="3337560"/>
-          </a:xfrm>
-          <a:prstGeom prst="rect">
-            <a:avLst/>
-          </a:prstGeom>
-          <a:noFill/>
-        </p:spPr>
-        <p:txBody>
-          <a:bodyPr wrap="square" lIns="0" rIns="0" tIns="0" bIns="0">
-            <a:spAutoFit/>
-          </a:bodyPr>
-          <a:lstStyle/>
-          <a:p>
-            <a:pPr marL="274320" indent="-274320">
-              <a:spcAft>
-                <a:spcPts val="990"/>
-              </a:spcAft>
-              <a:buClr>
-                <a:srgbClr val="0645AD"/>
-              </a:buClr>
-              <a:buFont typeface="Arial"/>
-              <a:buChar char="•"/>
-            </a:pPr>
-            <a:r>
-              <a:rPr sz="2200" b="0">
-                <a:solidFill>
-                  <a:srgbClr val="202122"/>
-                </a:solidFill>
-                <a:latin typeface="Calibri"/>
-              </a:rPr>
-              <a:t>An environmental management system</a:t>
-            </a:r>
-          </a:p>
-          <a:p>
-            <a:pPr marL="274320" indent="-274320">
-              <a:spcAft>
-                <a:spcPts val="990"/>
-              </a:spcAft>
-              <a:buClr>
-                <a:srgbClr val="0645AD"/>
-              </a:buClr>
-              <a:buFont typeface="Arial"/>
-              <a:buChar char="•"/>
-            </a:pPr>
-            <a:r>
-              <a:rPr sz="2200" b="0">
-                <a:solidFill>
-                  <a:srgbClr val="202122"/>
-                </a:solidFill>
-                <a:latin typeface="Calibri"/>
-              </a:rPr>
-              <a:t>Identify and reduce environmental impact</a:t>
-            </a:r>
-          </a:p>
-          <a:p>
-            <a:pPr marL="274320" indent="-274320">
-              <a:spcAft>
-                <a:spcPts val="990"/>
-              </a:spcAft>
-              <a:buClr>
-                <a:srgbClr val="0645AD"/>
-              </a:buClr>
-              <a:buFont typeface="Arial"/>
-              <a:buChar char="•"/>
-            </a:pPr>
-            <a:r>
-              <a:rPr sz="2200" b="0">
-                <a:solidFill>
-                  <a:srgbClr val="202122"/>
-                </a:solidFill>
-                <a:latin typeface="Calibri"/>
-              </a:rPr>
-              <a:t>Comply with the law</a:t>
-            </a:r>
-          </a:p>
-          <a:p>
-            <a:pPr marL="274320" indent="-274320">
-              <a:spcAft>
-                <a:spcPts val="990"/>
-              </a:spcAft>
-              <a:buClr>
-                <a:srgbClr val="0645AD"/>
-              </a:buClr>
-              <a:buFont typeface="Arial"/>
-              <a:buChar char="•"/>
-            </a:pPr>
-            <a:r>
-              <a:rPr sz="2200" b="0">
-                <a:solidFill>
-                  <a:srgbClr val="202122"/>
-                </a:solidFill>
-                <a:latin typeface="Calibri"/>
-              </a:rPr>
-              <a:t>Lower costs and better reputation</a:t>
-            </a:r>
-          </a:p>
-        </p:txBody>
-      </p:sp>
-      <p:sp>
-        <p:nvSpPr>
-          <p:cNvPr id="10" name="Rounded Rectangle 9"/>
-          <p:cNvSpPr/>
-          <p:nvPr/>
-        </p:nvSpPr>
-        <p:spPr>
-          <a:xfrm>
-            <a:off x="6278727" y="1600200"/>
-            <a:ext cx="5364327" cy="640080"/>
-          </a:xfrm>
-          <a:prstGeom prst="roundRect">
-            <a:avLst>
-              <a:gd name="adj" fmla="val 15000"/>
-            </a:avLst>
-          </a:prstGeom>
-          <a:solidFill>
-            <a:srgbClr val="0645AD"/>
-          </a:solidFill>
-          <a:ln>
-            <a:noFill/>
-          </a:ln>
-          <a:effectLst/>
-        </p:spPr>
-        <p:style>
-          <a:lnRef idx="1">
-            <a:schemeClr val="accent1"/>
-          </a:lnRef>
-          <a:fillRef idx="3">
-            <a:schemeClr val="accent1"/>
-          </a:fillRef>
-          <a:effectRef idx="2">
-            <a:schemeClr val="accent1"/>
-          </a:effectRef>
-          <a:fontRef idx="minor">
-            <a:schemeClr val="lt1"/>
-          </a:fontRef>
-        </p:style>
-        <p:txBody>
-          <a:bodyPr rtlCol="0" anchor="ctr"/>
-          <a:lstStyle/>
-          <a:p/>
-        </p:txBody>
-      </p:sp>
-      <p:sp>
-        <p:nvSpPr>
-          <p:cNvPr id="11" name="TextBox 10"/>
-          <p:cNvSpPr txBox="1"/>
-          <p:nvPr/>
-        </p:nvSpPr>
-        <p:spPr>
-          <a:xfrm>
-            <a:off x="6507327" y="1600200"/>
-            <a:ext cx="4907127" cy="640080"/>
-          </a:xfrm>
-          <a:prstGeom prst="rect">
-            <a:avLst/>
-          </a:prstGeom>
-          <a:noFill/>
-        </p:spPr>
-        <p:txBody>
-          <a:bodyPr wrap="square" anchor="ctr" lIns="0" rIns="0" tIns="0" bIns="0"/>
-          <a:lstStyle/>
-          <a:p>
-            <a:pPr algn="l"/>
-            <a:r>
-              <a:rPr sz="2000" b="1" i="0">
-                <a:solidFill>
-                  <a:srgbClr val="FFFFFF"/>
-                </a:solidFill>
-                <a:latin typeface="Calibri"/>
-              </a:rPr>
-              <a:t>If ignored</a:t>
-            </a:r>
-          </a:p>
-        </p:txBody>
-      </p:sp>
-      <p:sp>
-        <p:nvSpPr>
-          <p:cNvPr id="12" name="Rounded Rectangle 11"/>
-          <p:cNvSpPr/>
-          <p:nvPr/>
-        </p:nvSpPr>
-        <p:spPr>
-          <a:xfrm>
-            <a:off x="6278727" y="2377440"/>
-            <a:ext cx="5364327" cy="3794760"/>
-          </a:xfrm>
-          <a:prstGeom prst="roundRect">
-            <a:avLst>
-              <a:gd name="adj" fmla="val 4000"/>
-            </a:avLst>
-          </a:prstGeom>
-          <a:solidFill>
-            <a:srgbClr val="EAF3FF"/>
-          </a:solidFill>
-          <a:ln>
-            <a:noFill/>
-          </a:ln>
-          <a:effectLst/>
-        </p:spPr>
-        <p:style>
-          <a:lnRef idx="1">
-            <a:schemeClr val="accent1"/>
-          </a:lnRef>
-          <a:fillRef idx="3">
-            <a:schemeClr val="accent1"/>
-          </a:fillRef>
-          <a:effectRef idx="2">
-            <a:schemeClr val="accent1"/>
-          </a:effectRef>
-          <a:fontRef idx="minor">
-            <a:schemeClr val="lt1"/>
-          </a:fontRef>
-        </p:style>
-        <p:txBody>
-          <a:bodyPr rtlCol="0" anchor="ctr"/>
-          <a:lstStyle/>
-          <a:p/>
-        </p:txBody>
-      </p:sp>
-      <p:sp>
-        <p:nvSpPr>
-          <p:cNvPr id="13" name="TextBox 12"/>
-          <p:cNvSpPr txBox="1"/>
-          <p:nvPr/>
-        </p:nvSpPr>
-        <p:spPr>
-          <a:xfrm>
-            <a:off x="6553047" y="2606040"/>
-            <a:ext cx="4815687" cy="3337560"/>
-          </a:xfrm>
-          <a:prstGeom prst="rect">
-            <a:avLst/>
-          </a:prstGeom>
-          <a:noFill/>
-        </p:spPr>
-        <p:txBody>
-          <a:bodyPr wrap="square" lIns="0" rIns="0" tIns="0" bIns="0">
-            <a:spAutoFit/>
-          </a:bodyPr>
-          <a:lstStyle/>
-          <a:p>
-            <a:pPr marL="274320" indent="-274320">
-              <a:spcAft>
-                <a:spcPts val="990"/>
-              </a:spcAft>
-              <a:buClr>
-                <a:srgbClr val="0645AD"/>
-              </a:buClr>
-              <a:buFont typeface="Arial"/>
-              <a:buChar char="•"/>
-            </a:pPr>
-            <a:r>
-              <a:rPr sz="2200" b="0">
-                <a:solidFill>
-                  <a:srgbClr val="202122"/>
-                </a:solidFill>
-                <a:latin typeface="Calibri"/>
-              </a:rPr>
-              <a:t>Fines and prosecution</a:t>
-            </a:r>
-          </a:p>
-          <a:p>
-            <a:pPr marL="274320" indent="-274320">
-              <a:spcAft>
-                <a:spcPts val="990"/>
-              </a:spcAft>
-              <a:buClr>
-                <a:srgbClr val="0645AD"/>
-              </a:buClr>
-              <a:buFont typeface="Arial"/>
-              <a:buChar char="•"/>
-            </a:pPr>
-            <a:r>
-              <a:rPr sz="2200" b="0">
-                <a:solidFill>
-                  <a:srgbClr val="202122"/>
-                </a:solidFill>
-                <a:latin typeface="Calibri"/>
-              </a:rPr>
-              <a:t>Lost contracts</a:t>
-            </a:r>
-          </a:p>
-          <a:p>
-            <a:pPr marL="274320" indent="-274320">
-              <a:spcAft>
-                <a:spcPts val="990"/>
-              </a:spcAft>
-              <a:buClr>
-                <a:srgbClr val="0645AD"/>
-              </a:buClr>
-              <a:buFont typeface="Arial"/>
-              <a:buChar char="•"/>
-            </a:pPr>
-            <a:r>
-              <a:rPr sz="2200" b="0">
-                <a:solidFill>
-                  <a:srgbClr val="202122"/>
-                </a:solidFill>
-                <a:latin typeface="Calibri"/>
-              </a:rPr>
-              <a:t>Environmental damage</a:t>
-            </a:r>
-          </a:p>
-          <a:p>
-            <a:pPr marL="274320" indent="-274320">
-              <a:spcAft>
-                <a:spcPts val="990"/>
-              </a:spcAft>
-              <a:buClr>
-                <a:srgbClr val="0645AD"/>
-              </a:buClr>
-              <a:buFont typeface="Arial"/>
-              <a:buChar char="•"/>
-            </a:pPr>
-            <a:r>
-              <a:rPr sz="2200" b="0">
-                <a:solidFill>
-                  <a:srgbClr val="202122"/>
-                </a:solidFill>
-                <a:latin typeface="Calibri"/>
-              </a:rPr>
-              <a:t>Reputational harm</a:t>
-            </a:r>
-          </a:p>
-        </p:txBody>
-      </p:sp>
-    </p:spTree>
-  </p:cSld>
-  <p:clrMapOvr>
-    <a:masterClrMapping/>
-  </p:clrMapOvr>
-</p:sld>
-</file>
-
 <file path=ppt/slides/slide5.xml><?xml version="1.0" encoding="utf-8"?>
 <p:sld xmlns:a="http://schemas.openxmlformats.org/drawingml/2006/main" xmlns:p="http://schemas.openxmlformats.org/presentationml/2006/main" xmlns:r="http://schemas.openxmlformats.org/officeDocument/2006/relationships">
   <p:cSld>
@@ -5757,7 +8058,7 @@
                 </a:solidFill>
                 <a:latin typeface="Cambria"/>
               </a:rPr>
-              <a:t>Waste disposal</a:t>
+              <a:t>Quick check: Environmental legislation</a:t>
             </a:r>
           </a:p>
         </p:txBody>
@@ -5824,6 +8125,1926 @@
                 <a:latin typeface="Calibri"/>
               </a:rPr>
               <a:t>5</a:t>
+            </a:r>
+          </a:p>
+        </p:txBody>
+      </p:sp>
+      <p:sp>
+        <p:nvSpPr>
+          <p:cNvPr id="6" name="Oval 5"/>
+          <p:cNvSpPr/>
+          <p:nvPr/>
+        </p:nvSpPr>
+        <p:spPr>
+          <a:xfrm>
+            <a:off x="548640" y="1691640"/>
+            <a:ext cx="502920" cy="502920"/>
+          </a:xfrm>
+          <a:prstGeom prst="ellipse">
+            <a:avLst/>
+          </a:prstGeom>
+          <a:solidFill>
+            <a:srgbClr val="F2B705"/>
+          </a:solidFill>
+          <a:ln>
+            <a:noFill/>
+          </a:ln>
+          <a:effectLst/>
+        </p:spPr>
+        <p:style>
+          <a:lnRef idx="1">
+            <a:schemeClr val="accent1"/>
+          </a:lnRef>
+          <a:fillRef idx="3">
+            <a:schemeClr val="accent1"/>
+          </a:fillRef>
+          <a:effectRef idx="2">
+            <a:schemeClr val="accent1"/>
+          </a:effectRef>
+          <a:fontRef idx="minor">
+            <a:schemeClr val="lt1"/>
+          </a:fontRef>
+        </p:style>
+        <p:txBody>
+          <a:bodyPr rtlCol="0" anchor="ctr" lIns="0" rIns="0" tIns="0" bIns="0"/>
+          <a:lstStyle/>
+          <a:p>
+            <a:pPr algn="ctr"/>
+            <a:r>
+              <a:rPr sz="1600" b="1">
+                <a:solidFill>
+                  <a:srgbClr val="202122"/>
+                </a:solidFill>
+                <a:latin typeface="Calibri"/>
+              </a:rPr>
+              <a:t>1</a:t>
+            </a:r>
+          </a:p>
+        </p:txBody>
+      </p:sp>
+      <p:sp>
+        <p:nvSpPr>
+          <p:cNvPr id="7" name="TextBox 6"/>
+          <p:cNvSpPr txBox="1"/>
+          <p:nvPr/>
+        </p:nvSpPr>
+        <p:spPr>
+          <a:xfrm>
+            <a:off x="1371600" y="1645920"/>
+            <a:ext cx="10271455" cy="1188720"/>
+          </a:xfrm>
+          <a:prstGeom prst="rect">
+            <a:avLst/>
+          </a:prstGeom>
+          <a:noFill/>
+        </p:spPr>
+        <p:txBody>
+          <a:bodyPr wrap="square" anchor="t" lIns="0" rIns="0" tIns="0" bIns="0"/>
+          <a:lstStyle/>
+          <a:p>
+            <a:pPr algn="l"/>
+            <a:r>
+              <a:rPr sz="2400" b="0" i="0">
+                <a:solidFill>
+                  <a:srgbClr val="202122"/>
+                </a:solidFill>
+                <a:latin typeface="Calibri"/>
+              </a:rPr>
+              <a:t>Which Act sets a duty of care for waste?</a:t>
+            </a:r>
+          </a:p>
+        </p:txBody>
+      </p:sp>
+      <p:sp>
+        <p:nvSpPr>
+          <p:cNvPr id="8" name="Oval 7"/>
+          <p:cNvSpPr/>
+          <p:nvPr/>
+        </p:nvSpPr>
+        <p:spPr>
+          <a:xfrm>
+            <a:off x="548640" y="3108960"/>
+            <a:ext cx="502920" cy="502920"/>
+          </a:xfrm>
+          <a:prstGeom prst="ellipse">
+            <a:avLst/>
+          </a:prstGeom>
+          <a:solidFill>
+            <a:srgbClr val="F2B705"/>
+          </a:solidFill>
+          <a:ln>
+            <a:noFill/>
+          </a:ln>
+          <a:effectLst/>
+        </p:spPr>
+        <p:style>
+          <a:lnRef idx="1">
+            <a:schemeClr val="accent1"/>
+          </a:lnRef>
+          <a:fillRef idx="3">
+            <a:schemeClr val="accent1"/>
+          </a:fillRef>
+          <a:effectRef idx="2">
+            <a:schemeClr val="accent1"/>
+          </a:effectRef>
+          <a:fontRef idx="minor">
+            <a:schemeClr val="lt1"/>
+          </a:fontRef>
+        </p:style>
+        <p:txBody>
+          <a:bodyPr rtlCol="0" anchor="ctr" lIns="0" rIns="0" tIns="0" bIns="0"/>
+          <a:lstStyle/>
+          <a:p>
+            <a:pPr algn="ctr"/>
+            <a:r>
+              <a:rPr sz="1600" b="1">
+                <a:solidFill>
+                  <a:srgbClr val="202122"/>
+                </a:solidFill>
+                <a:latin typeface="Calibri"/>
+              </a:rPr>
+              <a:t>2</a:t>
+            </a:r>
+          </a:p>
+        </p:txBody>
+      </p:sp>
+      <p:sp>
+        <p:nvSpPr>
+          <p:cNvPr id="9" name="TextBox 8"/>
+          <p:cNvSpPr txBox="1"/>
+          <p:nvPr/>
+        </p:nvSpPr>
+        <p:spPr>
+          <a:xfrm>
+            <a:off x="1371600" y="3063240"/>
+            <a:ext cx="10271455" cy="1188720"/>
+          </a:xfrm>
+          <a:prstGeom prst="rect">
+            <a:avLst/>
+          </a:prstGeom>
+          <a:noFill/>
+        </p:spPr>
+        <p:txBody>
+          <a:bodyPr wrap="square" anchor="t" lIns="0" rIns="0" tIns="0" bIns="0"/>
+          <a:lstStyle/>
+          <a:p>
+            <a:pPr algn="l"/>
+            <a:r>
+              <a:rPr sz="2400" b="0" i="0">
+                <a:solidFill>
+                  <a:srgbClr val="202122"/>
+                </a:solidFill>
+                <a:latin typeface="Calibri"/>
+              </a:rPr>
+              <a:t>Which Act controls smoke?</a:t>
+            </a:r>
+          </a:p>
+        </p:txBody>
+      </p:sp>
+      <p:sp>
+        <p:nvSpPr>
+          <p:cNvPr id="10" name="Oval 9"/>
+          <p:cNvSpPr/>
+          <p:nvPr/>
+        </p:nvSpPr>
+        <p:spPr>
+          <a:xfrm>
+            <a:off x="548640" y="4526280"/>
+            <a:ext cx="502920" cy="502920"/>
+          </a:xfrm>
+          <a:prstGeom prst="ellipse">
+            <a:avLst/>
+          </a:prstGeom>
+          <a:solidFill>
+            <a:srgbClr val="F2B705"/>
+          </a:solidFill>
+          <a:ln>
+            <a:noFill/>
+          </a:ln>
+          <a:effectLst/>
+        </p:spPr>
+        <p:style>
+          <a:lnRef idx="1">
+            <a:schemeClr val="accent1"/>
+          </a:lnRef>
+          <a:fillRef idx="3">
+            <a:schemeClr val="accent1"/>
+          </a:fillRef>
+          <a:effectRef idx="2">
+            <a:schemeClr val="accent1"/>
+          </a:effectRef>
+          <a:fontRef idx="minor">
+            <a:schemeClr val="lt1"/>
+          </a:fontRef>
+        </p:style>
+        <p:txBody>
+          <a:bodyPr rtlCol="0" anchor="ctr" lIns="0" rIns="0" tIns="0" bIns="0"/>
+          <a:lstStyle/>
+          <a:p>
+            <a:pPr algn="ctr"/>
+            <a:r>
+              <a:rPr sz="1600" b="1">
+                <a:solidFill>
+                  <a:srgbClr val="202122"/>
+                </a:solidFill>
+                <a:latin typeface="Calibri"/>
+              </a:rPr>
+              <a:t>3</a:t>
+            </a:r>
+          </a:p>
+        </p:txBody>
+      </p:sp>
+      <p:sp>
+        <p:nvSpPr>
+          <p:cNvPr id="11" name="TextBox 10"/>
+          <p:cNvSpPr txBox="1"/>
+          <p:nvPr/>
+        </p:nvSpPr>
+        <p:spPr>
+          <a:xfrm>
+            <a:off x="1371600" y="4480560"/>
+            <a:ext cx="10271455" cy="1188720"/>
+          </a:xfrm>
+          <a:prstGeom prst="rect">
+            <a:avLst/>
+          </a:prstGeom>
+          <a:noFill/>
+        </p:spPr>
+        <p:txBody>
+          <a:bodyPr wrap="square" anchor="t" lIns="0" rIns="0" tIns="0" bIns="0"/>
+          <a:lstStyle/>
+          <a:p>
+            <a:pPr algn="l"/>
+            <a:r>
+              <a:rPr sz="2400" b="0" i="0">
+                <a:solidFill>
+                  <a:srgbClr val="202122"/>
+                </a:solidFill>
+                <a:latin typeface="Calibri"/>
+              </a:rPr>
+              <a:t>How must hazardous waste be removed?</a:t>
+            </a:r>
+          </a:p>
+        </p:txBody>
+      </p:sp>
+      <p:sp>
+        <p:nvSpPr>
+          <p:cNvPr id="12" name="TextBox 11"/>
+          <p:cNvSpPr txBox="1"/>
+          <p:nvPr/>
+        </p:nvSpPr>
+        <p:spPr>
+          <a:xfrm>
+            <a:off x="548640" y="5852160"/>
+            <a:ext cx="11094415" cy="365760"/>
+          </a:xfrm>
+          <a:prstGeom prst="rect">
+            <a:avLst/>
+          </a:prstGeom>
+          <a:noFill/>
+        </p:spPr>
+        <p:txBody>
+          <a:bodyPr wrap="square" anchor="t" lIns="0" rIns="0" tIns="0" bIns="0"/>
+          <a:lstStyle/>
+          <a:p>
+            <a:pPr algn="l"/>
+            <a:r>
+              <a:rPr sz="1300" b="0" i="1">
+                <a:solidFill>
+                  <a:srgbClr val="54595D"/>
+                </a:solidFill>
+                <a:latin typeface="Calibri"/>
+              </a:rPr>
+              <a:t>Answer on mini whiteboards or in your book. Answers are in the speaker notes.</a:t>
+            </a:r>
+          </a:p>
+        </p:txBody>
+      </p:sp>
+    </p:spTree>
+  </p:cSld>
+  <p:clrMapOvr>
+    <a:masterClrMapping/>
+  </p:clrMapOvr>
+</p:sld>
+</file>
+
+<file path=ppt/slides/slide6.xml><?xml version="1.0" encoding="utf-8"?>
+<p:sld xmlns:a="http://schemas.openxmlformats.org/drawingml/2006/main" xmlns:p="http://schemas.openxmlformats.org/presentationml/2006/main" xmlns:r="http://schemas.openxmlformats.org/officeDocument/2006/relationships">
+  <p:cSld>
+    <p:bg>
+      <p:bgPr>
+        <a:solidFill>
+          <a:srgbClr val="FFFFFF"/>
+        </a:solidFill>
+        <a:effectLst/>
+      </p:bgPr>
+    </p:bg>
+    <p:spTree>
+      <p:nvGrpSpPr>
+        <p:cNvPr id="1" name=""/>
+        <p:cNvGrpSpPr/>
+        <p:nvPr/>
+      </p:nvGrpSpPr>
+      <p:grpSpPr/>
+      <p:sp>
+        <p:nvSpPr>
+          <p:cNvPr id="2" name="TextBox 1"/>
+          <p:cNvSpPr txBox="1"/>
+          <p:nvPr/>
+        </p:nvSpPr>
+        <p:spPr>
+          <a:xfrm>
+            <a:off x="548640" y="320040"/>
+            <a:ext cx="11094415" cy="274320"/>
+          </a:xfrm>
+          <a:prstGeom prst="rect">
+            <a:avLst/>
+          </a:prstGeom>
+          <a:noFill/>
+        </p:spPr>
+        <p:txBody>
+          <a:bodyPr wrap="square" anchor="t" lIns="0" rIns="0" tIns="0" bIns="0"/>
+          <a:lstStyle/>
+          <a:p>
+            <a:pPr algn="l"/>
+            <a:r>
+              <a:rPr sz="1100" b="1" i="0">
+                <a:solidFill>
+                  <a:srgbClr val="54595D"/>
+                </a:solidFill>
+                <a:latin typeface="Calibri"/>
+              </a:rPr>
+              <a:t>ENGINEERING CORE  ·  Core topic 12</a:t>
+            </a:r>
+          </a:p>
+        </p:txBody>
+      </p:sp>
+      <p:sp>
+        <p:nvSpPr>
+          <p:cNvPr id="3" name="TextBox 2"/>
+          <p:cNvSpPr txBox="1"/>
+          <p:nvPr/>
+        </p:nvSpPr>
+        <p:spPr>
+          <a:xfrm>
+            <a:off x="548640" y="566928"/>
+            <a:ext cx="11094415" cy="822960"/>
+          </a:xfrm>
+          <a:prstGeom prst="rect">
+            <a:avLst/>
+          </a:prstGeom>
+          <a:noFill/>
+        </p:spPr>
+        <p:txBody>
+          <a:bodyPr wrap="square" anchor="ctr" lIns="0" rIns="0" tIns="0" bIns="0"/>
+          <a:lstStyle/>
+          <a:p>
+            <a:pPr algn="l"/>
+            <a:r>
+              <a:rPr sz="3200" b="1" i="0">
+                <a:solidFill>
+                  <a:srgbClr val="03306E"/>
+                </a:solidFill>
+                <a:latin typeface="Cambria"/>
+              </a:rPr>
+              <a:t>ISO 14001</a:t>
+            </a:r>
+          </a:p>
+        </p:txBody>
+      </p:sp>
+      <p:sp>
+        <p:nvSpPr>
+          <p:cNvPr id="4" name="TextBox 3"/>
+          <p:cNvSpPr txBox="1"/>
+          <p:nvPr/>
+        </p:nvSpPr>
+        <p:spPr>
+          <a:xfrm>
+            <a:off x="548640" y="6446520"/>
+            <a:ext cx="8229600" cy="274320"/>
+          </a:xfrm>
+          <a:prstGeom prst="rect">
+            <a:avLst/>
+          </a:prstGeom>
+          <a:noFill/>
+        </p:spPr>
+        <p:txBody>
+          <a:bodyPr wrap="square" anchor="t" lIns="0" rIns="0" tIns="0" bIns="0"/>
+          <a:lstStyle/>
+          <a:p>
+            <a:pPr algn="l"/>
+            <a:r>
+              <a:rPr sz="1000" b="0" i="0">
+                <a:solidFill>
+                  <a:srgbClr val="54595D"/>
+                </a:solidFill>
+                <a:latin typeface="Calibri"/>
+              </a:rPr>
+              <a:t>Design and Development for Engineering and Manufacturing T Level  ·  Environmental Legislation and Waste</a:t>
+            </a:r>
+          </a:p>
+        </p:txBody>
+      </p:sp>
+      <p:sp>
+        <p:nvSpPr>
+          <p:cNvPr id="5" name="TextBox 4"/>
+          <p:cNvSpPr txBox="1"/>
+          <p:nvPr/>
+        </p:nvSpPr>
+        <p:spPr>
+          <a:xfrm>
+            <a:off x="10728655" y="6446520"/>
+            <a:ext cx="914400" cy="274320"/>
+          </a:xfrm>
+          <a:prstGeom prst="rect">
+            <a:avLst/>
+          </a:prstGeom>
+          <a:noFill/>
+        </p:spPr>
+        <p:txBody>
+          <a:bodyPr wrap="square" anchor="t" lIns="0" rIns="0" tIns="0" bIns="0"/>
+          <a:lstStyle/>
+          <a:p>
+            <a:pPr algn="r"/>
+            <a:r>
+              <a:rPr sz="1000" b="0" i="0">
+                <a:solidFill>
+                  <a:srgbClr val="54595D"/>
+                </a:solidFill>
+                <a:latin typeface="Calibri"/>
+              </a:rPr>
+              <a:t>6</a:t>
+            </a:r>
+          </a:p>
+        </p:txBody>
+      </p:sp>
+      <p:sp>
+        <p:nvSpPr>
+          <p:cNvPr id="6" name="TextBox 5"/>
+          <p:cNvSpPr txBox="1"/>
+          <p:nvPr/>
+        </p:nvSpPr>
+        <p:spPr>
+          <a:xfrm>
+            <a:off x="548640" y="1554480"/>
+            <a:ext cx="6720840" cy="4617720"/>
+          </a:xfrm>
+          <a:prstGeom prst="rect">
+            <a:avLst/>
+          </a:prstGeom>
+          <a:noFill/>
+        </p:spPr>
+        <p:txBody>
+          <a:bodyPr wrap="square" lIns="0" rIns="0" tIns="0" bIns="0">
+            <a:spAutoFit/>
+          </a:bodyPr>
+          <a:lstStyle/>
+          <a:p>
+            <a:pPr>
+              <a:spcAft>
+                <a:spcPts val="1320"/>
+              </a:spcAft>
+            </a:pPr>
+            <a:r>
+              <a:rPr sz="2200" b="0">
+                <a:solidFill>
+                  <a:srgbClr val="202122"/>
+                </a:solidFill>
+                <a:latin typeface="Calibri"/>
+              </a:rPr>
+              <a:t>ISO 14001 is the international standard for environmental management systems.</a:t>
+            </a:r>
+          </a:p>
+          <a:p>
+            <a:pPr>
+              <a:spcAft>
+                <a:spcPts val="1320"/>
+              </a:spcAft>
+            </a:pPr>
+            <a:r>
+              <a:rPr sz="2200" b="0">
+                <a:solidFill>
+                  <a:srgbClr val="202122"/>
+                </a:solidFill>
+                <a:latin typeface="Calibri"/>
+              </a:rPr>
+              <a:t>It helps an organisation identify its environmental impacts, set targets to reduce them, comply with the law and keep improving.</a:t>
+            </a:r>
+          </a:p>
+          <a:p>
+            <a:pPr>
+              <a:spcAft>
+                <a:spcPts val="1320"/>
+              </a:spcAft>
+            </a:pPr>
+            <a:r>
+              <a:rPr sz="2200" b="0">
+                <a:solidFill>
+                  <a:srgbClr val="202122"/>
+                </a:solidFill>
+                <a:latin typeface="Calibri"/>
+              </a:rPr>
+              <a:t>Benefits include lower costs through using less energy and producing less waste, easier legal compliance, and a better reputation, which helps win contracts.</a:t>
+            </a:r>
+          </a:p>
+          <a:p>
+            <a:pPr>
+              <a:spcAft>
+                <a:spcPts val="1320"/>
+              </a:spcAft>
+            </a:pPr>
+            <a:r>
+              <a:rPr sz="2200" b="0">
+                <a:solidFill>
+                  <a:srgbClr val="202122"/>
+                </a:solidFill>
+                <a:latin typeface="Calibri"/>
+              </a:rPr>
+              <a:t>Ignoring environmental responsibilities risks fines, prosecution, lost contracts and environmental damage.</a:t>
+            </a:r>
+          </a:p>
+        </p:txBody>
+      </p:sp>
+      <p:sp>
+        <p:nvSpPr>
+          <p:cNvPr id="7" name="Rounded Rectangle 6"/>
+          <p:cNvSpPr/>
+          <p:nvPr/>
+        </p:nvSpPr>
+        <p:spPr>
+          <a:xfrm>
+            <a:off x="7772400" y="1554480"/>
+            <a:ext cx="3867912" cy="4526280"/>
+          </a:xfrm>
+          <a:prstGeom prst="roundRect">
+            <a:avLst>
+              <a:gd name="adj" fmla="val 8000"/>
+            </a:avLst>
+          </a:prstGeom>
+          <a:solidFill>
+            <a:srgbClr val="03306E"/>
+          </a:solidFill>
+          <a:ln>
+            <a:noFill/>
+          </a:ln>
+          <a:effectLst/>
+        </p:spPr>
+        <p:style>
+          <a:lnRef idx="1">
+            <a:schemeClr val="accent1"/>
+          </a:lnRef>
+          <a:fillRef idx="3">
+            <a:schemeClr val="accent1"/>
+          </a:fillRef>
+          <a:effectRef idx="2">
+            <a:schemeClr val="accent1"/>
+          </a:effectRef>
+          <a:fontRef idx="minor">
+            <a:schemeClr val="lt1"/>
+          </a:fontRef>
+        </p:style>
+        <p:txBody>
+          <a:bodyPr rtlCol="0" anchor="ctr"/>
+          <a:lstStyle/>
+          <a:p/>
+        </p:txBody>
+      </p:sp>
+      <p:sp>
+        <p:nvSpPr>
+          <p:cNvPr id="8" name="Oval 7"/>
+          <p:cNvSpPr/>
+          <p:nvPr/>
+        </p:nvSpPr>
+        <p:spPr>
+          <a:xfrm>
+            <a:off x="8046720" y="1828800"/>
+            <a:ext cx="548640" cy="548640"/>
+          </a:xfrm>
+          <a:prstGeom prst="ellipse">
+            <a:avLst/>
+          </a:prstGeom>
+          <a:solidFill>
+            <a:srgbClr val="F2B705"/>
+          </a:solidFill>
+          <a:ln>
+            <a:noFill/>
+          </a:ln>
+          <a:effectLst/>
+        </p:spPr>
+        <p:style>
+          <a:lnRef idx="1">
+            <a:schemeClr val="accent1"/>
+          </a:lnRef>
+          <a:fillRef idx="3">
+            <a:schemeClr val="accent1"/>
+          </a:fillRef>
+          <a:effectRef idx="2">
+            <a:schemeClr val="accent1"/>
+          </a:effectRef>
+          <a:fontRef idx="minor">
+            <a:schemeClr val="lt1"/>
+          </a:fontRef>
+        </p:style>
+        <p:txBody>
+          <a:bodyPr rtlCol="0" anchor="ctr" lIns="0" rIns="0" tIns="0" bIns="0"/>
+          <a:lstStyle/>
+          <a:p>
+            <a:pPr algn="ctr"/>
+            <a:r>
+              <a:rPr sz="1300" b="1">
+                <a:solidFill>
+                  <a:srgbClr val="202122"/>
+                </a:solidFill>
+                <a:latin typeface="Calibri"/>
+              </a:rPr>
+              <a:t>e.g.</a:t>
+            </a:r>
+          </a:p>
+        </p:txBody>
+      </p:sp>
+      <p:sp>
+        <p:nvSpPr>
+          <p:cNvPr id="9" name="TextBox 8"/>
+          <p:cNvSpPr txBox="1"/>
+          <p:nvPr/>
+        </p:nvSpPr>
+        <p:spPr>
+          <a:xfrm>
+            <a:off x="8046720" y="2560320"/>
+            <a:ext cx="3291840" cy="365760"/>
+          </a:xfrm>
+          <a:prstGeom prst="rect">
+            <a:avLst/>
+          </a:prstGeom>
+          <a:noFill/>
+        </p:spPr>
+        <p:txBody>
+          <a:bodyPr wrap="square" anchor="t" lIns="0" rIns="0" tIns="0" bIns="0"/>
+          <a:lstStyle/>
+          <a:p>
+            <a:pPr algn="l"/>
+            <a:r>
+              <a:rPr sz="1300" b="1" i="0">
+                <a:solidFill>
+                  <a:srgbClr val="A9C8F0"/>
+                </a:solidFill>
+                <a:latin typeface="Calibri"/>
+              </a:rPr>
+              <a:t>EXAMPLE</a:t>
+            </a:r>
+          </a:p>
+        </p:txBody>
+      </p:sp>
+      <p:sp>
+        <p:nvSpPr>
+          <p:cNvPr id="10" name="TextBox 9"/>
+          <p:cNvSpPr txBox="1"/>
+          <p:nvPr/>
+        </p:nvSpPr>
+        <p:spPr>
+          <a:xfrm>
+            <a:off x="8046720" y="2971800"/>
+            <a:ext cx="3291840" cy="2971800"/>
+          </a:xfrm>
+          <a:prstGeom prst="rect">
+            <a:avLst/>
+          </a:prstGeom>
+          <a:noFill/>
+        </p:spPr>
+        <p:txBody>
+          <a:bodyPr wrap="square" anchor="t" lIns="0" rIns="0" tIns="0" bIns="0"/>
+          <a:lstStyle/>
+          <a:p>
+            <a:pPr algn="l"/>
+            <a:r>
+              <a:rPr sz="1900" b="0" i="0">
+                <a:solidFill>
+                  <a:srgbClr val="FFFFFF"/>
+                </a:solidFill>
+                <a:latin typeface="Cambria"/>
+              </a:rPr>
+              <a:t>A factory certified to ISO 14001 cuts its energy bills by 15% after monitoring shows compressors running all night unnecessarily.</a:t>
+            </a:r>
+          </a:p>
+        </p:txBody>
+      </p:sp>
+    </p:spTree>
+  </p:cSld>
+  <p:clrMapOvr>
+    <a:masterClrMapping/>
+  </p:clrMapOvr>
+</p:sld>
+</file>
+
+<file path=ppt/slides/slide7.xml><?xml version="1.0" encoding="utf-8"?>
+<p:sld xmlns:a="http://schemas.openxmlformats.org/drawingml/2006/main" xmlns:p="http://schemas.openxmlformats.org/presentationml/2006/main" xmlns:r="http://schemas.openxmlformats.org/officeDocument/2006/relationships">
+  <p:cSld>
+    <p:bg>
+      <p:bgPr>
+        <a:solidFill>
+          <a:srgbClr val="FFFFFF"/>
+        </a:solidFill>
+        <a:effectLst/>
+      </p:bgPr>
+    </p:bg>
+    <p:spTree>
+      <p:nvGrpSpPr>
+        <p:cNvPr id="1" name=""/>
+        <p:cNvGrpSpPr/>
+        <p:nvPr/>
+      </p:nvGrpSpPr>
+      <p:grpSpPr/>
+      <p:sp>
+        <p:nvSpPr>
+          <p:cNvPr id="2" name="TextBox 1"/>
+          <p:cNvSpPr txBox="1"/>
+          <p:nvPr/>
+        </p:nvSpPr>
+        <p:spPr>
+          <a:xfrm>
+            <a:off x="548640" y="320040"/>
+            <a:ext cx="11094415" cy="274320"/>
+          </a:xfrm>
+          <a:prstGeom prst="rect">
+            <a:avLst/>
+          </a:prstGeom>
+          <a:noFill/>
+        </p:spPr>
+        <p:txBody>
+          <a:bodyPr wrap="square" anchor="t" lIns="0" rIns="0" tIns="0" bIns="0"/>
+          <a:lstStyle/>
+          <a:p>
+            <a:pPr algn="l"/>
+            <a:r>
+              <a:rPr sz="1100" b="1" i="0">
+                <a:solidFill>
+                  <a:srgbClr val="54595D"/>
+                </a:solidFill>
+                <a:latin typeface="Calibri"/>
+              </a:rPr>
+              <a:t>ENGINEERING CORE  ·  Core topic 12</a:t>
+            </a:r>
+          </a:p>
+        </p:txBody>
+      </p:sp>
+      <p:sp>
+        <p:nvSpPr>
+          <p:cNvPr id="3" name="TextBox 2"/>
+          <p:cNvSpPr txBox="1"/>
+          <p:nvPr/>
+        </p:nvSpPr>
+        <p:spPr>
+          <a:xfrm>
+            <a:off x="548640" y="566928"/>
+            <a:ext cx="11094415" cy="822960"/>
+          </a:xfrm>
+          <a:prstGeom prst="rect">
+            <a:avLst/>
+          </a:prstGeom>
+          <a:noFill/>
+        </p:spPr>
+        <p:txBody>
+          <a:bodyPr wrap="square" anchor="ctr" lIns="0" rIns="0" tIns="0" bIns="0"/>
+          <a:lstStyle/>
+          <a:p>
+            <a:pPr algn="l"/>
+            <a:r>
+              <a:rPr sz="3200" b="1" i="0">
+                <a:solidFill>
+                  <a:srgbClr val="03306E"/>
+                </a:solidFill>
+                <a:latin typeface="Cambria"/>
+              </a:rPr>
+              <a:t>ISO 14001</a:t>
+            </a:r>
+          </a:p>
+        </p:txBody>
+      </p:sp>
+      <p:sp>
+        <p:nvSpPr>
+          <p:cNvPr id="4" name="TextBox 3"/>
+          <p:cNvSpPr txBox="1"/>
+          <p:nvPr/>
+        </p:nvSpPr>
+        <p:spPr>
+          <a:xfrm>
+            <a:off x="548640" y="6446520"/>
+            <a:ext cx="8229600" cy="274320"/>
+          </a:xfrm>
+          <a:prstGeom prst="rect">
+            <a:avLst/>
+          </a:prstGeom>
+          <a:noFill/>
+        </p:spPr>
+        <p:txBody>
+          <a:bodyPr wrap="square" anchor="t" lIns="0" rIns="0" tIns="0" bIns="0"/>
+          <a:lstStyle/>
+          <a:p>
+            <a:pPr algn="l"/>
+            <a:r>
+              <a:rPr sz="1000" b="0" i="0">
+                <a:solidFill>
+                  <a:srgbClr val="54595D"/>
+                </a:solidFill>
+                <a:latin typeface="Calibri"/>
+              </a:rPr>
+              <a:t>Design and Development for Engineering and Manufacturing T Level  ·  Environmental Legislation and Waste</a:t>
+            </a:r>
+          </a:p>
+        </p:txBody>
+      </p:sp>
+      <p:sp>
+        <p:nvSpPr>
+          <p:cNvPr id="5" name="TextBox 4"/>
+          <p:cNvSpPr txBox="1"/>
+          <p:nvPr/>
+        </p:nvSpPr>
+        <p:spPr>
+          <a:xfrm>
+            <a:off x="10728655" y="6446520"/>
+            <a:ext cx="914400" cy="274320"/>
+          </a:xfrm>
+          <a:prstGeom prst="rect">
+            <a:avLst/>
+          </a:prstGeom>
+          <a:noFill/>
+        </p:spPr>
+        <p:txBody>
+          <a:bodyPr wrap="square" anchor="t" lIns="0" rIns="0" tIns="0" bIns="0"/>
+          <a:lstStyle/>
+          <a:p>
+            <a:pPr algn="r"/>
+            <a:r>
+              <a:rPr sz="1000" b="0" i="0">
+                <a:solidFill>
+                  <a:srgbClr val="54595D"/>
+                </a:solidFill>
+                <a:latin typeface="Calibri"/>
+              </a:rPr>
+              <a:t>7</a:t>
+            </a:r>
+          </a:p>
+        </p:txBody>
+      </p:sp>
+      <p:sp>
+        <p:nvSpPr>
+          <p:cNvPr id="6" name="Rounded Rectangle 5"/>
+          <p:cNvSpPr/>
+          <p:nvPr/>
+        </p:nvSpPr>
+        <p:spPr>
+          <a:xfrm>
+            <a:off x="548640" y="1600200"/>
+            <a:ext cx="5364327" cy="640080"/>
+          </a:xfrm>
+          <a:prstGeom prst="roundRect">
+            <a:avLst>
+              <a:gd name="adj" fmla="val 15000"/>
+            </a:avLst>
+          </a:prstGeom>
+          <a:solidFill>
+            <a:srgbClr val="03306E"/>
+          </a:solidFill>
+          <a:ln>
+            <a:noFill/>
+          </a:ln>
+          <a:effectLst/>
+        </p:spPr>
+        <p:style>
+          <a:lnRef idx="1">
+            <a:schemeClr val="accent1"/>
+          </a:lnRef>
+          <a:fillRef idx="3">
+            <a:schemeClr val="accent1"/>
+          </a:fillRef>
+          <a:effectRef idx="2">
+            <a:schemeClr val="accent1"/>
+          </a:effectRef>
+          <a:fontRef idx="minor">
+            <a:schemeClr val="lt1"/>
+          </a:fontRef>
+        </p:style>
+        <p:txBody>
+          <a:bodyPr rtlCol="0" anchor="ctr"/>
+          <a:lstStyle/>
+          <a:p/>
+        </p:txBody>
+      </p:sp>
+      <p:sp>
+        <p:nvSpPr>
+          <p:cNvPr id="7" name="TextBox 6"/>
+          <p:cNvSpPr txBox="1"/>
+          <p:nvPr/>
+        </p:nvSpPr>
+        <p:spPr>
+          <a:xfrm>
+            <a:off x="777240" y="1600200"/>
+            <a:ext cx="4907127" cy="640080"/>
+          </a:xfrm>
+          <a:prstGeom prst="rect">
+            <a:avLst/>
+          </a:prstGeom>
+          <a:noFill/>
+        </p:spPr>
+        <p:txBody>
+          <a:bodyPr wrap="square" anchor="ctr" lIns="0" rIns="0" tIns="0" bIns="0"/>
+          <a:lstStyle/>
+          <a:p>
+            <a:pPr algn="l"/>
+            <a:r>
+              <a:rPr sz="2000" b="1" i="0">
+                <a:solidFill>
+                  <a:srgbClr val="FFFFFF"/>
+                </a:solidFill>
+                <a:latin typeface="Calibri"/>
+              </a:rPr>
+              <a:t>Aims and benefits</a:t>
+            </a:r>
+          </a:p>
+        </p:txBody>
+      </p:sp>
+      <p:sp>
+        <p:nvSpPr>
+          <p:cNvPr id="8" name="Rounded Rectangle 7"/>
+          <p:cNvSpPr/>
+          <p:nvPr/>
+        </p:nvSpPr>
+        <p:spPr>
+          <a:xfrm>
+            <a:off x="548640" y="2377440"/>
+            <a:ext cx="5364327" cy="3794760"/>
+          </a:xfrm>
+          <a:prstGeom prst="roundRect">
+            <a:avLst>
+              <a:gd name="adj" fmla="val 4000"/>
+            </a:avLst>
+          </a:prstGeom>
+          <a:solidFill>
+            <a:srgbClr val="EAF3FF"/>
+          </a:solidFill>
+          <a:ln>
+            <a:noFill/>
+          </a:ln>
+          <a:effectLst/>
+        </p:spPr>
+        <p:style>
+          <a:lnRef idx="1">
+            <a:schemeClr val="accent1"/>
+          </a:lnRef>
+          <a:fillRef idx="3">
+            <a:schemeClr val="accent1"/>
+          </a:fillRef>
+          <a:effectRef idx="2">
+            <a:schemeClr val="accent1"/>
+          </a:effectRef>
+          <a:fontRef idx="minor">
+            <a:schemeClr val="lt1"/>
+          </a:fontRef>
+        </p:style>
+        <p:txBody>
+          <a:bodyPr rtlCol="0" anchor="ctr"/>
+          <a:lstStyle/>
+          <a:p/>
+        </p:txBody>
+      </p:sp>
+      <p:sp>
+        <p:nvSpPr>
+          <p:cNvPr id="9" name="TextBox 8"/>
+          <p:cNvSpPr txBox="1"/>
+          <p:nvPr/>
+        </p:nvSpPr>
+        <p:spPr>
+          <a:xfrm>
+            <a:off x="822959" y="2606040"/>
+            <a:ext cx="4815687" cy="3337560"/>
+          </a:xfrm>
+          <a:prstGeom prst="rect">
+            <a:avLst/>
+          </a:prstGeom>
+          <a:noFill/>
+        </p:spPr>
+        <p:txBody>
+          <a:bodyPr wrap="square" lIns="0" rIns="0" tIns="0" bIns="0">
+            <a:spAutoFit/>
+          </a:bodyPr>
+          <a:lstStyle/>
+          <a:p>
+            <a:pPr marL="274320" indent="-274320">
+              <a:spcAft>
+                <a:spcPts val="990"/>
+              </a:spcAft>
+              <a:buClr>
+                <a:srgbClr val="0645AD"/>
+              </a:buClr>
+              <a:buFont typeface="Arial"/>
+              <a:buChar char="•"/>
+            </a:pPr>
+            <a:r>
+              <a:rPr sz="2200" b="0">
+                <a:solidFill>
+                  <a:srgbClr val="202122"/>
+                </a:solidFill>
+                <a:latin typeface="Calibri"/>
+              </a:rPr>
+              <a:t>An environmental management system</a:t>
+            </a:r>
+          </a:p>
+          <a:p>
+            <a:pPr marL="274320" indent="-274320">
+              <a:spcAft>
+                <a:spcPts val="990"/>
+              </a:spcAft>
+              <a:buClr>
+                <a:srgbClr val="0645AD"/>
+              </a:buClr>
+              <a:buFont typeface="Arial"/>
+              <a:buChar char="•"/>
+            </a:pPr>
+            <a:r>
+              <a:rPr sz="2200" b="0">
+                <a:solidFill>
+                  <a:srgbClr val="202122"/>
+                </a:solidFill>
+                <a:latin typeface="Calibri"/>
+              </a:rPr>
+              <a:t>Identify and reduce environmental impact</a:t>
+            </a:r>
+          </a:p>
+          <a:p>
+            <a:pPr marL="274320" indent="-274320">
+              <a:spcAft>
+                <a:spcPts val="990"/>
+              </a:spcAft>
+              <a:buClr>
+                <a:srgbClr val="0645AD"/>
+              </a:buClr>
+              <a:buFont typeface="Arial"/>
+              <a:buChar char="•"/>
+            </a:pPr>
+            <a:r>
+              <a:rPr sz="2200" b="0">
+                <a:solidFill>
+                  <a:srgbClr val="202122"/>
+                </a:solidFill>
+                <a:latin typeface="Calibri"/>
+              </a:rPr>
+              <a:t>Comply with the law</a:t>
+            </a:r>
+          </a:p>
+          <a:p>
+            <a:pPr marL="274320" indent="-274320">
+              <a:spcAft>
+                <a:spcPts val="990"/>
+              </a:spcAft>
+              <a:buClr>
+                <a:srgbClr val="0645AD"/>
+              </a:buClr>
+              <a:buFont typeface="Arial"/>
+              <a:buChar char="•"/>
+            </a:pPr>
+            <a:r>
+              <a:rPr sz="2200" b="0">
+                <a:solidFill>
+                  <a:srgbClr val="202122"/>
+                </a:solidFill>
+                <a:latin typeface="Calibri"/>
+              </a:rPr>
+              <a:t>Lower costs and better reputation</a:t>
+            </a:r>
+          </a:p>
+        </p:txBody>
+      </p:sp>
+      <p:sp>
+        <p:nvSpPr>
+          <p:cNvPr id="10" name="Rounded Rectangle 9"/>
+          <p:cNvSpPr/>
+          <p:nvPr/>
+        </p:nvSpPr>
+        <p:spPr>
+          <a:xfrm>
+            <a:off x="6278727" y="1600200"/>
+            <a:ext cx="5364327" cy="640080"/>
+          </a:xfrm>
+          <a:prstGeom prst="roundRect">
+            <a:avLst>
+              <a:gd name="adj" fmla="val 15000"/>
+            </a:avLst>
+          </a:prstGeom>
+          <a:solidFill>
+            <a:srgbClr val="0645AD"/>
+          </a:solidFill>
+          <a:ln>
+            <a:noFill/>
+          </a:ln>
+          <a:effectLst/>
+        </p:spPr>
+        <p:style>
+          <a:lnRef idx="1">
+            <a:schemeClr val="accent1"/>
+          </a:lnRef>
+          <a:fillRef idx="3">
+            <a:schemeClr val="accent1"/>
+          </a:fillRef>
+          <a:effectRef idx="2">
+            <a:schemeClr val="accent1"/>
+          </a:effectRef>
+          <a:fontRef idx="minor">
+            <a:schemeClr val="lt1"/>
+          </a:fontRef>
+        </p:style>
+        <p:txBody>
+          <a:bodyPr rtlCol="0" anchor="ctr"/>
+          <a:lstStyle/>
+          <a:p/>
+        </p:txBody>
+      </p:sp>
+      <p:sp>
+        <p:nvSpPr>
+          <p:cNvPr id="11" name="TextBox 10"/>
+          <p:cNvSpPr txBox="1"/>
+          <p:nvPr/>
+        </p:nvSpPr>
+        <p:spPr>
+          <a:xfrm>
+            <a:off x="6507327" y="1600200"/>
+            <a:ext cx="4907127" cy="640080"/>
+          </a:xfrm>
+          <a:prstGeom prst="rect">
+            <a:avLst/>
+          </a:prstGeom>
+          <a:noFill/>
+        </p:spPr>
+        <p:txBody>
+          <a:bodyPr wrap="square" anchor="ctr" lIns="0" rIns="0" tIns="0" bIns="0"/>
+          <a:lstStyle/>
+          <a:p>
+            <a:pPr algn="l"/>
+            <a:r>
+              <a:rPr sz="2000" b="1" i="0">
+                <a:solidFill>
+                  <a:srgbClr val="FFFFFF"/>
+                </a:solidFill>
+                <a:latin typeface="Calibri"/>
+              </a:rPr>
+              <a:t>If ignored</a:t>
+            </a:r>
+          </a:p>
+        </p:txBody>
+      </p:sp>
+      <p:sp>
+        <p:nvSpPr>
+          <p:cNvPr id="12" name="Rounded Rectangle 11"/>
+          <p:cNvSpPr/>
+          <p:nvPr/>
+        </p:nvSpPr>
+        <p:spPr>
+          <a:xfrm>
+            <a:off x="6278727" y="2377440"/>
+            <a:ext cx="5364327" cy="3794760"/>
+          </a:xfrm>
+          <a:prstGeom prst="roundRect">
+            <a:avLst>
+              <a:gd name="adj" fmla="val 4000"/>
+            </a:avLst>
+          </a:prstGeom>
+          <a:solidFill>
+            <a:srgbClr val="EAF3FF"/>
+          </a:solidFill>
+          <a:ln>
+            <a:noFill/>
+          </a:ln>
+          <a:effectLst/>
+        </p:spPr>
+        <p:style>
+          <a:lnRef idx="1">
+            <a:schemeClr val="accent1"/>
+          </a:lnRef>
+          <a:fillRef idx="3">
+            <a:schemeClr val="accent1"/>
+          </a:fillRef>
+          <a:effectRef idx="2">
+            <a:schemeClr val="accent1"/>
+          </a:effectRef>
+          <a:fontRef idx="minor">
+            <a:schemeClr val="lt1"/>
+          </a:fontRef>
+        </p:style>
+        <p:txBody>
+          <a:bodyPr rtlCol="0" anchor="ctr"/>
+          <a:lstStyle/>
+          <a:p/>
+        </p:txBody>
+      </p:sp>
+      <p:sp>
+        <p:nvSpPr>
+          <p:cNvPr id="13" name="TextBox 12"/>
+          <p:cNvSpPr txBox="1"/>
+          <p:nvPr/>
+        </p:nvSpPr>
+        <p:spPr>
+          <a:xfrm>
+            <a:off x="6553047" y="2606040"/>
+            <a:ext cx="4815687" cy="3337560"/>
+          </a:xfrm>
+          <a:prstGeom prst="rect">
+            <a:avLst/>
+          </a:prstGeom>
+          <a:noFill/>
+        </p:spPr>
+        <p:txBody>
+          <a:bodyPr wrap="square" lIns="0" rIns="0" tIns="0" bIns="0">
+            <a:spAutoFit/>
+          </a:bodyPr>
+          <a:lstStyle/>
+          <a:p>
+            <a:pPr marL="274320" indent="-274320">
+              <a:spcAft>
+                <a:spcPts val="990"/>
+              </a:spcAft>
+              <a:buClr>
+                <a:srgbClr val="0645AD"/>
+              </a:buClr>
+              <a:buFont typeface="Arial"/>
+              <a:buChar char="•"/>
+            </a:pPr>
+            <a:r>
+              <a:rPr sz="2200" b="0">
+                <a:solidFill>
+                  <a:srgbClr val="202122"/>
+                </a:solidFill>
+                <a:latin typeface="Calibri"/>
+              </a:rPr>
+              <a:t>Fines and prosecution</a:t>
+            </a:r>
+          </a:p>
+          <a:p>
+            <a:pPr marL="274320" indent="-274320">
+              <a:spcAft>
+                <a:spcPts val="990"/>
+              </a:spcAft>
+              <a:buClr>
+                <a:srgbClr val="0645AD"/>
+              </a:buClr>
+              <a:buFont typeface="Arial"/>
+              <a:buChar char="•"/>
+            </a:pPr>
+            <a:r>
+              <a:rPr sz="2200" b="0">
+                <a:solidFill>
+                  <a:srgbClr val="202122"/>
+                </a:solidFill>
+                <a:latin typeface="Calibri"/>
+              </a:rPr>
+              <a:t>Lost contracts</a:t>
+            </a:r>
+          </a:p>
+          <a:p>
+            <a:pPr marL="274320" indent="-274320">
+              <a:spcAft>
+                <a:spcPts val="990"/>
+              </a:spcAft>
+              <a:buClr>
+                <a:srgbClr val="0645AD"/>
+              </a:buClr>
+              <a:buFont typeface="Arial"/>
+              <a:buChar char="•"/>
+            </a:pPr>
+            <a:r>
+              <a:rPr sz="2200" b="0">
+                <a:solidFill>
+                  <a:srgbClr val="202122"/>
+                </a:solidFill>
+                <a:latin typeface="Calibri"/>
+              </a:rPr>
+              <a:t>Environmental damage</a:t>
+            </a:r>
+          </a:p>
+          <a:p>
+            <a:pPr marL="274320" indent="-274320">
+              <a:spcAft>
+                <a:spcPts val="990"/>
+              </a:spcAft>
+              <a:buClr>
+                <a:srgbClr val="0645AD"/>
+              </a:buClr>
+              <a:buFont typeface="Arial"/>
+              <a:buChar char="•"/>
+            </a:pPr>
+            <a:r>
+              <a:rPr sz="2200" b="0">
+                <a:solidFill>
+                  <a:srgbClr val="202122"/>
+                </a:solidFill>
+                <a:latin typeface="Calibri"/>
+              </a:rPr>
+              <a:t>Reputational harm</a:t>
+            </a:r>
+          </a:p>
+        </p:txBody>
+      </p:sp>
+    </p:spTree>
+  </p:cSld>
+  <p:clrMapOvr>
+    <a:masterClrMapping/>
+  </p:clrMapOvr>
+</p:sld>
+</file>
+
+<file path=ppt/slides/slide8.xml><?xml version="1.0" encoding="utf-8"?>
+<p:sld xmlns:a="http://schemas.openxmlformats.org/drawingml/2006/main" xmlns:p="http://schemas.openxmlformats.org/presentationml/2006/main" xmlns:r="http://schemas.openxmlformats.org/officeDocument/2006/relationships">
+  <p:cSld>
+    <p:bg>
+      <p:bgPr>
+        <a:solidFill>
+          <a:srgbClr val="FFFFFF"/>
+        </a:solidFill>
+        <a:effectLst/>
+      </p:bgPr>
+    </p:bg>
+    <p:spTree>
+      <p:nvGrpSpPr>
+        <p:cNvPr id="1" name=""/>
+        <p:cNvGrpSpPr/>
+        <p:nvPr/>
+      </p:nvGrpSpPr>
+      <p:grpSpPr/>
+      <p:sp>
+        <p:nvSpPr>
+          <p:cNvPr id="2" name="TextBox 1"/>
+          <p:cNvSpPr txBox="1"/>
+          <p:nvPr/>
+        </p:nvSpPr>
+        <p:spPr>
+          <a:xfrm>
+            <a:off x="548640" y="320040"/>
+            <a:ext cx="11094415" cy="274320"/>
+          </a:xfrm>
+          <a:prstGeom prst="rect">
+            <a:avLst/>
+          </a:prstGeom>
+          <a:noFill/>
+        </p:spPr>
+        <p:txBody>
+          <a:bodyPr wrap="square" anchor="t" lIns="0" rIns="0" tIns="0" bIns="0"/>
+          <a:lstStyle/>
+          <a:p>
+            <a:pPr algn="l"/>
+            <a:r>
+              <a:rPr sz="1100" b="1" i="0">
+                <a:solidFill>
+                  <a:srgbClr val="54595D"/>
+                </a:solidFill>
+                <a:latin typeface="Calibri"/>
+              </a:rPr>
+              <a:t>ENGINEERING CORE  ·  Core topic 12</a:t>
+            </a:r>
+          </a:p>
+        </p:txBody>
+      </p:sp>
+      <p:sp>
+        <p:nvSpPr>
+          <p:cNvPr id="3" name="TextBox 2"/>
+          <p:cNvSpPr txBox="1"/>
+          <p:nvPr/>
+        </p:nvSpPr>
+        <p:spPr>
+          <a:xfrm>
+            <a:off x="548640" y="566928"/>
+            <a:ext cx="11094415" cy="822960"/>
+          </a:xfrm>
+          <a:prstGeom prst="rect">
+            <a:avLst/>
+          </a:prstGeom>
+          <a:noFill/>
+        </p:spPr>
+        <p:txBody>
+          <a:bodyPr wrap="square" anchor="ctr" lIns="0" rIns="0" tIns="0" bIns="0"/>
+          <a:lstStyle/>
+          <a:p>
+            <a:pPr algn="l"/>
+            <a:r>
+              <a:rPr sz="3200" b="1" i="0">
+                <a:solidFill>
+                  <a:srgbClr val="03306E"/>
+                </a:solidFill>
+                <a:latin typeface="Cambria"/>
+              </a:rPr>
+              <a:t>Quick check: ISO 14001</a:t>
+            </a:r>
+          </a:p>
+        </p:txBody>
+      </p:sp>
+      <p:sp>
+        <p:nvSpPr>
+          <p:cNvPr id="4" name="TextBox 3"/>
+          <p:cNvSpPr txBox="1"/>
+          <p:nvPr/>
+        </p:nvSpPr>
+        <p:spPr>
+          <a:xfrm>
+            <a:off x="548640" y="6446520"/>
+            <a:ext cx="8229600" cy="274320"/>
+          </a:xfrm>
+          <a:prstGeom prst="rect">
+            <a:avLst/>
+          </a:prstGeom>
+          <a:noFill/>
+        </p:spPr>
+        <p:txBody>
+          <a:bodyPr wrap="square" anchor="t" lIns="0" rIns="0" tIns="0" bIns="0"/>
+          <a:lstStyle/>
+          <a:p>
+            <a:pPr algn="l"/>
+            <a:r>
+              <a:rPr sz="1000" b="0" i="0">
+                <a:solidFill>
+                  <a:srgbClr val="54595D"/>
+                </a:solidFill>
+                <a:latin typeface="Calibri"/>
+              </a:rPr>
+              <a:t>Design and Development for Engineering and Manufacturing T Level  ·  Environmental Legislation and Waste</a:t>
+            </a:r>
+          </a:p>
+        </p:txBody>
+      </p:sp>
+      <p:sp>
+        <p:nvSpPr>
+          <p:cNvPr id="5" name="TextBox 4"/>
+          <p:cNvSpPr txBox="1"/>
+          <p:nvPr/>
+        </p:nvSpPr>
+        <p:spPr>
+          <a:xfrm>
+            <a:off x="10728655" y="6446520"/>
+            <a:ext cx="914400" cy="274320"/>
+          </a:xfrm>
+          <a:prstGeom prst="rect">
+            <a:avLst/>
+          </a:prstGeom>
+          <a:noFill/>
+        </p:spPr>
+        <p:txBody>
+          <a:bodyPr wrap="square" anchor="t" lIns="0" rIns="0" tIns="0" bIns="0"/>
+          <a:lstStyle/>
+          <a:p>
+            <a:pPr algn="r"/>
+            <a:r>
+              <a:rPr sz="1000" b="0" i="0">
+                <a:solidFill>
+                  <a:srgbClr val="54595D"/>
+                </a:solidFill>
+                <a:latin typeface="Calibri"/>
+              </a:rPr>
+              <a:t>8</a:t>
+            </a:r>
+          </a:p>
+        </p:txBody>
+      </p:sp>
+      <p:sp>
+        <p:nvSpPr>
+          <p:cNvPr id="6" name="Oval 5"/>
+          <p:cNvSpPr/>
+          <p:nvPr/>
+        </p:nvSpPr>
+        <p:spPr>
+          <a:xfrm>
+            <a:off x="548640" y="1691640"/>
+            <a:ext cx="502920" cy="502920"/>
+          </a:xfrm>
+          <a:prstGeom prst="ellipse">
+            <a:avLst/>
+          </a:prstGeom>
+          <a:solidFill>
+            <a:srgbClr val="F2B705"/>
+          </a:solidFill>
+          <a:ln>
+            <a:noFill/>
+          </a:ln>
+          <a:effectLst/>
+        </p:spPr>
+        <p:style>
+          <a:lnRef idx="1">
+            <a:schemeClr val="accent1"/>
+          </a:lnRef>
+          <a:fillRef idx="3">
+            <a:schemeClr val="accent1"/>
+          </a:fillRef>
+          <a:effectRef idx="2">
+            <a:schemeClr val="accent1"/>
+          </a:effectRef>
+          <a:fontRef idx="minor">
+            <a:schemeClr val="lt1"/>
+          </a:fontRef>
+        </p:style>
+        <p:txBody>
+          <a:bodyPr rtlCol="0" anchor="ctr" lIns="0" rIns="0" tIns="0" bIns="0"/>
+          <a:lstStyle/>
+          <a:p>
+            <a:pPr algn="ctr"/>
+            <a:r>
+              <a:rPr sz="1600" b="1">
+                <a:solidFill>
+                  <a:srgbClr val="202122"/>
+                </a:solidFill>
+                <a:latin typeface="Calibri"/>
+              </a:rPr>
+              <a:t>1</a:t>
+            </a:r>
+          </a:p>
+        </p:txBody>
+      </p:sp>
+      <p:sp>
+        <p:nvSpPr>
+          <p:cNvPr id="7" name="TextBox 6"/>
+          <p:cNvSpPr txBox="1"/>
+          <p:nvPr/>
+        </p:nvSpPr>
+        <p:spPr>
+          <a:xfrm>
+            <a:off x="1371600" y="1645920"/>
+            <a:ext cx="10271455" cy="1188720"/>
+          </a:xfrm>
+          <a:prstGeom prst="rect">
+            <a:avLst/>
+          </a:prstGeom>
+          <a:noFill/>
+        </p:spPr>
+        <p:txBody>
+          <a:bodyPr wrap="square" anchor="t" lIns="0" rIns="0" tIns="0" bIns="0"/>
+          <a:lstStyle/>
+          <a:p>
+            <a:pPr algn="l"/>
+            <a:r>
+              <a:rPr sz="2400" b="0" i="0">
+                <a:solidFill>
+                  <a:srgbClr val="202122"/>
+                </a:solidFill>
+                <a:latin typeface="Calibri"/>
+              </a:rPr>
+              <a:t>What does ISO 14001 cover?</a:t>
+            </a:r>
+          </a:p>
+        </p:txBody>
+      </p:sp>
+      <p:sp>
+        <p:nvSpPr>
+          <p:cNvPr id="8" name="Oval 7"/>
+          <p:cNvSpPr/>
+          <p:nvPr/>
+        </p:nvSpPr>
+        <p:spPr>
+          <a:xfrm>
+            <a:off x="548640" y="3108960"/>
+            <a:ext cx="502920" cy="502920"/>
+          </a:xfrm>
+          <a:prstGeom prst="ellipse">
+            <a:avLst/>
+          </a:prstGeom>
+          <a:solidFill>
+            <a:srgbClr val="F2B705"/>
+          </a:solidFill>
+          <a:ln>
+            <a:noFill/>
+          </a:ln>
+          <a:effectLst/>
+        </p:spPr>
+        <p:style>
+          <a:lnRef idx="1">
+            <a:schemeClr val="accent1"/>
+          </a:lnRef>
+          <a:fillRef idx="3">
+            <a:schemeClr val="accent1"/>
+          </a:fillRef>
+          <a:effectRef idx="2">
+            <a:schemeClr val="accent1"/>
+          </a:effectRef>
+          <a:fontRef idx="minor">
+            <a:schemeClr val="lt1"/>
+          </a:fontRef>
+        </p:style>
+        <p:txBody>
+          <a:bodyPr rtlCol="0" anchor="ctr" lIns="0" rIns="0" tIns="0" bIns="0"/>
+          <a:lstStyle/>
+          <a:p>
+            <a:pPr algn="ctr"/>
+            <a:r>
+              <a:rPr sz="1600" b="1">
+                <a:solidFill>
+                  <a:srgbClr val="202122"/>
+                </a:solidFill>
+                <a:latin typeface="Calibri"/>
+              </a:rPr>
+              <a:t>2</a:t>
+            </a:r>
+          </a:p>
+        </p:txBody>
+      </p:sp>
+      <p:sp>
+        <p:nvSpPr>
+          <p:cNvPr id="9" name="TextBox 8"/>
+          <p:cNvSpPr txBox="1"/>
+          <p:nvPr/>
+        </p:nvSpPr>
+        <p:spPr>
+          <a:xfrm>
+            <a:off x="1371600" y="3063240"/>
+            <a:ext cx="10271455" cy="1188720"/>
+          </a:xfrm>
+          <a:prstGeom prst="rect">
+            <a:avLst/>
+          </a:prstGeom>
+          <a:noFill/>
+        </p:spPr>
+        <p:txBody>
+          <a:bodyPr wrap="square" anchor="t" lIns="0" rIns="0" tIns="0" bIns="0"/>
+          <a:lstStyle/>
+          <a:p>
+            <a:pPr algn="l"/>
+            <a:r>
+              <a:rPr sz="2400" b="0" i="0">
+                <a:solidFill>
+                  <a:srgbClr val="202122"/>
+                </a:solidFill>
+                <a:latin typeface="Calibri"/>
+              </a:rPr>
+              <a:t>Give two benefits.</a:t>
+            </a:r>
+          </a:p>
+        </p:txBody>
+      </p:sp>
+      <p:sp>
+        <p:nvSpPr>
+          <p:cNvPr id="10" name="Oval 9"/>
+          <p:cNvSpPr/>
+          <p:nvPr/>
+        </p:nvSpPr>
+        <p:spPr>
+          <a:xfrm>
+            <a:off x="548640" y="4526280"/>
+            <a:ext cx="502920" cy="502920"/>
+          </a:xfrm>
+          <a:prstGeom prst="ellipse">
+            <a:avLst/>
+          </a:prstGeom>
+          <a:solidFill>
+            <a:srgbClr val="F2B705"/>
+          </a:solidFill>
+          <a:ln>
+            <a:noFill/>
+          </a:ln>
+          <a:effectLst/>
+        </p:spPr>
+        <p:style>
+          <a:lnRef idx="1">
+            <a:schemeClr val="accent1"/>
+          </a:lnRef>
+          <a:fillRef idx="3">
+            <a:schemeClr val="accent1"/>
+          </a:fillRef>
+          <a:effectRef idx="2">
+            <a:schemeClr val="accent1"/>
+          </a:effectRef>
+          <a:fontRef idx="minor">
+            <a:schemeClr val="lt1"/>
+          </a:fontRef>
+        </p:style>
+        <p:txBody>
+          <a:bodyPr rtlCol="0" anchor="ctr" lIns="0" rIns="0" tIns="0" bIns="0"/>
+          <a:lstStyle/>
+          <a:p>
+            <a:pPr algn="ctr"/>
+            <a:r>
+              <a:rPr sz="1600" b="1">
+                <a:solidFill>
+                  <a:srgbClr val="202122"/>
+                </a:solidFill>
+                <a:latin typeface="Calibri"/>
+              </a:rPr>
+              <a:t>3</a:t>
+            </a:r>
+          </a:p>
+        </p:txBody>
+      </p:sp>
+      <p:sp>
+        <p:nvSpPr>
+          <p:cNvPr id="11" name="TextBox 10"/>
+          <p:cNvSpPr txBox="1"/>
+          <p:nvPr/>
+        </p:nvSpPr>
+        <p:spPr>
+          <a:xfrm>
+            <a:off x="1371600" y="4480560"/>
+            <a:ext cx="10271455" cy="1188720"/>
+          </a:xfrm>
+          <a:prstGeom prst="rect">
+            <a:avLst/>
+          </a:prstGeom>
+          <a:noFill/>
+        </p:spPr>
+        <p:txBody>
+          <a:bodyPr wrap="square" anchor="t" lIns="0" rIns="0" tIns="0" bIns="0"/>
+          <a:lstStyle/>
+          <a:p>
+            <a:pPr algn="l"/>
+            <a:r>
+              <a:rPr sz="2400" b="0" i="0">
+                <a:solidFill>
+                  <a:srgbClr val="202122"/>
+                </a:solidFill>
+                <a:latin typeface="Calibri"/>
+              </a:rPr>
+              <a:t>Give one consequence of ignoring environmental law.</a:t>
+            </a:r>
+          </a:p>
+        </p:txBody>
+      </p:sp>
+      <p:sp>
+        <p:nvSpPr>
+          <p:cNvPr id="12" name="TextBox 11"/>
+          <p:cNvSpPr txBox="1"/>
+          <p:nvPr/>
+        </p:nvSpPr>
+        <p:spPr>
+          <a:xfrm>
+            <a:off x="548640" y="5852160"/>
+            <a:ext cx="11094415" cy="365760"/>
+          </a:xfrm>
+          <a:prstGeom prst="rect">
+            <a:avLst/>
+          </a:prstGeom>
+          <a:noFill/>
+        </p:spPr>
+        <p:txBody>
+          <a:bodyPr wrap="square" anchor="t" lIns="0" rIns="0" tIns="0" bIns="0"/>
+          <a:lstStyle/>
+          <a:p>
+            <a:pPr algn="l"/>
+            <a:r>
+              <a:rPr sz="1300" b="0" i="1">
+                <a:solidFill>
+                  <a:srgbClr val="54595D"/>
+                </a:solidFill>
+                <a:latin typeface="Calibri"/>
+              </a:rPr>
+              <a:t>Answer on mini whiteboards or in your book. Answers are in the speaker notes.</a:t>
+            </a:r>
+          </a:p>
+        </p:txBody>
+      </p:sp>
+    </p:spTree>
+  </p:cSld>
+  <p:clrMapOvr>
+    <a:masterClrMapping/>
+  </p:clrMapOvr>
+</p:sld>
+</file>
+
+<file path=ppt/slides/slide9.xml><?xml version="1.0" encoding="utf-8"?>
+<p:sld xmlns:a="http://schemas.openxmlformats.org/drawingml/2006/main" xmlns:p="http://schemas.openxmlformats.org/presentationml/2006/main" xmlns:r="http://schemas.openxmlformats.org/officeDocument/2006/relationships">
+  <p:cSld>
+    <p:bg>
+      <p:bgPr>
+        <a:solidFill>
+          <a:srgbClr val="FFFFFF"/>
+        </a:solidFill>
+        <a:effectLst/>
+      </p:bgPr>
+    </p:bg>
+    <p:spTree>
+      <p:nvGrpSpPr>
+        <p:cNvPr id="1" name=""/>
+        <p:cNvGrpSpPr/>
+        <p:nvPr/>
+      </p:nvGrpSpPr>
+      <p:grpSpPr/>
+      <p:sp>
+        <p:nvSpPr>
+          <p:cNvPr id="2" name="TextBox 1"/>
+          <p:cNvSpPr txBox="1"/>
+          <p:nvPr/>
+        </p:nvSpPr>
+        <p:spPr>
+          <a:xfrm>
+            <a:off x="548640" y="320040"/>
+            <a:ext cx="11094415" cy="274320"/>
+          </a:xfrm>
+          <a:prstGeom prst="rect">
+            <a:avLst/>
+          </a:prstGeom>
+          <a:noFill/>
+        </p:spPr>
+        <p:txBody>
+          <a:bodyPr wrap="square" anchor="t" lIns="0" rIns="0" tIns="0" bIns="0"/>
+          <a:lstStyle/>
+          <a:p>
+            <a:pPr algn="l"/>
+            <a:r>
+              <a:rPr sz="1100" b="1" i="0">
+                <a:solidFill>
+                  <a:srgbClr val="54595D"/>
+                </a:solidFill>
+                <a:latin typeface="Calibri"/>
+              </a:rPr>
+              <a:t>ENGINEERING CORE  ·  Core topic 12</a:t>
+            </a:r>
+          </a:p>
+        </p:txBody>
+      </p:sp>
+      <p:sp>
+        <p:nvSpPr>
+          <p:cNvPr id="3" name="TextBox 2"/>
+          <p:cNvSpPr txBox="1"/>
+          <p:nvPr/>
+        </p:nvSpPr>
+        <p:spPr>
+          <a:xfrm>
+            <a:off x="548640" y="566928"/>
+            <a:ext cx="11094415" cy="822960"/>
+          </a:xfrm>
+          <a:prstGeom prst="rect">
+            <a:avLst/>
+          </a:prstGeom>
+          <a:noFill/>
+        </p:spPr>
+        <p:txBody>
+          <a:bodyPr wrap="square" anchor="ctr" lIns="0" rIns="0" tIns="0" bIns="0"/>
+          <a:lstStyle/>
+          <a:p>
+            <a:pPr algn="l"/>
+            <a:r>
+              <a:rPr sz="3200" b="1" i="0">
+                <a:solidFill>
+                  <a:srgbClr val="03306E"/>
+                </a:solidFill>
+                <a:latin typeface="Cambria"/>
+              </a:rPr>
+              <a:t>Waste disposal</a:t>
+            </a:r>
+          </a:p>
+        </p:txBody>
+      </p:sp>
+      <p:sp>
+        <p:nvSpPr>
+          <p:cNvPr id="4" name="TextBox 3"/>
+          <p:cNvSpPr txBox="1"/>
+          <p:nvPr/>
+        </p:nvSpPr>
+        <p:spPr>
+          <a:xfrm>
+            <a:off x="548640" y="6446520"/>
+            <a:ext cx="8229600" cy="274320"/>
+          </a:xfrm>
+          <a:prstGeom prst="rect">
+            <a:avLst/>
+          </a:prstGeom>
+          <a:noFill/>
+        </p:spPr>
+        <p:txBody>
+          <a:bodyPr wrap="square" anchor="t" lIns="0" rIns="0" tIns="0" bIns="0"/>
+          <a:lstStyle/>
+          <a:p>
+            <a:pPr algn="l"/>
+            <a:r>
+              <a:rPr sz="1000" b="0" i="0">
+                <a:solidFill>
+                  <a:srgbClr val="54595D"/>
+                </a:solidFill>
+                <a:latin typeface="Calibri"/>
+              </a:rPr>
+              <a:t>Design and Development for Engineering and Manufacturing T Level  ·  Environmental Legislation and Waste</a:t>
+            </a:r>
+          </a:p>
+        </p:txBody>
+      </p:sp>
+      <p:sp>
+        <p:nvSpPr>
+          <p:cNvPr id="5" name="TextBox 4"/>
+          <p:cNvSpPr txBox="1"/>
+          <p:nvPr/>
+        </p:nvSpPr>
+        <p:spPr>
+          <a:xfrm>
+            <a:off x="10728655" y="6446520"/>
+            <a:ext cx="914400" cy="274320"/>
+          </a:xfrm>
+          <a:prstGeom prst="rect">
+            <a:avLst/>
+          </a:prstGeom>
+          <a:noFill/>
+        </p:spPr>
+        <p:txBody>
+          <a:bodyPr wrap="square" anchor="t" lIns="0" rIns="0" tIns="0" bIns="0"/>
+          <a:lstStyle/>
+          <a:p>
+            <a:pPr algn="r"/>
+            <a:r>
+              <a:rPr sz="1000" b="0" i="0">
+                <a:solidFill>
+                  <a:srgbClr val="54595D"/>
+                </a:solidFill>
+                <a:latin typeface="Calibri"/>
+              </a:rPr>
+              <a:t>9</a:t>
             </a:r>
           </a:p>
         </p:txBody>
@@ -6084,2355 +10305,6 @@
           </a:graphicData>
         </a:graphic>
       </p:graphicFrame>
-    </p:spTree>
-  </p:cSld>
-  <p:clrMapOvr>
-    <a:masterClrMapping/>
-  </p:clrMapOvr>
-</p:sld>
-</file>
-
-<file path=ppt/slides/slide6.xml><?xml version="1.0" encoding="utf-8"?>
-<p:sld xmlns:a="http://schemas.openxmlformats.org/drawingml/2006/main" xmlns:p="http://schemas.openxmlformats.org/presentationml/2006/main" xmlns:r="http://schemas.openxmlformats.org/officeDocument/2006/relationships">
-  <p:cSld>
-    <p:bg>
-      <p:bgPr>
-        <a:solidFill>
-          <a:srgbClr val="FFFFFF"/>
-        </a:solidFill>
-        <a:effectLst/>
-      </p:bgPr>
-    </p:bg>
-    <p:spTree>
-      <p:nvGrpSpPr>
-        <p:cNvPr id="1" name=""/>
-        <p:cNvGrpSpPr/>
-        <p:nvPr/>
-      </p:nvGrpSpPr>
-      <p:grpSpPr/>
-      <p:sp>
-        <p:nvSpPr>
-          <p:cNvPr id="2" name="TextBox 1"/>
-          <p:cNvSpPr txBox="1"/>
-          <p:nvPr/>
-        </p:nvSpPr>
-        <p:spPr>
-          <a:xfrm>
-            <a:off x="548640" y="320040"/>
-            <a:ext cx="11094415" cy="274320"/>
-          </a:xfrm>
-          <a:prstGeom prst="rect">
-            <a:avLst/>
-          </a:prstGeom>
-          <a:noFill/>
-        </p:spPr>
-        <p:txBody>
-          <a:bodyPr wrap="square" anchor="t" lIns="0" rIns="0" tIns="0" bIns="0"/>
-          <a:lstStyle/>
-          <a:p>
-            <a:pPr algn="l"/>
-            <a:r>
-              <a:rPr sz="1100" b="1" i="0">
-                <a:solidFill>
-                  <a:srgbClr val="54595D"/>
-                </a:solidFill>
-                <a:latin typeface="Calibri"/>
-              </a:rPr>
-              <a:t>ENGINEERING CORE  ·  Core topic 12</a:t>
-            </a:r>
-          </a:p>
-        </p:txBody>
-      </p:sp>
-      <p:sp>
-        <p:nvSpPr>
-          <p:cNvPr id="3" name="TextBox 2"/>
-          <p:cNvSpPr txBox="1"/>
-          <p:nvPr/>
-        </p:nvSpPr>
-        <p:spPr>
-          <a:xfrm>
-            <a:off x="548640" y="566928"/>
-            <a:ext cx="11094415" cy="822960"/>
-          </a:xfrm>
-          <a:prstGeom prst="rect">
-            <a:avLst/>
-          </a:prstGeom>
-          <a:noFill/>
-        </p:spPr>
-        <p:txBody>
-          <a:bodyPr wrap="square" anchor="ctr" lIns="0" rIns="0" tIns="0" bIns="0"/>
-          <a:lstStyle/>
-          <a:p>
-            <a:pPr algn="l"/>
-            <a:r>
-              <a:rPr sz="3200" b="1" i="0">
-                <a:solidFill>
-                  <a:srgbClr val="03306E"/>
-                </a:solidFill>
-                <a:latin typeface="Cambria"/>
-              </a:rPr>
-              <a:t>Check your understanding</a:t>
-            </a:r>
-          </a:p>
-        </p:txBody>
-      </p:sp>
-      <p:sp>
-        <p:nvSpPr>
-          <p:cNvPr id="4" name="TextBox 3"/>
-          <p:cNvSpPr txBox="1"/>
-          <p:nvPr/>
-        </p:nvSpPr>
-        <p:spPr>
-          <a:xfrm>
-            <a:off x="548640" y="6446520"/>
-            <a:ext cx="8229600" cy="274320"/>
-          </a:xfrm>
-          <a:prstGeom prst="rect">
-            <a:avLst/>
-          </a:prstGeom>
-          <a:noFill/>
-        </p:spPr>
-        <p:txBody>
-          <a:bodyPr wrap="square" anchor="t" lIns="0" rIns="0" tIns="0" bIns="0"/>
-          <a:lstStyle/>
-          <a:p>
-            <a:pPr algn="l"/>
-            <a:r>
-              <a:rPr sz="1000" b="0" i="0">
-                <a:solidFill>
-                  <a:srgbClr val="54595D"/>
-                </a:solidFill>
-                <a:latin typeface="Calibri"/>
-              </a:rPr>
-              <a:t>Design and Development for Engineering and Manufacturing T Level  ·  Environmental Legislation and Waste</a:t>
-            </a:r>
-          </a:p>
-        </p:txBody>
-      </p:sp>
-      <p:sp>
-        <p:nvSpPr>
-          <p:cNvPr id="5" name="TextBox 4"/>
-          <p:cNvSpPr txBox="1"/>
-          <p:nvPr/>
-        </p:nvSpPr>
-        <p:spPr>
-          <a:xfrm>
-            <a:off x="10728655" y="6446520"/>
-            <a:ext cx="914400" cy="274320"/>
-          </a:xfrm>
-          <a:prstGeom prst="rect">
-            <a:avLst/>
-          </a:prstGeom>
-          <a:noFill/>
-        </p:spPr>
-        <p:txBody>
-          <a:bodyPr wrap="square" anchor="t" lIns="0" rIns="0" tIns="0" bIns="0"/>
-          <a:lstStyle/>
-          <a:p>
-            <a:pPr algn="r"/>
-            <a:r>
-              <a:rPr sz="1000" b="0" i="0">
-                <a:solidFill>
-                  <a:srgbClr val="54595D"/>
-                </a:solidFill>
-                <a:latin typeface="Calibri"/>
-              </a:rPr>
-              <a:t>6</a:t>
-            </a:r>
-          </a:p>
-        </p:txBody>
-      </p:sp>
-      <p:sp>
-        <p:nvSpPr>
-          <p:cNvPr id="6" name="Oval 5"/>
-          <p:cNvSpPr/>
-          <p:nvPr/>
-        </p:nvSpPr>
-        <p:spPr>
-          <a:xfrm>
-            <a:off x="548640" y="1618488"/>
-            <a:ext cx="411480" cy="411480"/>
-          </a:xfrm>
-          <a:prstGeom prst="ellipse">
-            <a:avLst/>
-          </a:prstGeom>
-          <a:solidFill>
-            <a:srgbClr val="F2B705"/>
-          </a:solidFill>
-          <a:ln>
-            <a:noFill/>
-          </a:ln>
-          <a:effectLst/>
-        </p:spPr>
-        <p:style>
-          <a:lnRef idx="1">
-            <a:schemeClr val="accent1"/>
-          </a:lnRef>
-          <a:fillRef idx="3">
-            <a:schemeClr val="accent1"/>
-          </a:fillRef>
-          <a:effectRef idx="2">
-            <a:schemeClr val="accent1"/>
-          </a:effectRef>
-          <a:fontRef idx="minor">
-            <a:schemeClr val="lt1"/>
-          </a:fontRef>
-        </p:style>
-        <p:txBody>
-          <a:bodyPr rtlCol="0" anchor="ctr" lIns="0" rIns="0" tIns="0" bIns="0"/>
-          <a:lstStyle/>
-          <a:p>
-            <a:pPr algn="ctr"/>
-            <a:r>
-              <a:rPr sz="1400" b="1">
-                <a:solidFill>
-                  <a:srgbClr val="202122"/>
-                </a:solidFill>
-                <a:latin typeface="Calibri"/>
-              </a:rPr>
-              <a:t>1</a:t>
-            </a:r>
-          </a:p>
-        </p:txBody>
-      </p:sp>
-      <p:sp>
-        <p:nvSpPr>
-          <p:cNvPr id="7" name="TextBox 6"/>
-          <p:cNvSpPr txBox="1"/>
-          <p:nvPr/>
-        </p:nvSpPr>
-        <p:spPr>
-          <a:xfrm>
-            <a:off x="1234440" y="1600200"/>
-            <a:ext cx="10408615" cy="1030986"/>
-          </a:xfrm>
-          <a:prstGeom prst="rect">
-            <a:avLst/>
-          </a:prstGeom>
-          <a:noFill/>
-        </p:spPr>
-        <p:txBody>
-          <a:bodyPr wrap="square" anchor="t" lIns="0" rIns="0" tIns="0" bIns="0"/>
-          <a:lstStyle/>
-          <a:p>
-            <a:pPr algn="l"/>
-            <a:r>
-              <a:rPr sz="2200" b="0" i="0">
-                <a:solidFill>
-                  <a:srgbClr val="202122"/>
-                </a:solidFill>
-                <a:latin typeface="Calibri"/>
-              </a:rPr>
-              <a:t>What does ISO 14001 cover?</a:t>
-            </a:r>
-          </a:p>
-        </p:txBody>
-      </p:sp>
-      <p:sp>
-        <p:nvSpPr>
-          <p:cNvPr id="8" name="Oval 7"/>
-          <p:cNvSpPr/>
-          <p:nvPr/>
-        </p:nvSpPr>
-        <p:spPr>
-          <a:xfrm>
-            <a:off x="548640" y="2814066"/>
-            <a:ext cx="411480" cy="411480"/>
-          </a:xfrm>
-          <a:prstGeom prst="ellipse">
-            <a:avLst/>
-          </a:prstGeom>
-          <a:solidFill>
-            <a:srgbClr val="F2B705"/>
-          </a:solidFill>
-          <a:ln>
-            <a:noFill/>
-          </a:ln>
-          <a:effectLst/>
-        </p:spPr>
-        <p:style>
-          <a:lnRef idx="1">
-            <a:schemeClr val="accent1"/>
-          </a:lnRef>
-          <a:fillRef idx="3">
-            <a:schemeClr val="accent1"/>
-          </a:fillRef>
-          <a:effectRef idx="2">
-            <a:schemeClr val="accent1"/>
-          </a:effectRef>
-          <a:fontRef idx="minor">
-            <a:schemeClr val="lt1"/>
-          </a:fontRef>
-        </p:style>
-        <p:txBody>
-          <a:bodyPr rtlCol="0" anchor="ctr" lIns="0" rIns="0" tIns="0" bIns="0"/>
-          <a:lstStyle/>
-          <a:p>
-            <a:pPr algn="ctr"/>
-            <a:r>
-              <a:rPr sz="1400" b="1">
-                <a:solidFill>
-                  <a:srgbClr val="202122"/>
-                </a:solidFill>
-                <a:latin typeface="Calibri"/>
-              </a:rPr>
-              <a:t>2</a:t>
-            </a:r>
-          </a:p>
-        </p:txBody>
-      </p:sp>
-      <p:sp>
-        <p:nvSpPr>
-          <p:cNvPr id="9" name="TextBox 8"/>
-          <p:cNvSpPr txBox="1"/>
-          <p:nvPr/>
-        </p:nvSpPr>
-        <p:spPr>
-          <a:xfrm>
-            <a:off x="1234440" y="2795778"/>
-            <a:ext cx="10408615" cy="1030986"/>
-          </a:xfrm>
-          <a:prstGeom prst="rect">
-            <a:avLst/>
-          </a:prstGeom>
-          <a:noFill/>
-        </p:spPr>
-        <p:txBody>
-          <a:bodyPr wrap="square" anchor="t" lIns="0" rIns="0" tIns="0" bIns="0"/>
-          <a:lstStyle/>
-          <a:p>
-            <a:pPr algn="l"/>
-            <a:r>
-              <a:rPr sz="2200" b="0" i="0">
-                <a:solidFill>
-                  <a:srgbClr val="202122"/>
-                </a:solidFill>
-                <a:latin typeface="Calibri"/>
-              </a:rPr>
-              <a:t>Which Act controls smoke pollution?</a:t>
-            </a:r>
-          </a:p>
-        </p:txBody>
-      </p:sp>
-      <p:sp>
-        <p:nvSpPr>
-          <p:cNvPr id="10" name="Oval 9"/>
-          <p:cNvSpPr/>
-          <p:nvPr/>
-        </p:nvSpPr>
-        <p:spPr>
-          <a:xfrm>
-            <a:off x="548640" y="4009644"/>
-            <a:ext cx="411480" cy="411480"/>
-          </a:xfrm>
-          <a:prstGeom prst="ellipse">
-            <a:avLst/>
-          </a:prstGeom>
-          <a:solidFill>
-            <a:srgbClr val="F2B705"/>
-          </a:solidFill>
-          <a:ln>
-            <a:noFill/>
-          </a:ln>
-          <a:effectLst/>
-        </p:spPr>
-        <p:style>
-          <a:lnRef idx="1">
-            <a:schemeClr val="accent1"/>
-          </a:lnRef>
-          <a:fillRef idx="3">
-            <a:schemeClr val="accent1"/>
-          </a:fillRef>
-          <a:effectRef idx="2">
-            <a:schemeClr val="accent1"/>
-          </a:effectRef>
-          <a:fontRef idx="minor">
-            <a:schemeClr val="lt1"/>
-          </a:fontRef>
-        </p:style>
-        <p:txBody>
-          <a:bodyPr rtlCol="0" anchor="ctr" lIns="0" rIns="0" tIns="0" bIns="0"/>
-          <a:lstStyle/>
-          <a:p>
-            <a:pPr algn="ctr"/>
-            <a:r>
-              <a:rPr sz="1400" b="1">
-                <a:solidFill>
-                  <a:srgbClr val="202122"/>
-                </a:solidFill>
-                <a:latin typeface="Calibri"/>
-              </a:rPr>
-              <a:t>3</a:t>
-            </a:r>
-          </a:p>
-        </p:txBody>
-      </p:sp>
-      <p:sp>
-        <p:nvSpPr>
-          <p:cNvPr id="11" name="TextBox 10"/>
-          <p:cNvSpPr txBox="1"/>
-          <p:nvPr/>
-        </p:nvSpPr>
-        <p:spPr>
-          <a:xfrm>
-            <a:off x="1234440" y="3991356"/>
-            <a:ext cx="10408615" cy="1030986"/>
-          </a:xfrm>
-          <a:prstGeom prst="rect">
-            <a:avLst/>
-          </a:prstGeom>
-          <a:noFill/>
-        </p:spPr>
-        <p:txBody>
-          <a:bodyPr wrap="square" anchor="t" lIns="0" rIns="0" tIns="0" bIns="0"/>
-          <a:lstStyle/>
-          <a:p>
-            <a:pPr algn="l"/>
-            <a:r>
-              <a:rPr sz="2200" b="0" i="0">
-                <a:solidFill>
-                  <a:srgbClr val="202122"/>
-                </a:solidFill>
-                <a:latin typeface="Calibri"/>
-              </a:rPr>
-              <a:t>Which disposal method has the lowest environmental impact?</a:t>
-            </a:r>
-          </a:p>
-        </p:txBody>
-      </p:sp>
-      <p:sp>
-        <p:nvSpPr>
-          <p:cNvPr id="12" name="Oval 11"/>
-          <p:cNvSpPr/>
-          <p:nvPr/>
-        </p:nvSpPr>
-        <p:spPr>
-          <a:xfrm>
-            <a:off x="548640" y="5205221"/>
-            <a:ext cx="411480" cy="411480"/>
-          </a:xfrm>
-          <a:prstGeom prst="ellipse">
-            <a:avLst/>
-          </a:prstGeom>
-          <a:solidFill>
-            <a:srgbClr val="F2B705"/>
-          </a:solidFill>
-          <a:ln>
-            <a:noFill/>
-          </a:ln>
-          <a:effectLst/>
-        </p:spPr>
-        <p:style>
-          <a:lnRef idx="1">
-            <a:schemeClr val="accent1"/>
-          </a:lnRef>
-          <a:fillRef idx="3">
-            <a:schemeClr val="accent1"/>
-          </a:fillRef>
-          <a:effectRef idx="2">
-            <a:schemeClr val="accent1"/>
-          </a:effectRef>
-          <a:fontRef idx="minor">
-            <a:schemeClr val="lt1"/>
-          </a:fontRef>
-        </p:style>
-        <p:txBody>
-          <a:bodyPr rtlCol="0" anchor="ctr" lIns="0" rIns="0" tIns="0" bIns="0"/>
-          <a:lstStyle/>
-          <a:p>
-            <a:pPr algn="ctr"/>
-            <a:r>
-              <a:rPr sz="1400" b="1">
-                <a:solidFill>
-                  <a:srgbClr val="202122"/>
-                </a:solidFill>
-                <a:latin typeface="Calibri"/>
-              </a:rPr>
-              <a:t>4</a:t>
-            </a:r>
-          </a:p>
-        </p:txBody>
-      </p:sp>
-      <p:sp>
-        <p:nvSpPr>
-          <p:cNvPr id="13" name="TextBox 12"/>
-          <p:cNvSpPr txBox="1"/>
-          <p:nvPr/>
-        </p:nvSpPr>
-        <p:spPr>
-          <a:xfrm>
-            <a:off x="1234440" y="5186933"/>
-            <a:ext cx="10408615" cy="1030986"/>
-          </a:xfrm>
-          <a:prstGeom prst="rect">
-            <a:avLst/>
-          </a:prstGeom>
-          <a:noFill/>
-        </p:spPr>
-        <p:txBody>
-          <a:bodyPr wrap="square" anchor="t" lIns="0" rIns="0" tIns="0" bIns="0"/>
-          <a:lstStyle/>
-          <a:p>
-            <a:pPr algn="l"/>
-            <a:r>
-              <a:rPr sz="2200" b="0" i="0">
-                <a:solidFill>
-                  <a:srgbClr val="202122"/>
-                </a:solidFill>
-                <a:latin typeface="Calibri"/>
-              </a:rPr>
-              <a:t>What must happen to hazardous waste?</a:t>
-            </a:r>
-          </a:p>
-        </p:txBody>
-      </p:sp>
-    </p:spTree>
-  </p:cSld>
-  <p:clrMapOvr>
-    <a:masterClrMapping/>
-  </p:clrMapOvr>
-</p:sld>
-</file>
-
-<file path=ppt/slides/slide7.xml><?xml version="1.0" encoding="utf-8"?>
-<p:sld xmlns:a="http://schemas.openxmlformats.org/drawingml/2006/main" xmlns:p="http://schemas.openxmlformats.org/presentationml/2006/main" xmlns:r="http://schemas.openxmlformats.org/officeDocument/2006/relationships">
-  <p:cSld>
-    <p:bg>
-      <p:bgPr>
-        <a:solidFill>
-          <a:srgbClr val="FFFFFF"/>
-        </a:solidFill>
-        <a:effectLst/>
-      </p:bgPr>
-    </p:bg>
-    <p:spTree>
-      <p:nvGrpSpPr>
-        <p:cNvPr id="1" name=""/>
-        <p:cNvGrpSpPr/>
-        <p:nvPr/>
-      </p:nvGrpSpPr>
-      <p:grpSpPr/>
-      <p:sp>
-        <p:nvSpPr>
-          <p:cNvPr id="2" name="TextBox 1"/>
-          <p:cNvSpPr txBox="1"/>
-          <p:nvPr/>
-        </p:nvSpPr>
-        <p:spPr>
-          <a:xfrm>
-            <a:off x="548640" y="320040"/>
-            <a:ext cx="11094415" cy="274320"/>
-          </a:xfrm>
-          <a:prstGeom prst="rect">
-            <a:avLst/>
-          </a:prstGeom>
-          <a:noFill/>
-        </p:spPr>
-        <p:txBody>
-          <a:bodyPr wrap="square" anchor="t" lIns="0" rIns="0" tIns="0" bIns="0"/>
-          <a:lstStyle/>
-          <a:p>
-            <a:pPr algn="l"/>
-            <a:r>
-              <a:rPr sz="1100" b="1" i="0">
-                <a:solidFill>
-                  <a:srgbClr val="54595D"/>
-                </a:solidFill>
-                <a:latin typeface="Calibri"/>
-              </a:rPr>
-              <a:t>ENGINEERING CORE  ·  Core topic 12</a:t>
-            </a:r>
-          </a:p>
-        </p:txBody>
-      </p:sp>
-      <p:sp>
-        <p:nvSpPr>
-          <p:cNvPr id="3" name="TextBox 2"/>
-          <p:cNvSpPr txBox="1"/>
-          <p:nvPr/>
-        </p:nvSpPr>
-        <p:spPr>
-          <a:xfrm>
-            <a:off x="548640" y="566928"/>
-            <a:ext cx="11094415" cy="822960"/>
-          </a:xfrm>
-          <a:prstGeom prst="rect">
-            <a:avLst/>
-          </a:prstGeom>
-          <a:noFill/>
-        </p:spPr>
-        <p:txBody>
-          <a:bodyPr wrap="square" anchor="ctr" lIns="0" rIns="0" tIns="0" bIns="0"/>
-          <a:lstStyle/>
-          <a:p>
-            <a:pPr algn="l"/>
-            <a:r>
-              <a:rPr sz="3200" b="1" i="0">
-                <a:solidFill>
-                  <a:srgbClr val="03306E"/>
-                </a:solidFill>
-                <a:latin typeface="Cambria"/>
-              </a:rPr>
-              <a:t>Answers</a:t>
-            </a:r>
-          </a:p>
-        </p:txBody>
-      </p:sp>
-      <p:sp>
-        <p:nvSpPr>
-          <p:cNvPr id="4" name="TextBox 3"/>
-          <p:cNvSpPr txBox="1"/>
-          <p:nvPr/>
-        </p:nvSpPr>
-        <p:spPr>
-          <a:xfrm>
-            <a:off x="548640" y="6446520"/>
-            <a:ext cx="8229600" cy="274320"/>
-          </a:xfrm>
-          <a:prstGeom prst="rect">
-            <a:avLst/>
-          </a:prstGeom>
-          <a:noFill/>
-        </p:spPr>
-        <p:txBody>
-          <a:bodyPr wrap="square" anchor="t" lIns="0" rIns="0" tIns="0" bIns="0"/>
-          <a:lstStyle/>
-          <a:p>
-            <a:pPr algn="l"/>
-            <a:r>
-              <a:rPr sz="1000" b="0" i="0">
-                <a:solidFill>
-                  <a:srgbClr val="54595D"/>
-                </a:solidFill>
-                <a:latin typeface="Calibri"/>
-              </a:rPr>
-              <a:t>Design and Development for Engineering and Manufacturing T Level  ·  Environmental Legislation and Waste</a:t>
-            </a:r>
-          </a:p>
-        </p:txBody>
-      </p:sp>
-      <p:sp>
-        <p:nvSpPr>
-          <p:cNvPr id="5" name="TextBox 4"/>
-          <p:cNvSpPr txBox="1"/>
-          <p:nvPr/>
-        </p:nvSpPr>
-        <p:spPr>
-          <a:xfrm>
-            <a:off x="10728655" y="6446520"/>
-            <a:ext cx="914400" cy="274320"/>
-          </a:xfrm>
-          <a:prstGeom prst="rect">
-            <a:avLst/>
-          </a:prstGeom>
-          <a:noFill/>
-        </p:spPr>
-        <p:txBody>
-          <a:bodyPr wrap="square" anchor="t" lIns="0" rIns="0" tIns="0" bIns="0"/>
-          <a:lstStyle/>
-          <a:p>
-            <a:pPr algn="r"/>
-            <a:r>
-              <a:rPr sz="1000" b="0" i="0">
-                <a:solidFill>
-                  <a:srgbClr val="54595D"/>
-                </a:solidFill>
-                <a:latin typeface="Calibri"/>
-              </a:rPr>
-              <a:t>7</a:t>
-            </a:r>
-          </a:p>
-        </p:txBody>
-      </p:sp>
-      <p:sp>
-        <p:nvSpPr>
-          <p:cNvPr id="6" name="Oval 5"/>
-          <p:cNvSpPr/>
-          <p:nvPr/>
-        </p:nvSpPr>
-        <p:spPr>
-          <a:xfrm>
-            <a:off x="548640" y="1618488"/>
-            <a:ext cx="411480" cy="411480"/>
-          </a:xfrm>
-          <a:prstGeom prst="ellipse">
-            <a:avLst/>
-          </a:prstGeom>
-          <a:solidFill>
-            <a:srgbClr val="F2B705"/>
-          </a:solidFill>
-          <a:ln>
-            <a:noFill/>
-          </a:ln>
-          <a:effectLst/>
-        </p:spPr>
-        <p:style>
-          <a:lnRef idx="1">
-            <a:schemeClr val="accent1"/>
-          </a:lnRef>
-          <a:fillRef idx="3">
-            <a:schemeClr val="accent1"/>
-          </a:fillRef>
-          <a:effectRef idx="2">
-            <a:schemeClr val="accent1"/>
-          </a:effectRef>
-          <a:fontRef idx="minor">
-            <a:schemeClr val="lt1"/>
-          </a:fontRef>
-        </p:style>
-        <p:txBody>
-          <a:bodyPr rtlCol="0" anchor="ctr" lIns="0" rIns="0" tIns="0" bIns="0"/>
-          <a:lstStyle/>
-          <a:p>
-            <a:pPr algn="ctr"/>
-            <a:r>
-              <a:rPr sz="1400" b="1">
-                <a:solidFill>
-                  <a:srgbClr val="202122"/>
-                </a:solidFill>
-                <a:latin typeface="Calibri"/>
-              </a:rPr>
-              <a:t>1</a:t>
-            </a:r>
-          </a:p>
-        </p:txBody>
-      </p:sp>
-      <p:sp>
-        <p:nvSpPr>
-          <p:cNvPr id="7" name="TextBox 6"/>
-          <p:cNvSpPr txBox="1"/>
-          <p:nvPr/>
-        </p:nvSpPr>
-        <p:spPr>
-          <a:xfrm>
-            <a:off x="1234440" y="1600200"/>
-            <a:ext cx="10408615" cy="1030986"/>
-          </a:xfrm>
-          <a:prstGeom prst="rect">
-            <a:avLst/>
-          </a:prstGeom>
-          <a:noFill/>
-        </p:spPr>
-        <p:txBody>
-          <a:bodyPr wrap="square" anchor="t" lIns="0" rIns="0" tIns="0" bIns="0"/>
-          <a:lstStyle/>
-          <a:p>
-            <a:pPr algn="l"/>
-            <a:r>
-              <a:rPr sz="1800" b="0" i="0">
-                <a:solidFill>
-                  <a:srgbClr val="54595D"/>
-                </a:solidFill>
-                <a:latin typeface="Calibri"/>
-              </a:rPr>
-              <a:t>What does ISO 14001 cover?</a:t>
-            </a:r>
-          </a:p>
-          <a:p>
-            <a:r>
-              <a:rPr sz="1800" b="1">
-                <a:solidFill>
-                  <a:srgbClr val="03306E"/>
-                </a:solidFill>
-                <a:latin typeface="Calibri"/>
-              </a:rPr>
-              <a:t>Environmental management systems.</a:t>
-            </a:r>
-          </a:p>
-        </p:txBody>
-      </p:sp>
-      <p:sp>
-        <p:nvSpPr>
-          <p:cNvPr id="8" name="Oval 7"/>
-          <p:cNvSpPr/>
-          <p:nvPr/>
-        </p:nvSpPr>
-        <p:spPr>
-          <a:xfrm>
-            <a:off x="548640" y="2814066"/>
-            <a:ext cx="411480" cy="411480"/>
-          </a:xfrm>
-          <a:prstGeom prst="ellipse">
-            <a:avLst/>
-          </a:prstGeom>
-          <a:solidFill>
-            <a:srgbClr val="F2B705"/>
-          </a:solidFill>
-          <a:ln>
-            <a:noFill/>
-          </a:ln>
-          <a:effectLst/>
-        </p:spPr>
-        <p:style>
-          <a:lnRef idx="1">
-            <a:schemeClr val="accent1"/>
-          </a:lnRef>
-          <a:fillRef idx="3">
-            <a:schemeClr val="accent1"/>
-          </a:fillRef>
-          <a:effectRef idx="2">
-            <a:schemeClr val="accent1"/>
-          </a:effectRef>
-          <a:fontRef idx="minor">
-            <a:schemeClr val="lt1"/>
-          </a:fontRef>
-        </p:style>
-        <p:txBody>
-          <a:bodyPr rtlCol="0" anchor="ctr" lIns="0" rIns="0" tIns="0" bIns="0"/>
-          <a:lstStyle/>
-          <a:p>
-            <a:pPr algn="ctr"/>
-            <a:r>
-              <a:rPr sz="1400" b="1">
-                <a:solidFill>
-                  <a:srgbClr val="202122"/>
-                </a:solidFill>
-                <a:latin typeface="Calibri"/>
-              </a:rPr>
-              <a:t>2</a:t>
-            </a:r>
-          </a:p>
-        </p:txBody>
-      </p:sp>
-      <p:sp>
-        <p:nvSpPr>
-          <p:cNvPr id="9" name="TextBox 8"/>
-          <p:cNvSpPr txBox="1"/>
-          <p:nvPr/>
-        </p:nvSpPr>
-        <p:spPr>
-          <a:xfrm>
-            <a:off x="1234440" y="2795778"/>
-            <a:ext cx="10408615" cy="1030986"/>
-          </a:xfrm>
-          <a:prstGeom prst="rect">
-            <a:avLst/>
-          </a:prstGeom>
-          <a:noFill/>
-        </p:spPr>
-        <p:txBody>
-          <a:bodyPr wrap="square" anchor="t" lIns="0" rIns="0" tIns="0" bIns="0"/>
-          <a:lstStyle/>
-          <a:p>
-            <a:pPr algn="l"/>
-            <a:r>
-              <a:rPr sz="1800" b="0" i="0">
-                <a:solidFill>
-                  <a:srgbClr val="54595D"/>
-                </a:solidFill>
-                <a:latin typeface="Calibri"/>
-              </a:rPr>
-              <a:t>Which Act controls smoke pollution?</a:t>
-            </a:r>
-          </a:p>
-          <a:p>
-            <a:r>
-              <a:rPr sz="1800" b="1">
-                <a:solidFill>
-                  <a:srgbClr val="03306E"/>
-                </a:solidFill>
-                <a:latin typeface="Calibri"/>
-              </a:rPr>
-              <a:t>The Clean Air Act.</a:t>
-            </a:r>
-          </a:p>
-        </p:txBody>
-      </p:sp>
-      <p:sp>
-        <p:nvSpPr>
-          <p:cNvPr id="10" name="Oval 9"/>
-          <p:cNvSpPr/>
-          <p:nvPr/>
-        </p:nvSpPr>
-        <p:spPr>
-          <a:xfrm>
-            <a:off x="548640" y="4009644"/>
-            <a:ext cx="411480" cy="411480"/>
-          </a:xfrm>
-          <a:prstGeom prst="ellipse">
-            <a:avLst/>
-          </a:prstGeom>
-          <a:solidFill>
-            <a:srgbClr val="F2B705"/>
-          </a:solidFill>
-          <a:ln>
-            <a:noFill/>
-          </a:ln>
-          <a:effectLst/>
-        </p:spPr>
-        <p:style>
-          <a:lnRef idx="1">
-            <a:schemeClr val="accent1"/>
-          </a:lnRef>
-          <a:fillRef idx="3">
-            <a:schemeClr val="accent1"/>
-          </a:fillRef>
-          <a:effectRef idx="2">
-            <a:schemeClr val="accent1"/>
-          </a:effectRef>
-          <a:fontRef idx="minor">
-            <a:schemeClr val="lt1"/>
-          </a:fontRef>
-        </p:style>
-        <p:txBody>
-          <a:bodyPr rtlCol="0" anchor="ctr" lIns="0" rIns="0" tIns="0" bIns="0"/>
-          <a:lstStyle/>
-          <a:p>
-            <a:pPr algn="ctr"/>
-            <a:r>
-              <a:rPr sz="1400" b="1">
-                <a:solidFill>
-                  <a:srgbClr val="202122"/>
-                </a:solidFill>
-                <a:latin typeface="Calibri"/>
-              </a:rPr>
-              <a:t>3</a:t>
-            </a:r>
-          </a:p>
-        </p:txBody>
-      </p:sp>
-      <p:sp>
-        <p:nvSpPr>
-          <p:cNvPr id="11" name="TextBox 10"/>
-          <p:cNvSpPr txBox="1"/>
-          <p:nvPr/>
-        </p:nvSpPr>
-        <p:spPr>
-          <a:xfrm>
-            <a:off x="1234440" y="3991356"/>
-            <a:ext cx="10408615" cy="1030986"/>
-          </a:xfrm>
-          <a:prstGeom prst="rect">
-            <a:avLst/>
-          </a:prstGeom>
-          <a:noFill/>
-        </p:spPr>
-        <p:txBody>
-          <a:bodyPr wrap="square" anchor="t" lIns="0" rIns="0" tIns="0" bIns="0"/>
-          <a:lstStyle/>
-          <a:p>
-            <a:pPr algn="l"/>
-            <a:r>
-              <a:rPr sz="1800" b="0" i="0">
-                <a:solidFill>
-                  <a:srgbClr val="54595D"/>
-                </a:solidFill>
-                <a:latin typeface="Calibri"/>
-              </a:rPr>
-              <a:t>Which disposal method has the lowest environmental impact?</a:t>
-            </a:r>
-          </a:p>
-          <a:p>
-            <a:r>
-              <a:rPr sz="1800" b="1">
-                <a:solidFill>
-                  <a:srgbClr val="03306E"/>
-                </a:solidFill>
-                <a:latin typeface="Calibri"/>
-              </a:rPr>
-              <a:t>Reuse.</a:t>
-            </a:r>
-          </a:p>
-        </p:txBody>
-      </p:sp>
-      <p:sp>
-        <p:nvSpPr>
-          <p:cNvPr id="12" name="Oval 11"/>
-          <p:cNvSpPr/>
-          <p:nvPr/>
-        </p:nvSpPr>
-        <p:spPr>
-          <a:xfrm>
-            <a:off x="548640" y="5205221"/>
-            <a:ext cx="411480" cy="411480"/>
-          </a:xfrm>
-          <a:prstGeom prst="ellipse">
-            <a:avLst/>
-          </a:prstGeom>
-          <a:solidFill>
-            <a:srgbClr val="F2B705"/>
-          </a:solidFill>
-          <a:ln>
-            <a:noFill/>
-          </a:ln>
-          <a:effectLst/>
-        </p:spPr>
-        <p:style>
-          <a:lnRef idx="1">
-            <a:schemeClr val="accent1"/>
-          </a:lnRef>
-          <a:fillRef idx="3">
-            <a:schemeClr val="accent1"/>
-          </a:fillRef>
-          <a:effectRef idx="2">
-            <a:schemeClr val="accent1"/>
-          </a:effectRef>
-          <a:fontRef idx="minor">
-            <a:schemeClr val="lt1"/>
-          </a:fontRef>
-        </p:style>
-        <p:txBody>
-          <a:bodyPr rtlCol="0" anchor="ctr" lIns="0" rIns="0" tIns="0" bIns="0"/>
-          <a:lstStyle/>
-          <a:p>
-            <a:pPr algn="ctr"/>
-            <a:r>
-              <a:rPr sz="1400" b="1">
-                <a:solidFill>
-                  <a:srgbClr val="202122"/>
-                </a:solidFill>
-                <a:latin typeface="Calibri"/>
-              </a:rPr>
-              <a:t>4</a:t>
-            </a:r>
-          </a:p>
-        </p:txBody>
-      </p:sp>
-      <p:sp>
-        <p:nvSpPr>
-          <p:cNvPr id="13" name="TextBox 12"/>
-          <p:cNvSpPr txBox="1"/>
-          <p:nvPr/>
-        </p:nvSpPr>
-        <p:spPr>
-          <a:xfrm>
-            <a:off x="1234440" y="5186933"/>
-            <a:ext cx="10408615" cy="1030986"/>
-          </a:xfrm>
-          <a:prstGeom prst="rect">
-            <a:avLst/>
-          </a:prstGeom>
-          <a:noFill/>
-        </p:spPr>
-        <p:txBody>
-          <a:bodyPr wrap="square" anchor="t" lIns="0" rIns="0" tIns="0" bIns="0"/>
-          <a:lstStyle/>
-          <a:p>
-            <a:pPr algn="l"/>
-            <a:r>
-              <a:rPr sz="1800" b="0" i="0">
-                <a:solidFill>
-                  <a:srgbClr val="54595D"/>
-                </a:solidFill>
-                <a:latin typeface="Calibri"/>
-              </a:rPr>
-              <a:t>What must happen to hazardous waste?</a:t>
-            </a:r>
-          </a:p>
-          <a:p>
-            <a:r>
-              <a:rPr sz="1800" b="1">
-                <a:solidFill>
-                  <a:srgbClr val="03306E"/>
-                </a:solidFill>
-                <a:latin typeface="Calibri"/>
-              </a:rPr>
-              <a:t>It must be handled, stored and disposed of by licensed routes with records.</a:t>
-            </a:r>
-          </a:p>
-        </p:txBody>
-      </p:sp>
-    </p:spTree>
-  </p:cSld>
-  <p:clrMapOvr>
-    <a:masterClrMapping/>
-  </p:clrMapOvr>
-</p:sld>
-</file>
-
-<file path=ppt/slides/slide8.xml><?xml version="1.0" encoding="utf-8"?>
-<p:sld xmlns:a="http://schemas.openxmlformats.org/drawingml/2006/main" xmlns:p="http://schemas.openxmlformats.org/presentationml/2006/main" xmlns:r="http://schemas.openxmlformats.org/officeDocument/2006/relationships">
-  <p:cSld>
-    <p:bg>
-      <p:bgPr>
-        <a:solidFill>
-          <a:srgbClr val="FFFFFF"/>
-        </a:solidFill>
-        <a:effectLst/>
-      </p:bgPr>
-    </p:bg>
-    <p:spTree>
-      <p:nvGrpSpPr>
-        <p:cNvPr id="1" name=""/>
-        <p:cNvGrpSpPr/>
-        <p:nvPr/>
-      </p:nvGrpSpPr>
-      <p:grpSpPr/>
-      <p:sp>
-        <p:nvSpPr>
-          <p:cNvPr id="2" name="TextBox 1"/>
-          <p:cNvSpPr txBox="1"/>
-          <p:nvPr/>
-        </p:nvSpPr>
-        <p:spPr>
-          <a:xfrm>
-            <a:off x="548640" y="320040"/>
-            <a:ext cx="11094415" cy="274320"/>
-          </a:xfrm>
-          <a:prstGeom prst="rect">
-            <a:avLst/>
-          </a:prstGeom>
-          <a:noFill/>
-        </p:spPr>
-        <p:txBody>
-          <a:bodyPr wrap="square" anchor="t" lIns="0" rIns="0" tIns="0" bIns="0"/>
-          <a:lstStyle/>
-          <a:p>
-            <a:pPr algn="l"/>
-            <a:r>
-              <a:rPr sz="1100" b="1" i="0">
-                <a:solidFill>
-                  <a:srgbClr val="54595D"/>
-                </a:solidFill>
-                <a:latin typeface="Calibri"/>
-              </a:rPr>
-              <a:t>ENGINEERING CORE  ·  Core topic 12</a:t>
-            </a:r>
-          </a:p>
-        </p:txBody>
-      </p:sp>
-      <p:sp>
-        <p:nvSpPr>
-          <p:cNvPr id="3" name="TextBox 2"/>
-          <p:cNvSpPr txBox="1"/>
-          <p:nvPr/>
-        </p:nvSpPr>
-        <p:spPr>
-          <a:xfrm>
-            <a:off x="548640" y="566928"/>
-            <a:ext cx="11094415" cy="822960"/>
-          </a:xfrm>
-          <a:prstGeom prst="rect">
-            <a:avLst/>
-          </a:prstGeom>
-          <a:noFill/>
-        </p:spPr>
-        <p:txBody>
-          <a:bodyPr wrap="square" anchor="ctr" lIns="0" rIns="0" tIns="0" bIns="0"/>
-          <a:lstStyle/>
-          <a:p>
-            <a:pPr algn="l"/>
-            <a:r>
-              <a:rPr sz="3200" b="1" i="0">
-                <a:solidFill>
-                  <a:srgbClr val="03306E"/>
-                </a:solidFill>
-                <a:latin typeface="Cambria"/>
-              </a:rPr>
-              <a:t>Activity: Waste audit</a:t>
-            </a:r>
-          </a:p>
-        </p:txBody>
-      </p:sp>
-      <p:sp>
-        <p:nvSpPr>
-          <p:cNvPr id="4" name="TextBox 3"/>
-          <p:cNvSpPr txBox="1"/>
-          <p:nvPr/>
-        </p:nvSpPr>
-        <p:spPr>
-          <a:xfrm>
-            <a:off x="548640" y="6446520"/>
-            <a:ext cx="8229600" cy="274320"/>
-          </a:xfrm>
-          <a:prstGeom prst="rect">
-            <a:avLst/>
-          </a:prstGeom>
-          <a:noFill/>
-        </p:spPr>
-        <p:txBody>
-          <a:bodyPr wrap="square" anchor="t" lIns="0" rIns="0" tIns="0" bIns="0"/>
-          <a:lstStyle/>
-          <a:p>
-            <a:pPr algn="l"/>
-            <a:r>
-              <a:rPr sz="1000" b="0" i="0">
-                <a:solidFill>
-                  <a:srgbClr val="54595D"/>
-                </a:solidFill>
-                <a:latin typeface="Calibri"/>
-              </a:rPr>
-              <a:t>Design and Development for Engineering and Manufacturing T Level  ·  Environmental Legislation and Waste</a:t>
-            </a:r>
-          </a:p>
-        </p:txBody>
-      </p:sp>
-      <p:sp>
-        <p:nvSpPr>
-          <p:cNvPr id="5" name="TextBox 4"/>
-          <p:cNvSpPr txBox="1"/>
-          <p:nvPr/>
-        </p:nvSpPr>
-        <p:spPr>
-          <a:xfrm>
-            <a:off x="10728655" y="6446520"/>
-            <a:ext cx="914400" cy="274320"/>
-          </a:xfrm>
-          <a:prstGeom prst="rect">
-            <a:avLst/>
-          </a:prstGeom>
-          <a:noFill/>
-        </p:spPr>
-        <p:txBody>
-          <a:bodyPr wrap="square" anchor="t" lIns="0" rIns="0" tIns="0" bIns="0"/>
-          <a:lstStyle/>
-          <a:p>
-            <a:pPr algn="r"/>
-            <a:r>
-              <a:rPr sz="1000" b="0" i="0">
-                <a:solidFill>
-                  <a:srgbClr val="54595D"/>
-                </a:solidFill>
-                <a:latin typeface="Calibri"/>
-              </a:rPr>
-              <a:t>8</a:t>
-            </a:r>
-          </a:p>
-        </p:txBody>
-      </p:sp>
-      <p:sp>
-        <p:nvSpPr>
-          <p:cNvPr id="6" name="Rounded Rectangle 5"/>
-          <p:cNvSpPr/>
-          <p:nvPr/>
-        </p:nvSpPr>
-        <p:spPr>
-          <a:xfrm>
-            <a:off x="548640" y="1508760"/>
-            <a:ext cx="2011680" cy="457200"/>
-          </a:xfrm>
-          <a:prstGeom prst="roundRect">
-            <a:avLst>
-              <a:gd name="adj" fmla="val 50000"/>
-            </a:avLst>
-          </a:prstGeom>
-          <a:solidFill>
-            <a:srgbClr val="F2B705"/>
-          </a:solidFill>
-          <a:ln>
-            <a:noFill/>
-          </a:ln>
-          <a:effectLst/>
-        </p:spPr>
-        <p:style>
-          <a:lnRef idx="1">
-            <a:schemeClr val="accent1"/>
-          </a:lnRef>
-          <a:fillRef idx="3">
-            <a:schemeClr val="accent1"/>
-          </a:fillRef>
-          <a:effectRef idx="2">
-            <a:schemeClr val="accent1"/>
-          </a:effectRef>
-          <a:fontRef idx="minor">
-            <a:schemeClr val="lt1"/>
-          </a:fontRef>
-        </p:style>
-        <p:txBody>
-          <a:bodyPr rtlCol="0" anchor="ctr"/>
-          <a:lstStyle/>
-          <a:p/>
-        </p:txBody>
-      </p:sp>
-      <p:sp>
-        <p:nvSpPr>
-          <p:cNvPr id="7" name="TextBox 6"/>
-          <p:cNvSpPr txBox="1"/>
-          <p:nvPr/>
-        </p:nvSpPr>
-        <p:spPr>
-          <a:xfrm>
-            <a:off x="548640" y="1508760"/>
-            <a:ext cx="2011680" cy="457200"/>
-          </a:xfrm>
-          <a:prstGeom prst="rect">
-            <a:avLst/>
-          </a:prstGeom>
-          <a:noFill/>
-        </p:spPr>
-        <p:txBody>
-          <a:bodyPr wrap="square" anchor="ctr" lIns="0" rIns="0" tIns="0" bIns="0"/>
-          <a:lstStyle/>
-          <a:p>
-            <a:pPr algn="ctr"/>
-            <a:r>
-              <a:rPr sz="1400" b="1" i="0">
-                <a:solidFill>
-                  <a:srgbClr val="202122"/>
-                </a:solidFill>
-                <a:latin typeface="Calibri"/>
-              </a:rPr>
-              <a:t>20 minutes</a:t>
-            </a:r>
-          </a:p>
-        </p:txBody>
-      </p:sp>
-      <p:sp>
-        <p:nvSpPr>
-          <p:cNvPr id="8" name="TextBox 7"/>
-          <p:cNvSpPr txBox="1"/>
-          <p:nvPr/>
-        </p:nvSpPr>
-        <p:spPr>
-          <a:xfrm>
-            <a:off x="2743200" y="1508760"/>
-            <a:ext cx="4754880" cy="457200"/>
-          </a:xfrm>
-          <a:prstGeom prst="rect">
-            <a:avLst/>
-          </a:prstGeom>
-          <a:noFill/>
-        </p:spPr>
-        <p:txBody>
-          <a:bodyPr wrap="square" anchor="ctr" lIns="0" rIns="0" tIns="0" bIns="0"/>
-          <a:lstStyle/>
-          <a:p>
-            <a:pPr algn="l"/>
-            <a:r>
-              <a:rPr sz="1400" b="0" i="1">
-                <a:solidFill>
-                  <a:srgbClr val="54595D"/>
-                </a:solidFill>
-                <a:latin typeface="Calibri"/>
-              </a:rPr>
-              <a:t>Small groups</a:t>
-            </a:r>
-          </a:p>
-        </p:txBody>
-      </p:sp>
-      <p:sp>
-        <p:nvSpPr>
-          <p:cNvPr id="9" name="Oval 8"/>
-          <p:cNvSpPr/>
-          <p:nvPr/>
-        </p:nvSpPr>
-        <p:spPr>
-          <a:xfrm>
-            <a:off x="548640" y="2482596"/>
-            <a:ext cx="384048" cy="384048"/>
-          </a:xfrm>
-          <a:prstGeom prst="ellipse">
-            <a:avLst/>
-          </a:prstGeom>
-          <a:solidFill>
-            <a:srgbClr val="0645AD"/>
-          </a:solidFill>
-          <a:ln>
-            <a:noFill/>
-          </a:ln>
-          <a:effectLst/>
-        </p:spPr>
-        <p:style>
-          <a:lnRef idx="1">
-            <a:schemeClr val="accent1"/>
-          </a:lnRef>
-          <a:fillRef idx="3">
-            <a:schemeClr val="accent1"/>
-          </a:fillRef>
-          <a:effectRef idx="2">
-            <a:schemeClr val="accent1"/>
-          </a:effectRef>
-          <a:fontRef idx="minor">
-            <a:schemeClr val="lt1"/>
-          </a:fontRef>
-        </p:style>
-        <p:txBody>
-          <a:bodyPr rtlCol="0" anchor="ctr" lIns="0" rIns="0" tIns="0" bIns="0"/>
-          <a:lstStyle/>
-          <a:p>
-            <a:pPr algn="ctr"/>
-            <a:r>
-              <a:rPr sz="1300" b="1">
-                <a:solidFill>
-                  <a:srgbClr val="FFFFFF"/>
-                </a:solidFill>
-                <a:latin typeface="Calibri"/>
-              </a:rPr>
-              <a:t>1</a:t>
-            </a:r>
-          </a:p>
-        </p:txBody>
-      </p:sp>
-      <p:sp>
-        <p:nvSpPr>
-          <p:cNvPr id="10" name="TextBox 9"/>
-          <p:cNvSpPr txBox="1"/>
-          <p:nvPr/>
-        </p:nvSpPr>
-        <p:spPr>
-          <a:xfrm>
-            <a:off x="1143000" y="2240280"/>
-            <a:ext cx="5943600" cy="868680"/>
-          </a:xfrm>
-          <a:prstGeom prst="rect">
-            <a:avLst/>
-          </a:prstGeom>
-          <a:noFill/>
-        </p:spPr>
-        <p:txBody>
-          <a:bodyPr wrap="square" anchor="ctr" lIns="0" rIns="0" tIns="0" bIns="0"/>
-          <a:lstStyle/>
-          <a:p>
-            <a:pPr algn="l"/>
-            <a:r>
-              <a:rPr sz="1700" b="0" i="0">
-                <a:solidFill>
-                  <a:srgbClr val="202122"/>
-                </a:solidFill>
-                <a:latin typeface="Calibri"/>
-              </a:rPr>
-              <a:t>List every type of waste your workshop produces.</a:t>
-            </a:r>
-          </a:p>
-        </p:txBody>
-      </p:sp>
-      <p:sp>
-        <p:nvSpPr>
-          <p:cNvPr id="11" name="Oval 10"/>
-          <p:cNvSpPr/>
-          <p:nvPr/>
-        </p:nvSpPr>
-        <p:spPr>
-          <a:xfrm>
-            <a:off x="548640" y="3461004"/>
-            <a:ext cx="384048" cy="384048"/>
-          </a:xfrm>
-          <a:prstGeom prst="ellipse">
-            <a:avLst/>
-          </a:prstGeom>
-          <a:solidFill>
-            <a:srgbClr val="0645AD"/>
-          </a:solidFill>
-          <a:ln>
-            <a:noFill/>
-          </a:ln>
-          <a:effectLst/>
-        </p:spPr>
-        <p:style>
-          <a:lnRef idx="1">
-            <a:schemeClr val="accent1"/>
-          </a:lnRef>
-          <a:fillRef idx="3">
-            <a:schemeClr val="accent1"/>
-          </a:fillRef>
-          <a:effectRef idx="2">
-            <a:schemeClr val="accent1"/>
-          </a:effectRef>
-          <a:fontRef idx="minor">
-            <a:schemeClr val="lt1"/>
-          </a:fontRef>
-        </p:style>
-        <p:txBody>
-          <a:bodyPr rtlCol="0" anchor="ctr" lIns="0" rIns="0" tIns="0" bIns="0"/>
-          <a:lstStyle/>
-          <a:p>
-            <a:pPr algn="ctr"/>
-            <a:r>
-              <a:rPr sz="1300" b="1">
-                <a:solidFill>
-                  <a:srgbClr val="FFFFFF"/>
-                </a:solidFill>
-                <a:latin typeface="Calibri"/>
-              </a:rPr>
-              <a:t>2</a:t>
-            </a:r>
-          </a:p>
-        </p:txBody>
-      </p:sp>
-      <p:sp>
-        <p:nvSpPr>
-          <p:cNvPr id="12" name="TextBox 11"/>
-          <p:cNvSpPr txBox="1"/>
-          <p:nvPr/>
-        </p:nvSpPr>
-        <p:spPr>
-          <a:xfrm>
-            <a:off x="1143000" y="3218688"/>
-            <a:ext cx="5943600" cy="868680"/>
-          </a:xfrm>
-          <a:prstGeom prst="rect">
-            <a:avLst/>
-          </a:prstGeom>
-          <a:noFill/>
-        </p:spPr>
-        <p:txBody>
-          <a:bodyPr wrap="square" anchor="ctr" lIns="0" rIns="0" tIns="0" bIns="0"/>
-          <a:lstStyle/>
-          <a:p>
-            <a:pPr algn="l"/>
-            <a:r>
-              <a:rPr sz="1700" b="0" i="0">
-                <a:solidFill>
-                  <a:srgbClr val="202122"/>
-                </a:solidFill>
-                <a:latin typeface="Calibri"/>
-              </a:rPr>
-              <a:t>Classify each as general, recyclable or hazardous.</a:t>
-            </a:r>
-          </a:p>
-        </p:txBody>
-      </p:sp>
-      <p:sp>
-        <p:nvSpPr>
-          <p:cNvPr id="13" name="Oval 12"/>
-          <p:cNvSpPr/>
-          <p:nvPr/>
-        </p:nvSpPr>
-        <p:spPr>
-          <a:xfrm>
-            <a:off x="548640" y="4439412"/>
-            <a:ext cx="384048" cy="384048"/>
-          </a:xfrm>
-          <a:prstGeom prst="ellipse">
-            <a:avLst/>
-          </a:prstGeom>
-          <a:solidFill>
-            <a:srgbClr val="0645AD"/>
-          </a:solidFill>
-          <a:ln>
-            <a:noFill/>
-          </a:ln>
-          <a:effectLst/>
-        </p:spPr>
-        <p:style>
-          <a:lnRef idx="1">
-            <a:schemeClr val="accent1"/>
-          </a:lnRef>
-          <a:fillRef idx="3">
-            <a:schemeClr val="accent1"/>
-          </a:fillRef>
-          <a:effectRef idx="2">
-            <a:schemeClr val="accent1"/>
-          </a:effectRef>
-          <a:fontRef idx="minor">
-            <a:schemeClr val="lt1"/>
-          </a:fontRef>
-        </p:style>
-        <p:txBody>
-          <a:bodyPr rtlCol="0" anchor="ctr" lIns="0" rIns="0" tIns="0" bIns="0"/>
-          <a:lstStyle/>
-          <a:p>
-            <a:pPr algn="ctr"/>
-            <a:r>
-              <a:rPr sz="1300" b="1">
-                <a:solidFill>
-                  <a:srgbClr val="FFFFFF"/>
-                </a:solidFill>
-                <a:latin typeface="Calibri"/>
-              </a:rPr>
-              <a:t>3</a:t>
-            </a:r>
-          </a:p>
-        </p:txBody>
-      </p:sp>
-      <p:sp>
-        <p:nvSpPr>
-          <p:cNvPr id="14" name="TextBox 13"/>
-          <p:cNvSpPr txBox="1"/>
-          <p:nvPr/>
-        </p:nvSpPr>
-        <p:spPr>
-          <a:xfrm>
-            <a:off x="1143000" y="4197096"/>
-            <a:ext cx="5943600" cy="868680"/>
-          </a:xfrm>
-          <a:prstGeom prst="rect">
-            <a:avLst/>
-          </a:prstGeom>
-          <a:noFill/>
-        </p:spPr>
-        <p:txBody>
-          <a:bodyPr wrap="square" anchor="ctr" lIns="0" rIns="0" tIns="0" bIns="0"/>
-          <a:lstStyle/>
-          <a:p>
-            <a:pPr algn="l"/>
-            <a:r>
-              <a:rPr sz="1700" b="0" i="0">
-                <a:solidFill>
-                  <a:srgbClr val="202122"/>
-                </a:solidFill>
-                <a:latin typeface="Calibri"/>
-              </a:rPr>
-              <a:t>Suggest the correct disposal route.</a:t>
-            </a:r>
-          </a:p>
-        </p:txBody>
-      </p:sp>
-      <p:sp>
-        <p:nvSpPr>
-          <p:cNvPr id="15" name="Oval 14"/>
-          <p:cNvSpPr/>
-          <p:nvPr/>
-        </p:nvSpPr>
-        <p:spPr>
-          <a:xfrm>
-            <a:off x="548640" y="5417820"/>
-            <a:ext cx="384048" cy="384048"/>
-          </a:xfrm>
-          <a:prstGeom prst="ellipse">
-            <a:avLst/>
-          </a:prstGeom>
-          <a:solidFill>
-            <a:srgbClr val="0645AD"/>
-          </a:solidFill>
-          <a:ln>
-            <a:noFill/>
-          </a:ln>
-          <a:effectLst/>
-        </p:spPr>
-        <p:style>
-          <a:lnRef idx="1">
-            <a:schemeClr val="accent1"/>
-          </a:lnRef>
-          <a:fillRef idx="3">
-            <a:schemeClr val="accent1"/>
-          </a:fillRef>
-          <a:effectRef idx="2">
-            <a:schemeClr val="accent1"/>
-          </a:effectRef>
-          <a:fontRef idx="minor">
-            <a:schemeClr val="lt1"/>
-          </a:fontRef>
-        </p:style>
-        <p:txBody>
-          <a:bodyPr rtlCol="0" anchor="ctr" lIns="0" rIns="0" tIns="0" bIns="0"/>
-          <a:lstStyle/>
-          <a:p>
-            <a:pPr algn="ctr"/>
-            <a:r>
-              <a:rPr sz="1300" b="1">
-                <a:solidFill>
-                  <a:srgbClr val="FFFFFF"/>
-                </a:solidFill>
-                <a:latin typeface="Calibri"/>
-              </a:rPr>
-              <a:t>4</a:t>
-            </a:r>
-          </a:p>
-        </p:txBody>
-      </p:sp>
-      <p:sp>
-        <p:nvSpPr>
-          <p:cNvPr id="16" name="TextBox 15"/>
-          <p:cNvSpPr txBox="1"/>
-          <p:nvPr/>
-        </p:nvSpPr>
-        <p:spPr>
-          <a:xfrm>
-            <a:off x="1143000" y="5175504"/>
-            <a:ext cx="5943600" cy="868680"/>
-          </a:xfrm>
-          <a:prstGeom prst="rect">
-            <a:avLst/>
-          </a:prstGeom>
-          <a:noFill/>
-        </p:spPr>
-        <p:txBody>
-          <a:bodyPr wrap="square" anchor="ctr" lIns="0" rIns="0" tIns="0" bIns="0"/>
-          <a:lstStyle/>
-          <a:p>
-            <a:pPr algn="l"/>
-            <a:r>
-              <a:rPr sz="1700" b="0" i="0">
-                <a:solidFill>
-                  <a:srgbClr val="202122"/>
-                </a:solidFill>
-                <a:latin typeface="Calibri"/>
-              </a:rPr>
-              <a:t>Suggest one way to reduce each waste stream.</a:t>
-            </a:r>
-          </a:p>
-        </p:txBody>
-      </p:sp>
-      <p:sp>
-        <p:nvSpPr>
-          <p:cNvPr id="17" name="Rounded Rectangle 16"/>
-          <p:cNvSpPr/>
-          <p:nvPr/>
-        </p:nvSpPr>
-        <p:spPr>
-          <a:xfrm>
-            <a:off x="7772400" y="1508760"/>
-            <a:ext cx="3867912" cy="4572000"/>
-          </a:xfrm>
-          <a:prstGeom prst="roundRect">
-            <a:avLst>
-              <a:gd name="adj" fmla="val 8000"/>
-            </a:avLst>
-          </a:prstGeom>
-          <a:solidFill>
-            <a:srgbClr val="EAF3FF"/>
-          </a:solidFill>
-          <a:ln>
-            <a:noFill/>
-          </a:ln>
-          <a:effectLst/>
-        </p:spPr>
-        <p:style>
-          <a:lnRef idx="1">
-            <a:schemeClr val="accent1"/>
-          </a:lnRef>
-          <a:fillRef idx="3">
-            <a:schemeClr val="accent1"/>
-          </a:fillRef>
-          <a:effectRef idx="2">
-            <a:schemeClr val="accent1"/>
-          </a:effectRef>
-          <a:fontRef idx="minor">
-            <a:schemeClr val="lt1"/>
-          </a:fontRef>
-        </p:style>
-        <p:txBody>
-          <a:bodyPr rtlCol="0" anchor="ctr"/>
-          <a:lstStyle/>
-          <a:p/>
-        </p:txBody>
-      </p:sp>
-      <p:sp>
-        <p:nvSpPr>
-          <p:cNvPr id="18" name="TextBox 17"/>
-          <p:cNvSpPr txBox="1"/>
-          <p:nvPr/>
-        </p:nvSpPr>
-        <p:spPr>
-          <a:xfrm>
-            <a:off x="8046720" y="1737360"/>
-            <a:ext cx="3291840" cy="365760"/>
-          </a:xfrm>
-          <a:prstGeom prst="rect">
-            <a:avLst/>
-          </a:prstGeom>
-          <a:noFill/>
-        </p:spPr>
-        <p:txBody>
-          <a:bodyPr wrap="square" anchor="t" lIns="0" rIns="0" tIns="0" bIns="0"/>
-          <a:lstStyle/>
-          <a:p>
-            <a:pPr algn="l"/>
-            <a:r>
-              <a:rPr sz="1300" b="1" i="0">
-                <a:solidFill>
-                  <a:srgbClr val="0645AD"/>
-                </a:solidFill>
-                <a:latin typeface="Calibri"/>
-              </a:rPr>
-              <a:t>SUCCESS CRITERIA</a:t>
-            </a:r>
-          </a:p>
-        </p:txBody>
-      </p:sp>
-      <p:sp>
-        <p:nvSpPr>
-          <p:cNvPr id="19" name="TextBox 18"/>
-          <p:cNvSpPr txBox="1"/>
-          <p:nvPr/>
-        </p:nvSpPr>
-        <p:spPr>
-          <a:xfrm>
-            <a:off x="8046720" y="2240280"/>
-            <a:ext cx="3337560" cy="3657600"/>
-          </a:xfrm>
-          <a:prstGeom prst="rect">
-            <a:avLst/>
-          </a:prstGeom>
-          <a:noFill/>
-        </p:spPr>
-        <p:txBody>
-          <a:bodyPr wrap="square" lIns="0" rIns="0" tIns="0" bIns="0">
-            <a:spAutoFit/>
-          </a:bodyPr>
-          <a:lstStyle/>
-          <a:p>
-            <a:pPr marL="274320" indent="-274320">
-              <a:spcAft>
-                <a:spcPts val="810"/>
-              </a:spcAft>
-              <a:buClr>
-                <a:srgbClr val="0645AD"/>
-              </a:buClr>
-              <a:buFont typeface="Arial"/>
-              <a:buChar char="•"/>
-            </a:pPr>
-            <a:r>
-              <a:rPr sz="1800" b="0">
-                <a:solidFill>
-                  <a:srgbClr val="202122"/>
-                </a:solidFill>
-                <a:latin typeface="Calibri"/>
-              </a:rPr>
-              <a:t>Hazardous waste identified</a:t>
-            </a:r>
-          </a:p>
-          <a:p>
-            <a:pPr marL="274320" indent="-274320">
-              <a:spcAft>
-                <a:spcPts val="810"/>
-              </a:spcAft>
-              <a:buClr>
-                <a:srgbClr val="0645AD"/>
-              </a:buClr>
-              <a:buFont typeface="Arial"/>
-              <a:buChar char="•"/>
-            </a:pPr>
-            <a:r>
-              <a:rPr sz="1800" b="0">
-                <a:solidFill>
-                  <a:srgbClr val="202122"/>
-                </a:solidFill>
-                <a:latin typeface="Calibri"/>
-              </a:rPr>
-              <a:t>Correct routes chosen</a:t>
-            </a:r>
-          </a:p>
-          <a:p>
-            <a:pPr marL="274320" indent="-274320">
-              <a:spcAft>
-                <a:spcPts val="810"/>
-              </a:spcAft>
-              <a:buClr>
-                <a:srgbClr val="0645AD"/>
-              </a:buClr>
-              <a:buFont typeface="Arial"/>
-              <a:buChar char="•"/>
-            </a:pPr>
-            <a:r>
-              <a:rPr sz="1800" b="0">
-                <a:solidFill>
-                  <a:srgbClr val="202122"/>
-                </a:solidFill>
-                <a:latin typeface="Calibri"/>
-              </a:rPr>
-              <a:t>Reduction ideas practical</a:t>
-            </a:r>
-          </a:p>
-        </p:txBody>
-      </p:sp>
-    </p:spTree>
-  </p:cSld>
-  <p:clrMapOvr>
-    <a:masterClrMapping/>
-  </p:clrMapOvr>
-</p:sld>
-</file>
-
-<file path=ppt/slides/slide9.xml><?xml version="1.0" encoding="utf-8"?>
-<p:sld xmlns:a="http://schemas.openxmlformats.org/drawingml/2006/main" xmlns:p="http://schemas.openxmlformats.org/presentationml/2006/main" xmlns:r="http://schemas.openxmlformats.org/officeDocument/2006/relationships">
-  <p:cSld>
-    <p:bg>
-      <p:bgPr>
-        <a:solidFill>
-          <a:srgbClr val="03306E"/>
-        </a:solidFill>
-        <a:effectLst/>
-      </p:bgPr>
-    </p:bg>
-    <p:spTree>
-      <p:nvGrpSpPr>
-        <p:cNvPr id="1" name=""/>
-        <p:cNvGrpSpPr/>
-        <p:nvPr/>
-      </p:nvGrpSpPr>
-      <p:grpSpPr/>
-      <p:sp>
-        <p:nvSpPr>
-          <p:cNvPr id="2" name="TextBox 1"/>
-          <p:cNvSpPr txBox="1"/>
-          <p:nvPr/>
-        </p:nvSpPr>
-        <p:spPr>
-          <a:xfrm>
-            <a:off x="548640" y="320040"/>
-            <a:ext cx="11094415" cy="274320"/>
-          </a:xfrm>
-          <a:prstGeom prst="rect">
-            <a:avLst/>
-          </a:prstGeom>
-          <a:noFill/>
-        </p:spPr>
-        <p:txBody>
-          <a:bodyPr wrap="square" anchor="t" lIns="0" rIns="0" tIns="0" bIns="0"/>
-          <a:lstStyle/>
-          <a:p>
-            <a:pPr algn="l"/>
-            <a:r>
-              <a:rPr sz="1100" b="1" i="0">
-                <a:solidFill>
-                  <a:srgbClr val="A9C8F0"/>
-                </a:solidFill>
-                <a:latin typeface="Calibri"/>
-              </a:rPr>
-              <a:t>ENGINEERING CORE  ·  Core topic 12</a:t>
-            </a:r>
-          </a:p>
-        </p:txBody>
-      </p:sp>
-      <p:sp>
-        <p:nvSpPr>
-          <p:cNvPr id="3" name="TextBox 2"/>
-          <p:cNvSpPr txBox="1"/>
-          <p:nvPr/>
-        </p:nvSpPr>
-        <p:spPr>
-          <a:xfrm>
-            <a:off x="548640" y="566928"/>
-            <a:ext cx="11094415" cy="822960"/>
-          </a:xfrm>
-          <a:prstGeom prst="rect">
-            <a:avLst/>
-          </a:prstGeom>
-          <a:noFill/>
-        </p:spPr>
-        <p:txBody>
-          <a:bodyPr wrap="square" anchor="ctr" lIns="0" rIns="0" tIns="0" bIns="0"/>
-          <a:lstStyle/>
-          <a:p>
-            <a:pPr algn="l"/>
-            <a:r>
-              <a:rPr sz="3200" b="1" i="0">
-                <a:solidFill>
-                  <a:srgbClr val="FFFFFF"/>
-                </a:solidFill>
-                <a:latin typeface="Cambria"/>
-              </a:rPr>
-              <a:t>Exit ticket</a:t>
-            </a:r>
-          </a:p>
-        </p:txBody>
-      </p:sp>
-      <p:sp>
-        <p:nvSpPr>
-          <p:cNvPr id="4" name="Oval 3"/>
-          <p:cNvSpPr/>
-          <p:nvPr/>
-        </p:nvSpPr>
-        <p:spPr>
-          <a:xfrm>
-            <a:off x="548640" y="1737360"/>
-            <a:ext cx="502920" cy="502920"/>
-          </a:xfrm>
-          <a:prstGeom prst="ellipse">
-            <a:avLst/>
-          </a:prstGeom>
-          <a:solidFill>
-            <a:srgbClr val="F2B705"/>
-          </a:solidFill>
-          <a:ln>
-            <a:noFill/>
-          </a:ln>
-          <a:effectLst/>
-        </p:spPr>
-        <p:style>
-          <a:lnRef idx="1">
-            <a:schemeClr val="accent1"/>
-          </a:lnRef>
-          <a:fillRef idx="3">
-            <a:schemeClr val="accent1"/>
-          </a:fillRef>
-          <a:effectRef idx="2">
-            <a:schemeClr val="accent1"/>
-          </a:effectRef>
-          <a:fontRef idx="minor">
-            <a:schemeClr val="lt1"/>
-          </a:fontRef>
-        </p:style>
-        <p:txBody>
-          <a:bodyPr rtlCol="0" anchor="ctr" lIns="0" rIns="0" tIns="0" bIns="0"/>
-          <a:lstStyle/>
-          <a:p>
-            <a:pPr algn="ctr"/>
-            <a:r>
-              <a:rPr sz="1700" b="1">
-                <a:solidFill>
-                  <a:srgbClr val="202122"/>
-                </a:solidFill>
-                <a:latin typeface="Calibri"/>
-              </a:rPr>
-              <a:t>1</a:t>
-            </a:r>
-          </a:p>
-        </p:txBody>
-      </p:sp>
-      <p:sp>
-        <p:nvSpPr>
-          <p:cNvPr id="5" name="TextBox 4"/>
-          <p:cNvSpPr txBox="1"/>
-          <p:nvPr/>
-        </p:nvSpPr>
-        <p:spPr>
-          <a:xfrm>
-            <a:off x="1325880" y="1645920"/>
-            <a:ext cx="6583680" cy="822960"/>
-          </a:xfrm>
-          <a:prstGeom prst="rect">
-            <a:avLst/>
-          </a:prstGeom>
-          <a:noFill/>
-        </p:spPr>
-        <p:txBody>
-          <a:bodyPr wrap="square" anchor="ctr" lIns="0" rIns="0" tIns="0" bIns="0"/>
-          <a:lstStyle/>
-          <a:p>
-            <a:pPr algn="l"/>
-            <a:r>
-              <a:rPr sz="2000" b="0" i="0">
-                <a:solidFill>
-                  <a:srgbClr val="FFFFFF"/>
-                </a:solidFill>
-                <a:latin typeface="Calibri"/>
-              </a:rPr>
-              <a:t>Why is landfill discouraged?</a:t>
-            </a:r>
-          </a:p>
-        </p:txBody>
-      </p:sp>
-      <p:sp>
-        <p:nvSpPr>
-          <p:cNvPr id="6" name="Oval 5"/>
-          <p:cNvSpPr/>
-          <p:nvPr/>
-        </p:nvSpPr>
-        <p:spPr>
-          <a:xfrm>
-            <a:off x="548640" y="2697480"/>
-            <a:ext cx="502920" cy="502920"/>
-          </a:xfrm>
-          <a:prstGeom prst="ellipse">
-            <a:avLst/>
-          </a:prstGeom>
-          <a:solidFill>
-            <a:srgbClr val="F2B705"/>
-          </a:solidFill>
-          <a:ln>
-            <a:noFill/>
-          </a:ln>
-          <a:effectLst/>
-        </p:spPr>
-        <p:style>
-          <a:lnRef idx="1">
-            <a:schemeClr val="accent1"/>
-          </a:lnRef>
-          <a:fillRef idx="3">
-            <a:schemeClr val="accent1"/>
-          </a:fillRef>
-          <a:effectRef idx="2">
-            <a:schemeClr val="accent1"/>
-          </a:effectRef>
-          <a:fontRef idx="minor">
-            <a:schemeClr val="lt1"/>
-          </a:fontRef>
-        </p:style>
-        <p:txBody>
-          <a:bodyPr rtlCol="0" anchor="ctr" lIns="0" rIns="0" tIns="0" bIns="0"/>
-          <a:lstStyle/>
-          <a:p>
-            <a:pPr algn="ctr"/>
-            <a:r>
-              <a:rPr sz="1700" b="1">
-                <a:solidFill>
-                  <a:srgbClr val="202122"/>
-                </a:solidFill>
-                <a:latin typeface="Calibri"/>
-              </a:rPr>
-              <a:t>2</a:t>
-            </a:r>
-          </a:p>
-        </p:txBody>
-      </p:sp>
-      <p:sp>
-        <p:nvSpPr>
-          <p:cNvPr id="7" name="TextBox 6"/>
-          <p:cNvSpPr txBox="1"/>
-          <p:nvPr/>
-        </p:nvSpPr>
-        <p:spPr>
-          <a:xfrm>
-            <a:off x="1325880" y="2606040"/>
-            <a:ext cx="6583680" cy="822960"/>
-          </a:xfrm>
-          <a:prstGeom prst="rect">
-            <a:avLst/>
-          </a:prstGeom>
-          <a:noFill/>
-        </p:spPr>
-        <p:txBody>
-          <a:bodyPr wrap="square" anchor="ctr" lIns="0" rIns="0" tIns="0" bIns="0"/>
-          <a:lstStyle/>
-          <a:p>
-            <a:pPr algn="l"/>
-            <a:r>
-              <a:rPr sz="2000" b="0" i="0">
-                <a:solidFill>
-                  <a:srgbClr val="FFFFFF"/>
-                </a:solidFill>
-                <a:latin typeface="Calibri"/>
-              </a:rPr>
-              <a:t>Who is responsible for environmental compliance?</a:t>
-            </a:r>
-          </a:p>
-        </p:txBody>
-      </p:sp>
-      <p:sp>
-        <p:nvSpPr>
-          <p:cNvPr id="8" name="Oval 7"/>
-          <p:cNvSpPr/>
-          <p:nvPr/>
-        </p:nvSpPr>
-        <p:spPr>
-          <a:xfrm>
-            <a:off x="548640" y="3657600"/>
-            <a:ext cx="502920" cy="502920"/>
-          </a:xfrm>
-          <a:prstGeom prst="ellipse">
-            <a:avLst/>
-          </a:prstGeom>
-          <a:solidFill>
-            <a:srgbClr val="F2B705"/>
-          </a:solidFill>
-          <a:ln>
-            <a:noFill/>
-          </a:ln>
-          <a:effectLst/>
-        </p:spPr>
-        <p:style>
-          <a:lnRef idx="1">
-            <a:schemeClr val="accent1"/>
-          </a:lnRef>
-          <a:fillRef idx="3">
-            <a:schemeClr val="accent1"/>
-          </a:fillRef>
-          <a:effectRef idx="2">
-            <a:schemeClr val="accent1"/>
-          </a:effectRef>
-          <a:fontRef idx="minor">
-            <a:schemeClr val="lt1"/>
-          </a:fontRef>
-        </p:style>
-        <p:txBody>
-          <a:bodyPr rtlCol="0" anchor="ctr" lIns="0" rIns="0" tIns="0" bIns="0"/>
-          <a:lstStyle/>
-          <a:p>
-            <a:pPr algn="ctr"/>
-            <a:r>
-              <a:rPr sz="1700" b="1">
-                <a:solidFill>
-                  <a:srgbClr val="202122"/>
-                </a:solidFill>
-                <a:latin typeface="Calibri"/>
-              </a:rPr>
-              <a:t>3</a:t>
-            </a:r>
-          </a:p>
-        </p:txBody>
-      </p:sp>
-      <p:sp>
-        <p:nvSpPr>
-          <p:cNvPr id="9" name="TextBox 8"/>
-          <p:cNvSpPr txBox="1"/>
-          <p:nvPr/>
-        </p:nvSpPr>
-        <p:spPr>
-          <a:xfrm>
-            <a:off x="1325880" y="3566160"/>
-            <a:ext cx="6583680" cy="822960"/>
-          </a:xfrm>
-          <a:prstGeom prst="rect">
-            <a:avLst/>
-          </a:prstGeom>
-          <a:noFill/>
-        </p:spPr>
-        <p:txBody>
-          <a:bodyPr wrap="square" anchor="ctr" lIns="0" rIns="0" tIns="0" bIns="0"/>
-          <a:lstStyle/>
-          <a:p>
-            <a:pPr algn="l"/>
-            <a:r>
-              <a:rPr sz="2000" b="0" i="0">
-                <a:solidFill>
-                  <a:srgbClr val="FFFFFF"/>
-                </a:solidFill>
-                <a:latin typeface="Calibri"/>
-              </a:rPr>
-              <a:t>Name one hazardous waste from engineering.</a:t>
-            </a:r>
-          </a:p>
-        </p:txBody>
-      </p:sp>
-      <p:sp>
-        <p:nvSpPr>
-          <p:cNvPr id="10" name="Rounded Rectangle 9"/>
-          <p:cNvSpPr/>
-          <p:nvPr/>
-        </p:nvSpPr>
-        <p:spPr>
-          <a:xfrm>
-            <a:off x="8229600" y="1645920"/>
-            <a:ext cx="3410712" cy="2926080"/>
-          </a:xfrm>
-          <a:prstGeom prst="roundRect">
-            <a:avLst>
-              <a:gd name="adj" fmla="val 8000"/>
-            </a:avLst>
-          </a:prstGeom>
-          <a:solidFill>
-            <a:srgbClr val="0645AD"/>
-          </a:solidFill>
-          <a:ln>
-            <a:noFill/>
-          </a:ln>
-          <a:effectLst/>
-        </p:spPr>
-        <p:style>
-          <a:lnRef idx="1">
-            <a:schemeClr val="accent1"/>
-          </a:lnRef>
-          <a:fillRef idx="3">
-            <a:schemeClr val="accent1"/>
-          </a:fillRef>
-          <a:effectRef idx="2">
-            <a:schemeClr val="accent1"/>
-          </a:effectRef>
-          <a:fontRef idx="minor">
-            <a:schemeClr val="lt1"/>
-          </a:fontRef>
-        </p:style>
-        <p:txBody>
-          <a:bodyPr rtlCol="0" anchor="ctr"/>
-          <a:lstStyle/>
-          <a:p/>
-        </p:txBody>
-      </p:sp>
-      <p:sp>
-        <p:nvSpPr>
-          <p:cNvPr id="11" name="TextBox 10"/>
-          <p:cNvSpPr txBox="1"/>
-          <p:nvPr/>
-        </p:nvSpPr>
-        <p:spPr>
-          <a:xfrm>
-            <a:off x="8503920" y="1874519"/>
-            <a:ext cx="2926080" cy="365760"/>
-          </a:xfrm>
-          <a:prstGeom prst="rect">
-            <a:avLst/>
-          </a:prstGeom>
-          <a:noFill/>
-        </p:spPr>
-        <p:txBody>
-          <a:bodyPr wrap="square" anchor="t" lIns="0" rIns="0" tIns="0" bIns="0"/>
-          <a:lstStyle/>
-          <a:p>
-            <a:pPr algn="l"/>
-            <a:r>
-              <a:rPr sz="1300" b="1" i="0">
-                <a:solidFill>
-                  <a:srgbClr val="A9C8F0"/>
-                </a:solidFill>
-                <a:latin typeface="Calibri"/>
-              </a:rPr>
-              <a:t>REVISE THIS TOPIC</a:t>
-            </a:r>
-          </a:p>
-        </p:txBody>
-      </p:sp>
-      <p:sp>
-        <p:nvSpPr>
-          <p:cNvPr id="12" name="TextBox 11"/>
-          <p:cNvSpPr txBox="1"/>
-          <p:nvPr/>
-        </p:nvSpPr>
-        <p:spPr>
-          <a:xfrm>
-            <a:off x="8503920" y="2286000"/>
-            <a:ext cx="2926080" cy="548640"/>
-          </a:xfrm>
-          <a:prstGeom prst="rect">
-            <a:avLst/>
-          </a:prstGeom>
-          <a:noFill/>
-        </p:spPr>
-        <p:txBody>
-          <a:bodyPr wrap="square" anchor="t" lIns="0" rIns="0" tIns="0" bIns="0"/>
-          <a:lstStyle/>
-          <a:p>
-            <a:pPr algn="l"/>
-            <a:r>
-              <a:rPr sz="1400" b="0" i="0">
-                <a:solidFill>
-                  <a:srgbClr val="FFFFFF"/>
-                </a:solidFill>
-                <a:latin typeface="Calibri"/>
-              </a:rPr>
-              <a:t>Revision notes for this lesson are on the study wiki:</a:t>
-            </a:r>
-          </a:p>
-        </p:txBody>
-      </p:sp>
-      <p:sp>
-        <p:nvSpPr>
-          <p:cNvPr id="13" name="TextBox 12"/>
-          <p:cNvSpPr txBox="1"/>
-          <p:nvPr/>
-        </p:nvSpPr>
-        <p:spPr>
-          <a:xfrm>
-            <a:off x="8503920" y="2926080"/>
-            <a:ext cx="2926080" cy="1463040"/>
-          </a:xfrm>
-          <a:prstGeom prst="rect">
-            <a:avLst/>
-          </a:prstGeom>
-          <a:noFill/>
-        </p:spPr>
-        <p:txBody>
-          <a:bodyPr wrap="square" anchor="t" lIns="0" rIns="0" tIns="0" bIns="0"/>
-          <a:lstStyle/>
-          <a:p>
-            <a:pPr algn="l"/>
-            <a:r>
-              <a:rPr sz="2000" b="1" i="0">
-                <a:solidFill>
-                  <a:srgbClr val="FFFFFF"/>
-                </a:solidFill>
-                <a:latin typeface="Cambria"/>
-              </a:rPr>
-              <a:t>Engineering Core, Part 2</a:t>
-            </a:r>
-          </a:p>
-        </p:txBody>
-      </p:sp>
-      <p:sp>
-        <p:nvSpPr>
-          <p:cNvPr id="14" name="TextBox 13"/>
-          <p:cNvSpPr txBox="1"/>
-          <p:nvPr/>
-        </p:nvSpPr>
-        <p:spPr>
-          <a:xfrm>
-            <a:off x="548640" y="5669280"/>
-            <a:ext cx="11094415" cy="548640"/>
-          </a:xfrm>
-          <a:prstGeom prst="rect">
-            <a:avLst/>
-          </a:prstGeom>
-          <a:noFill/>
-        </p:spPr>
-        <p:txBody>
-          <a:bodyPr wrap="square" anchor="t" lIns="0" rIns="0" tIns="0" bIns="0"/>
-          <a:lstStyle/>
-          <a:p>
-            <a:pPr algn="l"/>
-            <a:r>
-              <a:rPr sz="1200" b="0" i="0">
-                <a:solidFill>
-                  <a:srgbClr val="A9C8F0"/>
-                </a:solidFill>
-                <a:latin typeface="Calibri"/>
-              </a:rPr>
-              <a:t>https://lana6478.github.io/T-level-Design-Development-Engineering-Manufacturing/#/01-core-component/02-engineering-core-part2.md</a:t>
-            </a:r>
-          </a:p>
-        </p:txBody>
-      </p:sp>
     </p:spTree>
   </p:cSld>
   <p:clrMapOvr>
